--- a/docs/line-architect-development-program.pptx
+++ b/docs/line-architect-development-program.pptx
@@ -8,9 +8,12 @@
     <p:sldId id="256" r:id="rId2"/>
     <p:sldId id="257" r:id="rId3"/>
     <p:sldId id="258" r:id="rId4"/>
+    <p:sldId id="259" r:id="rId5"/>
+    <p:sldId id="260" r:id="rId6"/>
+    <p:sldId id="261" r:id="rId7"/>
   </p:sldIdLst>
   <p:notesMasterIdLst>
-    <p:notesMasterId r:id="rId5"/>
+    <p:notesMasterId r:id="rId8"/>
   </p:notesMasterIdLst>
   <p:sldSz cx="12192000" cy="6858000"/>
   <p:notesSz cx="6858000" cy="12192000"/>
@@ -704,6 +707,270 @@
             <a:fld id="{F7021451-1387-4CA6-816F-3879F97B5CBC}" type="slidenum">
               <a:rPr lang="en-US"/>
               <a:t>3</a:t>
+            </a:fld>
+            <a:endParaRPr lang="en-US"/>
+          </a:p>
+        </p:txBody>
+      </p:sp>
+    </p:spTree>
+    <p:extLst>
+      <p:ext uri="{BB962C8B-B14F-4D97-AF65-F5344CB8AC3E}">
+        <p14:creationId xmlns:p14="http://schemas.microsoft.com/office/powerpoint/2010/main" val="1024086991"/>
+      </p:ext>
+    </p:extLst>
+  </p:cSld>
+  <p:clrMapOvr>
+    <a:masterClrMapping/>
+  </p:clrMapOvr>
+</p:notes>
+</file>
+
+<file path=ppt/notesSlides/notesSlide4.xml><?xml version="1.0" encoding="utf-8"?>
+<p:notes xmlns:a="http://schemas.openxmlformats.org/drawingml/2006/main" xmlns:r="http://schemas.openxmlformats.org/officeDocument/2006/relationships" xmlns:p="http://schemas.openxmlformats.org/presentationml/2006/main">
+  <p:cSld>
+    <p:spTree>
+      <p:nvGrpSpPr>
+        <p:cNvPr id="1" name=""/>
+        <p:cNvGrpSpPr/>
+        <p:nvPr/>
+      </p:nvGrpSpPr>
+      <p:grpSpPr>
+        <a:xfrm>
+          <a:off x="0" y="0"/>
+          <a:ext cx="0" cy="0"/>
+          <a:chOff x="0" y="0"/>
+          <a:chExt cx="0" cy="0"/>
+        </a:xfrm>
+      </p:grpSpPr>
+      <p:sp>
+        <p:nvSpPr>
+          <p:cNvPr id="2" name="Slide Image Placeholder 1"/>
+          <p:cNvSpPr>
+            <a:spLocks noGrp="1" noRot="1" noChangeAspect="1"/>
+          </p:cNvSpPr>
+          <p:nvPr>
+            <p:ph type="sldImg"/>
+          </p:nvPr>
+        </p:nvSpPr>
+        <p:spPr/>
+      </p:sp>
+      <p:sp>
+        <p:nvSpPr>
+          <p:cNvPr id="3" name="Notes Placeholder 2"/>
+          <p:cNvSpPr>
+            <a:spLocks noGrp="1"/>
+          </p:cNvSpPr>
+          <p:nvPr>
+            <p:ph type="body" idx="1"/>
+          </p:nvPr>
+        </p:nvSpPr>
+        <p:spPr/>
+        <p:txBody>
+          <a:bodyPr/>
+          <a:lstStyle/>
+          <a:p>
+            <a:r>
+              <a:rPr lang="en-US" dirty="0"/>
+              <a:t/>
+            </a:r>
+            <a:endParaRPr lang="en-US" dirty="0"/>
+          </a:p>
+        </p:txBody>
+      </p:sp>
+      <p:sp>
+        <p:nvSpPr>
+          <p:cNvPr id="4" name="Slide Number Placeholder 3"/>
+          <p:cNvSpPr>
+            <a:spLocks noGrp="1"/>
+          </p:cNvSpPr>
+          <p:nvPr>
+            <p:ph type="sldNum" sz="quarter" idx="10"/>
+          </p:nvPr>
+        </p:nvSpPr>
+        <p:spPr/>
+        <p:txBody>
+          <a:bodyPr/>
+          <a:lstStyle/>
+          <a:p>
+            <a:fld id="{F7021451-1387-4CA6-816F-3879F97B5CBC}" type="slidenum">
+              <a:rPr lang="en-US"/>
+              <a:t>4</a:t>
+            </a:fld>
+            <a:endParaRPr lang="en-US"/>
+          </a:p>
+        </p:txBody>
+      </p:sp>
+    </p:spTree>
+    <p:extLst>
+      <p:ext uri="{BB962C8B-B14F-4D97-AF65-F5344CB8AC3E}">
+        <p14:creationId xmlns:p14="http://schemas.microsoft.com/office/powerpoint/2010/main" val="1024086991"/>
+      </p:ext>
+    </p:extLst>
+  </p:cSld>
+  <p:clrMapOvr>
+    <a:masterClrMapping/>
+  </p:clrMapOvr>
+</p:notes>
+</file>
+
+<file path=ppt/notesSlides/notesSlide5.xml><?xml version="1.0" encoding="utf-8"?>
+<p:notes xmlns:a="http://schemas.openxmlformats.org/drawingml/2006/main" xmlns:r="http://schemas.openxmlformats.org/officeDocument/2006/relationships" xmlns:p="http://schemas.openxmlformats.org/presentationml/2006/main">
+  <p:cSld>
+    <p:spTree>
+      <p:nvGrpSpPr>
+        <p:cNvPr id="1" name=""/>
+        <p:cNvGrpSpPr/>
+        <p:nvPr/>
+      </p:nvGrpSpPr>
+      <p:grpSpPr>
+        <a:xfrm>
+          <a:off x="0" y="0"/>
+          <a:ext cx="0" cy="0"/>
+          <a:chOff x="0" y="0"/>
+          <a:chExt cx="0" cy="0"/>
+        </a:xfrm>
+      </p:grpSpPr>
+      <p:sp>
+        <p:nvSpPr>
+          <p:cNvPr id="2" name="Slide Image Placeholder 1"/>
+          <p:cNvSpPr>
+            <a:spLocks noGrp="1" noRot="1" noChangeAspect="1"/>
+          </p:cNvSpPr>
+          <p:nvPr>
+            <p:ph type="sldImg"/>
+          </p:nvPr>
+        </p:nvSpPr>
+        <p:spPr/>
+      </p:sp>
+      <p:sp>
+        <p:nvSpPr>
+          <p:cNvPr id="3" name="Notes Placeholder 2"/>
+          <p:cNvSpPr>
+            <a:spLocks noGrp="1"/>
+          </p:cNvSpPr>
+          <p:nvPr>
+            <p:ph type="body" idx="1"/>
+          </p:nvPr>
+        </p:nvSpPr>
+        <p:spPr/>
+        <p:txBody>
+          <a:bodyPr/>
+          <a:lstStyle/>
+          <a:p>
+            <a:r>
+              <a:rPr lang="en-US" dirty="0"/>
+              <a:t/>
+            </a:r>
+            <a:endParaRPr lang="en-US" dirty="0"/>
+          </a:p>
+        </p:txBody>
+      </p:sp>
+      <p:sp>
+        <p:nvSpPr>
+          <p:cNvPr id="4" name="Slide Number Placeholder 3"/>
+          <p:cNvSpPr>
+            <a:spLocks noGrp="1"/>
+          </p:cNvSpPr>
+          <p:nvPr>
+            <p:ph type="sldNum" sz="quarter" idx="10"/>
+          </p:nvPr>
+        </p:nvSpPr>
+        <p:spPr/>
+        <p:txBody>
+          <a:bodyPr/>
+          <a:lstStyle/>
+          <a:p>
+            <a:fld id="{F7021451-1387-4CA6-816F-3879F97B5CBC}" type="slidenum">
+              <a:rPr lang="en-US"/>
+              <a:t>5</a:t>
+            </a:fld>
+            <a:endParaRPr lang="en-US"/>
+          </a:p>
+        </p:txBody>
+      </p:sp>
+    </p:spTree>
+    <p:extLst>
+      <p:ext uri="{BB962C8B-B14F-4D97-AF65-F5344CB8AC3E}">
+        <p14:creationId xmlns:p14="http://schemas.microsoft.com/office/powerpoint/2010/main" val="1024086991"/>
+      </p:ext>
+    </p:extLst>
+  </p:cSld>
+  <p:clrMapOvr>
+    <a:masterClrMapping/>
+  </p:clrMapOvr>
+</p:notes>
+</file>
+
+<file path=ppt/notesSlides/notesSlide6.xml><?xml version="1.0" encoding="utf-8"?>
+<p:notes xmlns:a="http://schemas.openxmlformats.org/drawingml/2006/main" xmlns:r="http://schemas.openxmlformats.org/officeDocument/2006/relationships" xmlns:p="http://schemas.openxmlformats.org/presentationml/2006/main">
+  <p:cSld>
+    <p:spTree>
+      <p:nvGrpSpPr>
+        <p:cNvPr id="1" name=""/>
+        <p:cNvGrpSpPr/>
+        <p:nvPr/>
+      </p:nvGrpSpPr>
+      <p:grpSpPr>
+        <a:xfrm>
+          <a:off x="0" y="0"/>
+          <a:ext cx="0" cy="0"/>
+          <a:chOff x="0" y="0"/>
+          <a:chExt cx="0" cy="0"/>
+        </a:xfrm>
+      </p:grpSpPr>
+      <p:sp>
+        <p:nvSpPr>
+          <p:cNvPr id="2" name="Slide Image Placeholder 1"/>
+          <p:cNvSpPr>
+            <a:spLocks noGrp="1" noRot="1" noChangeAspect="1"/>
+          </p:cNvSpPr>
+          <p:nvPr>
+            <p:ph type="sldImg"/>
+          </p:nvPr>
+        </p:nvSpPr>
+        <p:spPr/>
+      </p:sp>
+      <p:sp>
+        <p:nvSpPr>
+          <p:cNvPr id="3" name="Notes Placeholder 2"/>
+          <p:cNvSpPr>
+            <a:spLocks noGrp="1"/>
+          </p:cNvSpPr>
+          <p:nvPr>
+            <p:ph type="body" idx="1"/>
+          </p:nvPr>
+        </p:nvSpPr>
+        <p:spPr/>
+        <p:txBody>
+          <a:bodyPr/>
+          <a:lstStyle/>
+          <a:p>
+            <a:r>
+              <a:rPr lang="en-US" dirty="0"/>
+              <a:t/>
+            </a:r>
+            <a:endParaRPr lang="en-US" dirty="0"/>
+          </a:p>
+        </p:txBody>
+      </p:sp>
+      <p:sp>
+        <p:nvSpPr>
+          <p:cNvPr id="4" name="Slide Number Placeholder 3"/>
+          <p:cNvSpPr>
+            <a:spLocks noGrp="1"/>
+          </p:cNvSpPr>
+          <p:nvPr>
+            <p:ph type="sldNum" sz="quarter" idx="10"/>
+          </p:nvPr>
+        </p:nvSpPr>
+        <p:spPr/>
+        <p:txBody>
+          <a:bodyPr/>
+          <a:lstStyle/>
+          <a:p>
+            <a:fld id="{F7021451-1387-4CA6-816F-3879F97B5CBC}" type="slidenum">
+              <a:rPr lang="en-US"/>
+              <a:t>6</a:t>
             </a:fld>
             <a:endParaRPr lang="en-US"/>
           </a:p>
@@ -8078,6 +8345,6571 @@
 </p:sld>
 </file>
 
+<file path=ppt/slides/slide4.xml><?xml version="1.0" encoding="utf-8"?>
+<p:sld xmlns:a="http://schemas.openxmlformats.org/drawingml/2006/main" xmlns:r="http://schemas.openxmlformats.org/officeDocument/2006/relationships" xmlns:p="http://schemas.openxmlformats.org/presentationml/2006/main">
+  <p:cSld name="Slide 4">
+    <p:bg>
+      <p:bgPr>
+        <a:solidFill>
+          <a:srgbClr val="FFFFFF"/>
+        </a:solidFill>
+      </p:bgPr>
+    </p:bg>
+    <p:spTree>
+      <p:nvGrpSpPr>
+        <p:cNvPr id="1" name=""/>
+        <p:cNvGrpSpPr/>
+        <p:nvPr/>
+      </p:nvGrpSpPr>
+      <p:grpSpPr>
+        <a:xfrm>
+          <a:off x="0" y="0"/>
+          <a:ext cx="0" cy="0"/>
+          <a:chOff x="0" y="0"/>
+          <a:chExt cx="0" cy="0"/>
+        </a:xfrm>
+      </p:grpSpPr>
+      <p:sp>
+        <p:nvSpPr>
+          <p:cNvPr id="2" name="Text 0"/>
+          <p:cNvSpPr/>
+          <p:nvPr/>
+        </p:nvSpPr>
+        <p:spPr>
+          <a:xfrm>
+            <a:off x="274320" y="91440"/>
+            <a:ext cx="8229600" cy="365760"/>
+          </a:xfrm>
+          <a:prstGeom prst="rect">
+            <a:avLst/>
+          </a:prstGeom>
+          <a:noFill/>
+          <a:ln/>
+        </p:spPr>
+        <p:txBody>
+          <a:bodyPr wrap="square" lIns="0" tIns="0" rIns="0" bIns="0" rtlCol="0" anchor="ctr"/>
+          <a:lstStyle/>
+          <a:p>
+            <a:pPr indent="0" marL="0">
+              <a:buNone/>
+            </a:pPr>
+            <a:r>
+              <a:rPr lang="en-US" sz="1800" b="1" dirty="0">
+                <a:solidFill>
+                  <a:srgbClr val="1F3D20"/>
+                </a:solidFill>
+                <a:latin typeface="Meiryo UI" pitchFamily="34" charset="0"/>
+                <a:ea typeface="Meiryo UI" pitchFamily="34" charset="-122"/>
+                <a:cs typeface="Meiryo UI" pitchFamily="34" charset="-120"/>
+              </a:rPr>
+              <a:t>階層設計の詳細 — 技術×構想力マトリクス</a:t>
+            </a:r>
+            <a:endParaRPr lang="en-US" sz="1800" dirty="0"/>
+          </a:p>
+        </p:txBody>
+      </p:sp>
+      <p:sp>
+        <p:nvSpPr>
+          <p:cNvPr id="3" name="Text 1"/>
+          <p:cNvSpPr/>
+          <p:nvPr/>
+        </p:nvSpPr>
+        <p:spPr>
+          <a:xfrm>
+            <a:off x="274320" y="457200"/>
+            <a:ext cx="11640312" cy="365760"/>
+          </a:xfrm>
+          <a:prstGeom prst="rect">
+            <a:avLst/>
+          </a:prstGeom>
+          <a:noFill/>
+          <a:ln/>
+        </p:spPr>
+        <p:txBody>
+          <a:bodyPr wrap="square" lIns="0" tIns="0" rIns="0" bIns="0" rtlCol="0" anchor="t"/>
+          <a:lstStyle/>
+          <a:p>
+            <a:pPr indent="0" marL="0">
+              <a:lnSpc>
+                <a:spcPct val="115000"/>
+              </a:lnSpc>
+              <a:buNone/>
+            </a:pPr>
+            <a:r>
+              <a:rPr lang="en-US" sz="900" b="1" dirty="0">
+                <a:solidFill>
+                  <a:srgbClr val="B85042"/>
+                </a:solidFill>
+                <a:latin typeface="Meiryo UI" pitchFamily="34" charset="0"/>
+                <a:ea typeface="Meiryo UI" pitchFamily="34" charset="-122"/>
+                <a:cs typeface="Meiryo UI" pitchFamily="34" charset="-120"/>
+              </a:rPr>
+              <a:t>技術レベル(何ができるか)と構想力レベル(何を判断できるか)は独立した2軸。</a:t>
+            </a:r>
+            <a:endParaRPr lang="en-US" sz="900" dirty="0"/>
+          </a:p>
+          <a:p>
+            <a:pPr indent="0" marL="0">
+              <a:lnSpc>
+                <a:spcPct val="115000"/>
+              </a:lnSpc>
+              <a:buNone/>
+            </a:pPr>
+            <a:r>
+              <a:rPr lang="en-US" sz="900" b="1" dirty="0">
+                <a:solidFill>
+                  <a:srgbClr val="B85042"/>
+                </a:solidFill>
+                <a:latin typeface="Meiryo UI" pitchFamily="34" charset="0"/>
+                <a:ea typeface="Meiryo UI" pitchFamily="34" charset="-122"/>
+                <a:cs typeface="Meiryo UI" pitchFamily="34" charset="-120"/>
+              </a:rPr>
+              <a:t>目標はLevel2〜3×構想力C3〜C4の交点(★)であり、Level4(内製化)への到達は必須条件ではない。</a:t>
+            </a:r>
+            <a:endParaRPr lang="en-US" sz="900" dirty="0"/>
+          </a:p>
+        </p:txBody>
+      </p:sp>
+      <p:graphicFrame>
+        <p:nvGraphicFramePr>
+          <p:cNvPr id="5" name="Table 0"/>
+          <p:cNvGraphicFramePr>
+            <a:graphicFrameLocks noGrp="1"/>
+          </p:cNvGraphicFramePr>
+          <p:nvPr>
+            <p:extLst>
+              <p:ext uri="{D42A27DB-BD31-4B8C-83A1-F6EECF244321}">
+                <p14:modId xmlns:p14="http://schemas.microsoft.com/office/powerpoint/2010/main" val="1579011935"/>
+              </p:ext>
+            </p:extLst>
+          </p:nvPr>
+        </p:nvGraphicFramePr>
+        <p:xfrm>
+          <a:off x="274320" y="914400"/>
+          <a:ext cx="11640312" cy="914400"/>
+        </p:xfrm>
+        <a:graphic>
+          <a:graphicData uri="http://schemas.openxmlformats.org/drawingml/2006/table">
+            <a:tbl>
+              <a:tblPr/>
+              <a:tblGrid>
+                <a:gridCol w="2331720"/>
+                <a:gridCol w="2327148"/>
+                <a:gridCol w="2327148"/>
+                <a:gridCol w="2327148"/>
+                <a:gridCol w="2327148"/>
+              </a:tblGrid>
+              <a:tr h="457200">
+                <a:tc>
+                  <a:txBody>
+                    <a:bodyPr/>
+                    <a:lstStyle/>
+                    <a:p>
+                      <a:pPr algn="ctr" indent="0" marL="0">
+                        <a:buNone/>
+                      </a:pPr>
+                      <a:r>
+                        <a:rPr lang="en-US" sz="800" b="1" dirty="0">
+                          <a:solidFill>
+                            <a:srgbClr val="FFFFFF"/>
+                          </a:solidFill>
+                          <a:latin typeface="Meiryo UI" pitchFamily="34" charset="0"/>
+                          <a:ea typeface="Meiryo UI" pitchFamily="34" charset="-122"/>
+                          <a:cs typeface="Meiryo UI" pitchFamily="34" charset="-120"/>
+                        </a:rPr>
+                        <a:t>技術レベル ＼ 構想力</a:t>
+                      </a:r>
+                      <a:endParaRPr lang="en-US" sz="800" dirty="0">
+                        <a:latin typeface="Meiryo UI" charset="0"/>
+                        <a:ea typeface="Meiryo UI" charset="0"/>
+                        <a:cs typeface="Meiryo UI" charset="0"/>
+                      </a:endParaRPr>
+                    </a:p>
+                  </a:txBody>
+                  <a:tcPr marL="54864" marR="54864" marT="54864" marB="54864" anchor="ctr">
+                    <a:lnL w="9525" cap="flat" cmpd="sng" algn="ctr">
+                      <a:solidFill>
+                        <a:srgbClr val="D3DED0"/>
+                      </a:solidFill>
+                      <a:prstDash val="solid"/>
+                      <a:round/>
+                      <a:headEnd type="none" w="med" len="med"/>
+                      <a:tailEnd type="none" w="med" len="med"/>
+                    </a:lnL>
+                    <a:lnR w="9525" cap="flat" cmpd="sng" algn="ctr">
+                      <a:solidFill>
+                        <a:srgbClr val="D3DED0"/>
+                      </a:solidFill>
+                      <a:prstDash val="solid"/>
+                      <a:round/>
+                      <a:headEnd type="none" w="med" len="med"/>
+                      <a:tailEnd type="none" w="med" len="med"/>
+                    </a:lnR>
+                    <a:lnT w="9525" cap="flat" cmpd="sng" algn="ctr">
+                      <a:solidFill>
+                        <a:srgbClr val="D3DED0"/>
+                      </a:solidFill>
+                      <a:prstDash val="solid"/>
+                      <a:round/>
+                      <a:headEnd type="none" w="med" len="med"/>
+                      <a:tailEnd type="none" w="med" len="med"/>
+                    </a:lnT>
+                    <a:lnB w="9525" cap="flat" cmpd="sng" algn="ctr">
+                      <a:solidFill>
+                        <a:srgbClr val="D3DED0"/>
+                      </a:solidFill>
+                      <a:prstDash val="solid"/>
+                      <a:round/>
+                      <a:headEnd type="none" w="med" len="med"/>
+                      <a:tailEnd type="none" w="med" len="med"/>
+                    </a:lnB>
+                    <a:solidFill>
+                      <a:srgbClr val="2C5F2D"/>
+                    </a:solidFill>
+                  </a:tcPr>
+                </a:tc>
+                <a:tc>
+                  <a:txBody>
+                    <a:bodyPr/>
+                    <a:lstStyle/>
+                    <a:p>
+                      <a:pPr algn="ctr" indent="0" marL="0">
+                        <a:buNone/>
+                      </a:pPr>
+                      <a:r>
+                        <a:rPr lang="en-US" sz="800" b="1" dirty="0">
+                          <a:solidFill>
+                            <a:srgbClr val="FFFFFF"/>
+                          </a:solidFill>
+                          <a:latin typeface="Meiryo UI" pitchFamily="34" charset="0"/>
+                          <a:ea typeface="Meiryo UI" pitchFamily="34" charset="-122"/>
+                          <a:cs typeface="Meiryo UI" pitchFamily="34" charset="-120"/>
+                        </a:rPr>
+                        <a:t>C1 基準を疑う</a:t>
+                      </a:r>
+                      <a:endParaRPr lang="en-US" sz="800" dirty="0">
+                        <a:latin typeface="Meiryo UI" charset="0"/>
+                        <a:ea typeface="Meiryo UI" charset="0"/>
+                        <a:cs typeface="Meiryo UI" charset="0"/>
+                      </a:endParaRPr>
+                    </a:p>
+                    <a:p>
+                      <a:pPr algn="ctr" indent="0" marL="0">
+                        <a:buNone/>
+                      </a:pPr>
+                      <a:r>
+                        <a:rPr lang="en-US" sz="800" b="1" dirty="0">
+                          <a:solidFill>
+                            <a:srgbClr val="FFFFFF"/>
+                          </a:solidFill>
+                          <a:latin typeface="Meiryo UI" pitchFamily="34" charset="0"/>
+                          <a:ea typeface="Meiryo UI" pitchFamily="34" charset="-122"/>
+                          <a:cs typeface="Meiryo UI" pitchFamily="34" charset="-120"/>
+                        </a:rPr>
+                        <a:t>「そもそも必要か?」</a:t>
+                      </a:r>
+                      <a:endParaRPr lang="en-US" sz="800" dirty="0">
+                        <a:latin typeface="Meiryo UI" charset="0"/>
+                        <a:ea typeface="Meiryo UI" charset="0"/>
+                        <a:cs typeface="Meiryo UI" charset="0"/>
+                      </a:endParaRPr>
+                    </a:p>
+                  </a:txBody>
+                  <a:tcPr marL="54864" marR="54864" marT="54864" marB="54864" anchor="ctr">
+                    <a:lnL w="9525" cap="flat" cmpd="sng" algn="ctr">
+                      <a:solidFill>
+                        <a:srgbClr val="D3DED0"/>
+                      </a:solidFill>
+                      <a:prstDash val="solid"/>
+                      <a:round/>
+                      <a:headEnd type="none" w="med" len="med"/>
+                      <a:tailEnd type="none" w="med" len="med"/>
+                    </a:lnL>
+                    <a:lnR w="9525" cap="flat" cmpd="sng" algn="ctr">
+                      <a:solidFill>
+                        <a:srgbClr val="D3DED0"/>
+                      </a:solidFill>
+                      <a:prstDash val="solid"/>
+                      <a:round/>
+                      <a:headEnd type="none" w="med" len="med"/>
+                      <a:tailEnd type="none" w="med" len="med"/>
+                    </a:lnR>
+                    <a:lnT w="9525" cap="flat" cmpd="sng" algn="ctr">
+                      <a:solidFill>
+                        <a:srgbClr val="D3DED0"/>
+                      </a:solidFill>
+                      <a:prstDash val="solid"/>
+                      <a:round/>
+                      <a:headEnd type="none" w="med" len="med"/>
+                      <a:tailEnd type="none" w="med" len="med"/>
+                    </a:lnT>
+                    <a:lnB w="9525" cap="flat" cmpd="sng" algn="ctr">
+                      <a:solidFill>
+                        <a:srgbClr val="D3DED0"/>
+                      </a:solidFill>
+                      <a:prstDash val="solid"/>
+                      <a:round/>
+                      <a:headEnd type="none" w="med" len="med"/>
+                      <a:tailEnd type="none" w="med" len="med"/>
+                    </a:lnB>
+                    <a:solidFill>
+                      <a:srgbClr val="2C5F2D"/>
+                    </a:solidFill>
+                  </a:tcPr>
+                </a:tc>
+                <a:tc>
+                  <a:txBody>
+                    <a:bodyPr/>
+                    <a:lstStyle/>
+                    <a:p>
+                      <a:pPr algn="ctr" indent="0" marL="0">
+                        <a:buNone/>
+                      </a:pPr>
+                      <a:r>
+                        <a:rPr lang="en-US" sz="800" b="1" dirty="0">
+                          <a:solidFill>
+                            <a:srgbClr val="FFFFFF"/>
+                          </a:solidFill>
+                          <a:latin typeface="Meiryo UI" pitchFamily="34" charset="0"/>
+                          <a:ea typeface="Meiryo UI" pitchFamily="34" charset="-122"/>
+                          <a:cs typeface="Meiryo UI" pitchFamily="34" charset="-120"/>
+                        </a:rPr>
+                        <a:t>C2 工程を再設計する</a:t>
+                      </a:r>
+                      <a:endParaRPr lang="en-US" sz="800" dirty="0">
+                        <a:latin typeface="Meiryo UI" charset="0"/>
+                        <a:ea typeface="Meiryo UI" charset="0"/>
+                        <a:cs typeface="Meiryo UI" charset="0"/>
+                      </a:endParaRPr>
+                    </a:p>
+                    <a:p>
+                      <a:pPr algn="ctr" indent="0" marL="0">
+                        <a:buNone/>
+                      </a:pPr>
+                      <a:r>
+                        <a:rPr lang="en-US" sz="800" b="1" dirty="0">
+                          <a:solidFill>
+                            <a:srgbClr val="FFFFFF"/>
+                          </a:solidFill>
+                          <a:latin typeface="Meiryo UI" pitchFamily="34" charset="0"/>
+                          <a:ea typeface="Meiryo UI" pitchFamily="34" charset="-122"/>
+                          <a:cs typeface="Meiryo UI" pitchFamily="34" charset="-120"/>
+                        </a:rPr>
+                        <a:t>「少なくできないか?」</a:t>
+                      </a:r>
+                      <a:endParaRPr lang="en-US" sz="800" dirty="0">
+                        <a:latin typeface="Meiryo UI" charset="0"/>
+                        <a:ea typeface="Meiryo UI" charset="0"/>
+                        <a:cs typeface="Meiryo UI" charset="0"/>
+                      </a:endParaRPr>
+                    </a:p>
+                  </a:txBody>
+                  <a:tcPr marL="54864" marR="54864" marT="54864" marB="54864" anchor="ctr">
+                    <a:lnL w="9525" cap="flat" cmpd="sng" algn="ctr">
+                      <a:solidFill>
+                        <a:srgbClr val="D3DED0"/>
+                      </a:solidFill>
+                      <a:prstDash val="solid"/>
+                      <a:round/>
+                      <a:headEnd type="none" w="med" len="med"/>
+                      <a:tailEnd type="none" w="med" len="med"/>
+                    </a:lnL>
+                    <a:lnR w="9525" cap="flat" cmpd="sng" algn="ctr">
+                      <a:solidFill>
+                        <a:srgbClr val="D3DED0"/>
+                      </a:solidFill>
+                      <a:prstDash val="solid"/>
+                      <a:round/>
+                      <a:headEnd type="none" w="med" len="med"/>
+                      <a:tailEnd type="none" w="med" len="med"/>
+                    </a:lnR>
+                    <a:lnT w="9525" cap="flat" cmpd="sng" algn="ctr">
+                      <a:solidFill>
+                        <a:srgbClr val="D3DED0"/>
+                      </a:solidFill>
+                      <a:prstDash val="solid"/>
+                      <a:round/>
+                      <a:headEnd type="none" w="med" len="med"/>
+                      <a:tailEnd type="none" w="med" len="med"/>
+                    </a:lnT>
+                    <a:lnB w="9525" cap="flat" cmpd="sng" algn="ctr">
+                      <a:solidFill>
+                        <a:srgbClr val="D3DED0"/>
+                      </a:solidFill>
+                      <a:prstDash val="solid"/>
+                      <a:round/>
+                      <a:headEnd type="none" w="med" len="med"/>
+                      <a:tailEnd type="none" w="med" len="med"/>
+                    </a:lnB>
+                    <a:solidFill>
+                      <a:srgbClr val="2C5F2D"/>
+                    </a:solidFill>
+                  </a:tcPr>
+                </a:tc>
+                <a:tc>
+                  <a:txBody>
+                    <a:bodyPr/>
+                    <a:lstStyle/>
+                    <a:p>
+                      <a:pPr algn="ctr" indent="0" marL="0">
+                        <a:buNone/>
+                      </a:pPr>
+                      <a:r>
+                        <a:rPr lang="en-US" sz="800" b="1" dirty="0">
+                          <a:solidFill>
+                            <a:srgbClr val="FFFFFF"/>
+                          </a:solidFill>
+                          <a:latin typeface="Meiryo UI" pitchFamily="34" charset="0"/>
+                          <a:ea typeface="Meiryo UI" pitchFamily="34" charset="-122"/>
+                          <a:cs typeface="Meiryo UI" pitchFamily="34" charset="-120"/>
+                        </a:rPr>
+                        <a:t>C3 投資判断する</a:t>
+                      </a:r>
+                      <a:endParaRPr lang="en-US" sz="800" dirty="0">
+                        <a:latin typeface="Meiryo UI" charset="0"/>
+                        <a:ea typeface="Meiryo UI" charset="0"/>
+                        <a:cs typeface="Meiryo UI" charset="0"/>
+                      </a:endParaRPr>
+                    </a:p>
+                    <a:p>
+                      <a:pPr algn="ctr" indent="0" marL="0">
+                        <a:buNone/>
+                      </a:pPr>
+                      <a:r>
+                        <a:rPr lang="en-US" sz="800" b="1" dirty="0">
+                          <a:solidFill>
+                            <a:srgbClr val="FFFFFF"/>
+                          </a:solidFill>
+                          <a:latin typeface="Meiryo UI" pitchFamily="34" charset="0"/>
+                          <a:ea typeface="Meiryo UI" pitchFamily="34" charset="-122"/>
+                          <a:cs typeface="Meiryo UI" pitchFamily="34" charset="-120"/>
+                        </a:rPr>
+                        <a:t>「投資に値するか?」</a:t>
+                      </a:r>
+                      <a:endParaRPr lang="en-US" sz="800" dirty="0">
+                        <a:latin typeface="Meiryo UI" charset="0"/>
+                        <a:ea typeface="Meiryo UI" charset="0"/>
+                        <a:cs typeface="Meiryo UI" charset="0"/>
+                      </a:endParaRPr>
+                    </a:p>
+                  </a:txBody>
+                  <a:tcPr marL="54864" marR="54864" marT="54864" marB="54864" anchor="ctr">
+                    <a:lnL w="9525" cap="flat" cmpd="sng" algn="ctr">
+                      <a:solidFill>
+                        <a:srgbClr val="D3DED0"/>
+                      </a:solidFill>
+                      <a:prstDash val="solid"/>
+                      <a:round/>
+                      <a:headEnd type="none" w="med" len="med"/>
+                      <a:tailEnd type="none" w="med" len="med"/>
+                    </a:lnL>
+                    <a:lnR w="9525" cap="flat" cmpd="sng" algn="ctr">
+                      <a:solidFill>
+                        <a:srgbClr val="D3DED0"/>
+                      </a:solidFill>
+                      <a:prstDash val="solid"/>
+                      <a:round/>
+                      <a:headEnd type="none" w="med" len="med"/>
+                      <a:tailEnd type="none" w="med" len="med"/>
+                    </a:lnR>
+                    <a:lnT w="9525" cap="flat" cmpd="sng" algn="ctr">
+                      <a:solidFill>
+                        <a:srgbClr val="D3DED0"/>
+                      </a:solidFill>
+                      <a:prstDash val="solid"/>
+                      <a:round/>
+                      <a:headEnd type="none" w="med" len="med"/>
+                      <a:tailEnd type="none" w="med" len="med"/>
+                    </a:lnT>
+                    <a:lnB w="9525" cap="flat" cmpd="sng" algn="ctr">
+                      <a:solidFill>
+                        <a:srgbClr val="D3DED0"/>
+                      </a:solidFill>
+                      <a:prstDash val="solid"/>
+                      <a:round/>
+                      <a:headEnd type="none" w="med" len="med"/>
+                      <a:tailEnd type="none" w="med" len="med"/>
+                    </a:lnB>
+                    <a:solidFill>
+                      <a:srgbClr val="2C5F2D"/>
+                    </a:solidFill>
+                  </a:tcPr>
+                </a:tc>
+                <a:tc>
+                  <a:txBody>
+                    <a:bodyPr/>
+                    <a:lstStyle/>
+                    <a:p>
+                      <a:pPr algn="ctr" indent="0" marL="0">
+                        <a:buNone/>
+                      </a:pPr>
+                      <a:r>
+                        <a:rPr lang="en-US" sz="800" b="1" dirty="0">
+                          <a:solidFill>
+                            <a:srgbClr val="FFFFFF"/>
+                          </a:solidFill>
+                          <a:latin typeface="Meiryo UI" pitchFamily="34" charset="0"/>
+                          <a:ea typeface="Meiryo UI" pitchFamily="34" charset="-122"/>
+                          <a:cs typeface="Meiryo UI" pitchFamily="34" charset="-120"/>
+                        </a:rPr>
+                        <a:t>C4 組織を動かす</a:t>
+                      </a:r>
+                      <a:endParaRPr lang="en-US" sz="800" dirty="0">
+                        <a:latin typeface="Meiryo UI" charset="0"/>
+                        <a:ea typeface="Meiryo UI" charset="0"/>
+                        <a:cs typeface="Meiryo UI" charset="0"/>
+                      </a:endParaRPr>
+                    </a:p>
+                    <a:p>
+                      <a:pPr algn="ctr" indent="0" marL="0">
+                        <a:buNone/>
+                      </a:pPr>
+                      <a:r>
+                        <a:rPr lang="en-US" sz="800" b="1" dirty="0">
+                          <a:solidFill>
+                            <a:srgbClr val="FFFFFF"/>
+                          </a:solidFill>
+                          <a:latin typeface="Meiryo UI" pitchFamily="34" charset="0"/>
+                          <a:ea typeface="Meiryo UI" pitchFamily="34" charset="-122"/>
+                          <a:cs typeface="Meiryo UI" pitchFamily="34" charset="-120"/>
+                        </a:rPr>
+                        <a:t>「どう合意させるか?」</a:t>
+                      </a:r>
+                      <a:endParaRPr lang="en-US" sz="800" dirty="0">
+                        <a:latin typeface="Meiryo UI" charset="0"/>
+                        <a:ea typeface="Meiryo UI" charset="0"/>
+                        <a:cs typeface="Meiryo UI" charset="0"/>
+                      </a:endParaRPr>
+                    </a:p>
+                  </a:txBody>
+                  <a:tcPr marL="54864" marR="54864" marT="54864" marB="54864" anchor="ctr">
+                    <a:lnL w="9525" cap="flat" cmpd="sng" algn="ctr">
+                      <a:solidFill>
+                        <a:srgbClr val="D3DED0"/>
+                      </a:solidFill>
+                      <a:prstDash val="solid"/>
+                      <a:round/>
+                      <a:headEnd type="none" w="med" len="med"/>
+                      <a:tailEnd type="none" w="med" len="med"/>
+                    </a:lnL>
+                    <a:lnR w="9525" cap="flat" cmpd="sng" algn="ctr">
+                      <a:solidFill>
+                        <a:srgbClr val="D3DED0"/>
+                      </a:solidFill>
+                      <a:prstDash val="solid"/>
+                      <a:round/>
+                      <a:headEnd type="none" w="med" len="med"/>
+                      <a:tailEnd type="none" w="med" len="med"/>
+                    </a:lnR>
+                    <a:lnT w="9525" cap="flat" cmpd="sng" algn="ctr">
+                      <a:solidFill>
+                        <a:srgbClr val="D3DED0"/>
+                      </a:solidFill>
+                      <a:prstDash val="solid"/>
+                      <a:round/>
+                      <a:headEnd type="none" w="med" len="med"/>
+                      <a:tailEnd type="none" w="med" len="med"/>
+                    </a:lnT>
+                    <a:lnB w="9525" cap="flat" cmpd="sng" algn="ctr">
+                      <a:solidFill>
+                        <a:srgbClr val="D3DED0"/>
+                      </a:solidFill>
+                      <a:prstDash val="solid"/>
+                      <a:round/>
+                      <a:headEnd type="none" w="med" len="med"/>
+                      <a:tailEnd type="none" w="med" len="med"/>
+                    </a:lnB>
+                    <a:solidFill>
+                      <a:srgbClr val="2C5F2D"/>
+                    </a:solidFill>
+                  </a:tcPr>
+                </a:tc>
+              </a:tr>
+              <a:tr h="777240">
+                <a:tc>
+                  <a:txBody>
+                    <a:bodyPr/>
+                    <a:lstStyle/>
+                    <a:p>
+                      <a:pPr algn="l" indent="0" marL="0">
+                        <a:buNone/>
+                      </a:pPr>
+                      <a:r>
+                        <a:rPr lang="en-US" sz="760" b="1" dirty="0">
+                          <a:solidFill>
+                            <a:srgbClr val="1F3D20"/>
+                          </a:solidFill>
+                          <a:latin typeface="Meiryo UI" pitchFamily="34" charset="0"/>
+                          <a:ea typeface="Meiryo UI" pitchFamily="34" charset="-122"/>
+                          <a:cs typeface="Meiryo UI" pitchFamily="34" charset="-120"/>
+                        </a:rPr>
+                        <a:t>Level1 操作</a:t>
+                      </a:r>
+                      <a:endParaRPr lang="en-US" sz="760" dirty="0">
+                        <a:latin typeface="Meiryo UI" charset="0"/>
+                        <a:ea typeface="Meiryo UI" charset="0"/>
+                        <a:cs typeface="Meiryo UI" charset="0"/>
+                      </a:endParaRPr>
+                    </a:p>
+                    <a:p>
+                      <a:pPr algn="l" indent="0" marL="0">
+                        <a:buNone/>
+                      </a:pPr>
+                      <a:r>
+                        <a:rPr lang="en-US" sz="760" b="1" dirty="0">
+                          <a:solidFill>
+                            <a:srgbClr val="1F3D20"/>
+                          </a:solidFill>
+                          <a:latin typeface="Meiryo UI" pitchFamily="34" charset="0"/>
+                          <a:ea typeface="Meiryo UI" pitchFamily="34" charset="-122"/>
+                          <a:cs typeface="Meiryo UI" pitchFamily="34" charset="-120"/>
+                        </a:rPr>
+                        <a:t>(基本操作・タスク設定)</a:t>
+                      </a:r>
+                      <a:endParaRPr lang="en-US" sz="760" dirty="0">
+                        <a:latin typeface="Meiryo UI" charset="0"/>
+                        <a:ea typeface="Meiryo UI" charset="0"/>
+                        <a:cs typeface="Meiryo UI" charset="0"/>
+                      </a:endParaRPr>
+                    </a:p>
+                  </a:txBody>
+                  <a:tcPr marL="54864" marR="54864" marT="54864" marB="54864" anchor="ctr">
+                    <a:lnL w="9525" cap="flat" cmpd="sng" algn="ctr">
+                      <a:solidFill>
+                        <a:srgbClr val="D3DED0"/>
+                      </a:solidFill>
+                      <a:prstDash val="solid"/>
+                      <a:round/>
+                      <a:headEnd type="none" w="med" len="med"/>
+                      <a:tailEnd type="none" w="med" len="med"/>
+                    </a:lnL>
+                    <a:lnR w="9525" cap="flat" cmpd="sng" algn="ctr">
+                      <a:solidFill>
+                        <a:srgbClr val="D3DED0"/>
+                      </a:solidFill>
+                      <a:prstDash val="solid"/>
+                      <a:round/>
+                      <a:headEnd type="none" w="med" len="med"/>
+                      <a:tailEnd type="none" w="med" len="med"/>
+                    </a:lnR>
+                    <a:lnT w="9525" cap="flat" cmpd="sng" algn="ctr">
+                      <a:solidFill>
+                        <a:srgbClr val="D3DED0"/>
+                      </a:solidFill>
+                      <a:prstDash val="solid"/>
+                      <a:round/>
+                      <a:headEnd type="none" w="med" len="med"/>
+                      <a:tailEnd type="none" w="med" len="med"/>
+                    </a:lnT>
+                    <a:lnB w="9525" cap="flat" cmpd="sng" algn="ctr">
+                      <a:solidFill>
+                        <a:srgbClr val="D3DED0"/>
+                      </a:solidFill>
+                      <a:prstDash val="solid"/>
+                      <a:round/>
+                      <a:headEnd type="none" w="med" len="med"/>
+                      <a:tailEnd type="none" w="med" len="med"/>
+                    </a:lnB>
+                    <a:solidFill>
+                      <a:srgbClr val="DFEBDB"/>
+                    </a:solidFill>
+                  </a:tcPr>
+                </a:tc>
+                <a:tc>
+                  <a:txBody>
+                    <a:bodyPr/>
+                    <a:lstStyle/>
+                    <a:p>
+                      <a:pPr algn="l" indent="0" marL="0">
+                        <a:buNone/>
+                      </a:pPr>
+                      <a:r>
+                        <a:rPr lang="en-US" sz="700" dirty="0">
+                          <a:solidFill>
+                            <a:srgbClr val="2B2B2B"/>
+                          </a:solidFill>
+                          <a:latin typeface="Meiryo UI" pitchFamily="34" charset="0"/>
+                          <a:ea typeface="Meiryo UI" pitchFamily="34" charset="-122"/>
+                          <a:cs typeface="Meiryo UI" pitchFamily="34" charset="-120"/>
+                        </a:rPr>
+                        <a:t>指示された作業の非効率に気づける</a:t>
+                      </a:r>
+                      <a:endParaRPr lang="en-US" sz="700" dirty="0">
+                        <a:latin typeface="Meiryo UI" charset="0"/>
+                        <a:ea typeface="Meiryo UI" charset="0"/>
+                        <a:cs typeface="Meiryo UI" charset="0"/>
+                      </a:endParaRPr>
+                    </a:p>
+                  </a:txBody>
+                  <a:tcPr marL="54864" marR="54864" marT="54864" marB="54864" anchor="ctr">
+                    <a:lnL w="9525" cap="flat" cmpd="sng" algn="ctr">
+                      <a:solidFill>
+                        <a:srgbClr val="D3DED0"/>
+                      </a:solidFill>
+                      <a:prstDash val="solid"/>
+                      <a:round/>
+                      <a:headEnd type="none" w="med" len="med"/>
+                      <a:tailEnd type="none" w="med" len="med"/>
+                    </a:lnL>
+                    <a:lnR w="9525" cap="flat" cmpd="sng" algn="ctr">
+                      <a:solidFill>
+                        <a:srgbClr val="D3DED0"/>
+                      </a:solidFill>
+                      <a:prstDash val="solid"/>
+                      <a:round/>
+                      <a:headEnd type="none" w="med" len="med"/>
+                      <a:tailEnd type="none" w="med" len="med"/>
+                    </a:lnR>
+                    <a:lnT w="9525" cap="flat" cmpd="sng" algn="ctr">
+                      <a:solidFill>
+                        <a:srgbClr val="D3DED0"/>
+                      </a:solidFill>
+                      <a:prstDash val="solid"/>
+                      <a:round/>
+                      <a:headEnd type="none" w="med" len="med"/>
+                      <a:tailEnd type="none" w="med" len="med"/>
+                    </a:lnT>
+                    <a:lnB w="9525" cap="flat" cmpd="sng" algn="ctr">
+                      <a:solidFill>
+                        <a:srgbClr val="D3DED0"/>
+                      </a:solidFill>
+                      <a:prstDash val="solid"/>
+                      <a:round/>
+                      <a:headEnd type="none" w="med" len="med"/>
+                      <a:tailEnd type="none" w="med" len="med"/>
+                    </a:lnB>
+                    <a:solidFill>
+                      <a:srgbClr val="FFFFFF"/>
+                    </a:solidFill>
+                  </a:tcPr>
+                </a:tc>
+                <a:tc>
+                  <a:txBody>
+                    <a:bodyPr/>
+                    <a:lstStyle/>
+                    <a:p>
+                      <a:pPr algn="l" indent="0" marL="0">
+                        <a:buNone/>
+                      </a:pPr>
+                      <a:r>
+                        <a:rPr lang="en-US" sz="700" dirty="0">
+                          <a:solidFill>
+                            <a:srgbClr val="2B2B2B"/>
+                          </a:solidFill>
+                          <a:latin typeface="Meiryo UI" pitchFamily="34" charset="0"/>
+                          <a:ea typeface="Meiryo UI" pitchFamily="34" charset="-122"/>
+                          <a:cs typeface="Meiryo UI" pitchFamily="34" charset="-120"/>
+                        </a:rPr>
+                        <a:t>指示があれば手順を組み替えられる</a:t>
+                      </a:r>
+                      <a:endParaRPr lang="en-US" sz="700" dirty="0">
+                        <a:latin typeface="Meiryo UI" charset="0"/>
+                        <a:ea typeface="Meiryo UI" charset="0"/>
+                        <a:cs typeface="Meiryo UI" charset="0"/>
+                      </a:endParaRPr>
+                    </a:p>
+                  </a:txBody>
+                  <a:tcPr marL="54864" marR="54864" marT="54864" marB="54864" anchor="ctr">
+                    <a:lnL w="9525" cap="flat" cmpd="sng" algn="ctr">
+                      <a:solidFill>
+                        <a:srgbClr val="D3DED0"/>
+                      </a:solidFill>
+                      <a:prstDash val="solid"/>
+                      <a:round/>
+                      <a:headEnd type="none" w="med" len="med"/>
+                      <a:tailEnd type="none" w="med" len="med"/>
+                    </a:lnL>
+                    <a:lnR w="9525" cap="flat" cmpd="sng" algn="ctr">
+                      <a:solidFill>
+                        <a:srgbClr val="D3DED0"/>
+                      </a:solidFill>
+                      <a:prstDash val="solid"/>
+                      <a:round/>
+                      <a:headEnd type="none" w="med" len="med"/>
+                      <a:tailEnd type="none" w="med" len="med"/>
+                    </a:lnR>
+                    <a:lnT w="9525" cap="flat" cmpd="sng" algn="ctr">
+                      <a:solidFill>
+                        <a:srgbClr val="D3DED0"/>
+                      </a:solidFill>
+                      <a:prstDash val="solid"/>
+                      <a:round/>
+                      <a:headEnd type="none" w="med" len="med"/>
+                      <a:tailEnd type="none" w="med" len="med"/>
+                    </a:lnT>
+                    <a:lnB w="9525" cap="flat" cmpd="sng" algn="ctr">
+                      <a:solidFill>
+                        <a:srgbClr val="D3DED0"/>
+                      </a:solidFill>
+                      <a:prstDash val="solid"/>
+                      <a:round/>
+                      <a:headEnd type="none" w="med" len="med"/>
+                      <a:tailEnd type="none" w="med" len="med"/>
+                    </a:lnB>
+                    <a:solidFill>
+                      <a:srgbClr val="FFFFFF"/>
+                    </a:solidFill>
+                  </a:tcPr>
+                </a:tc>
+                <a:tc>
+                  <a:txBody>
+                    <a:bodyPr/>
+                    <a:lstStyle/>
+                    <a:p>
+                      <a:pPr algn="l" indent="0" marL="0">
+                        <a:buNone/>
+                      </a:pPr>
+                      <a:r>
+                        <a:rPr lang="en-US" sz="700" i="1" dirty="0">
+                          <a:solidFill>
+                            <a:srgbClr val="595959"/>
+                          </a:solidFill>
+                          <a:latin typeface="Meiryo UI" pitchFamily="34" charset="0"/>
+                          <a:ea typeface="Meiryo UI" pitchFamily="34" charset="-122"/>
+                          <a:cs typeface="Meiryo UI" pitchFamily="34" charset="-120"/>
+                        </a:rPr>
+                        <a:t>(基礎段階・通常は対象外)</a:t>
+                      </a:r>
+                      <a:endParaRPr lang="en-US" sz="700" dirty="0">
+                        <a:latin typeface="Meiryo UI" charset="0"/>
+                        <a:ea typeface="Meiryo UI" charset="0"/>
+                        <a:cs typeface="Meiryo UI" charset="0"/>
+                      </a:endParaRPr>
+                    </a:p>
+                  </a:txBody>
+                  <a:tcPr marL="54864" marR="54864" marT="54864" marB="54864" anchor="ctr">
+                    <a:lnL w="9525" cap="flat" cmpd="sng" algn="ctr">
+                      <a:solidFill>
+                        <a:srgbClr val="D3DED0"/>
+                      </a:solidFill>
+                      <a:prstDash val="solid"/>
+                      <a:round/>
+                      <a:headEnd type="none" w="med" len="med"/>
+                      <a:tailEnd type="none" w="med" len="med"/>
+                    </a:lnL>
+                    <a:lnR w="9525" cap="flat" cmpd="sng" algn="ctr">
+                      <a:solidFill>
+                        <a:srgbClr val="D3DED0"/>
+                      </a:solidFill>
+                      <a:prstDash val="solid"/>
+                      <a:round/>
+                      <a:headEnd type="none" w="med" len="med"/>
+                      <a:tailEnd type="none" w="med" len="med"/>
+                    </a:lnR>
+                    <a:lnT w="9525" cap="flat" cmpd="sng" algn="ctr">
+                      <a:solidFill>
+                        <a:srgbClr val="D3DED0"/>
+                      </a:solidFill>
+                      <a:prstDash val="solid"/>
+                      <a:round/>
+                      <a:headEnd type="none" w="med" len="med"/>
+                      <a:tailEnd type="none" w="med" len="med"/>
+                    </a:lnT>
+                    <a:lnB w="9525" cap="flat" cmpd="sng" algn="ctr">
+                      <a:solidFill>
+                        <a:srgbClr val="D3DED0"/>
+                      </a:solidFill>
+                      <a:prstDash val="solid"/>
+                      <a:round/>
+                      <a:headEnd type="none" w="med" len="med"/>
+                      <a:tailEnd type="none" w="med" len="med"/>
+                    </a:lnB>
+                    <a:solidFill>
+                      <a:srgbClr val="F2F2F2"/>
+                    </a:solidFill>
+                  </a:tcPr>
+                </a:tc>
+                <a:tc>
+                  <a:txBody>
+                    <a:bodyPr/>
+                    <a:lstStyle/>
+                    <a:p>
+                      <a:pPr algn="l" indent="0" marL="0">
+                        <a:buNone/>
+                      </a:pPr>
+                      <a:r>
+                        <a:rPr lang="en-US" sz="700" i="1" dirty="0">
+                          <a:solidFill>
+                            <a:srgbClr val="595959"/>
+                          </a:solidFill>
+                          <a:latin typeface="Meiryo UI" pitchFamily="34" charset="0"/>
+                          <a:ea typeface="Meiryo UI" pitchFamily="34" charset="-122"/>
+                          <a:cs typeface="Meiryo UI" pitchFamily="34" charset="-120"/>
+                        </a:rPr>
+                        <a:t>(基礎段階・通常は対象外)</a:t>
+                      </a:r>
+                      <a:endParaRPr lang="en-US" sz="700" dirty="0">
+                        <a:latin typeface="Meiryo UI" charset="0"/>
+                        <a:ea typeface="Meiryo UI" charset="0"/>
+                        <a:cs typeface="Meiryo UI" charset="0"/>
+                      </a:endParaRPr>
+                    </a:p>
+                  </a:txBody>
+                  <a:tcPr marL="54864" marR="54864" marT="54864" marB="54864" anchor="ctr">
+                    <a:lnL w="9525" cap="flat" cmpd="sng" algn="ctr">
+                      <a:solidFill>
+                        <a:srgbClr val="D3DED0"/>
+                      </a:solidFill>
+                      <a:prstDash val="solid"/>
+                      <a:round/>
+                      <a:headEnd type="none" w="med" len="med"/>
+                      <a:tailEnd type="none" w="med" len="med"/>
+                    </a:lnL>
+                    <a:lnR w="9525" cap="flat" cmpd="sng" algn="ctr">
+                      <a:solidFill>
+                        <a:srgbClr val="D3DED0"/>
+                      </a:solidFill>
+                      <a:prstDash val="solid"/>
+                      <a:round/>
+                      <a:headEnd type="none" w="med" len="med"/>
+                      <a:tailEnd type="none" w="med" len="med"/>
+                    </a:lnR>
+                    <a:lnT w="9525" cap="flat" cmpd="sng" algn="ctr">
+                      <a:solidFill>
+                        <a:srgbClr val="D3DED0"/>
+                      </a:solidFill>
+                      <a:prstDash val="solid"/>
+                      <a:round/>
+                      <a:headEnd type="none" w="med" len="med"/>
+                      <a:tailEnd type="none" w="med" len="med"/>
+                    </a:lnT>
+                    <a:lnB w="9525" cap="flat" cmpd="sng" algn="ctr">
+                      <a:solidFill>
+                        <a:srgbClr val="D3DED0"/>
+                      </a:solidFill>
+                      <a:prstDash val="solid"/>
+                      <a:round/>
+                      <a:headEnd type="none" w="med" len="med"/>
+                      <a:tailEnd type="none" w="med" len="med"/>
+                    </a:lnB>
+                    <a:solidFill>
+                      <a:srgbClr val="F2F2F2"/>
+                    </a:solidFill>
+                  </a:tcPr>
+                </a:tc>
+              </a:tr>
+              <a:tr h="868680">
+                <a:tc>
+                  <a:txBody>
+                    <a:bodyPr/>
+                    <a:lstStyle/>
+                    <a:p>
+                      <a:pPr algn="l" indent="0" marL="0">
+                        <a:buNone/>
+                      </a:pPr>
+                      <a:r>
+                        <a:rPr lang="en-US" sz="760" b="1" dirty="0">
+                          <a:solidFill>
+                            <a:srgbClr val="1F3D20"/>
+                          </a:solidFill>
+                          <a:latin typeface="Meiryo UI" pitchFamily="34" charset="0"/>
+                          <a:ea typeface="Meiryo UI" pitchFamily="34" charset="-122"/>
+                          <a:cs typeface="Meiryo UI" pitchFamily="34" charset="-120"/>
+                        </a:rPr>
+                        <a:t>Level2 現場適用</a:t>
+                      </a:r>
+                      <a:endParaRPr lang="en-US" sz="760" dirty="0">
+                        <a:latin typeface="Meiryo UI" charset="0"/>
+                        <a:ea typeface="Meiryo UI" charset="0"/>
+                        <a:cs typeface="Meiryo UI" charset="0"/>
+                      </a:endParaRPr>
+                    </a:p>
+                    <a:p>
+                      <a:pPr algn="l" indent="0" marL="0">
+                        <a:buNone/>
+                      </a:pPr>
+                      <a:r>
+                        <a:rPr lang="en-US" sz="760" b="1" dirty="0">
+                          <a:solidFill>
+                            <a:srgbClr val="1F3D20"/>
+                          </a:solidFill>
+                          <a:latin typeface="Meiryo UI" pitchFamily="34" charset="0"/>
+                          <a:ea typeface="Meiryo UI" pitchFamily="34" charset="-122"/>
+                          <a:cs typeface="Meiryo UI" pitchFamily="34" charset="-120"/>
+                        </a:rPr>
+                        <a:t>(センサ/AI調整・自動化設計)</a:t>
+                      </a:r>
+                      <a:endParaRPr lang="en-US" sz="760" dirty="0">
+                        <a:latin typeface="Meiryo UI" charset="0"/>
+                        <a:ea typeface="Meiryo UI" charset="0"/>
+                        <a:cs typeface="Meiryo UI" charset="0"/>
+                      </a:endParaRPr>
+                    </a:p>
+                  </a:txBody>
+                  <a:tcPr marL="54864" marR="54864" marT="54864" marB="54864" anchor="ctr">
+                    <a:lnL w="9525" cap="flat" cmpd="sng" algn="ctr">
+                      <a:solidFill>
+                        <a:srgbClr val="D3DED0"/>
+                      </a:solidFill>
+                      <a:prstDash val="solid"/>
+                      <a:round/>
+                      <a:headEnd type="none" w="med" len="med"/>
+                      <a:tailEnd type="none" w="med" len="med"/>
+                    </a:lnL>
+                    <a:lnR w="9525" cap="flat" cmpd="sng" algn="ctr">
+                      <a:solidFill>
+                        <a:srgbClr val="D3DED0"/>
+                      </a:solidFill>
+                      <a:prstDash val="solid"/>
+                      <a:round/>
+                      <a:headEnd type="none" w="med" len="med"/>
+                      <a:tailEnd type="none" w="med" len="med"/>
+                    </a:lnR>
+                    <a:lnT w="9525" cap="flat" cmpd="sng" algn="ctr">
+                      <a:solidFill>
+                        <a:srgbClr val="D3DED0"/>
+                      </a:solidFill>
+                      <a:prstDash val="solid"/>
+                      <a:round/>
+                      <a:headEnd type="none" w="med" len="med"/>
+                      <a:tailEnd type="none" w="med" len="med"/>
+                    </a:lnT>
+                    <a:lnB w="9525" cap="flat" cmpd="sng" algn="ctr">
+                      <a:solidFill>
+                        <a:srgbClr val="D3DED0"/>
+                      </a:solidFill>
+                      <a:prstDash val="solid"/>
+                      <a:round/>
+                      <a:headEnd type="none" w="med" len="med"/>
+                      <a:tailEnd type="none" w="med" len="med"/>
+                    </a:lnB>
+                    <a:solidFill>
+                      <a:srgbClr val="DFEBDB"/>
+                    </a:solidFill>
+                  </a:tcPr>
+                </a:tc>
+                <a:tc>
+                  <a:txBody>
+                    <a:bodyPr/>
+                    <a:lstStyle/>
+                    <a:p>
+                      <a:pPr algn="l" indent="0" marL="0">
+                        <a:buNone/>
+                      </a:pPr>
+                      <a:r>
+                        <a:rPr lang="en-US" sz="700" dirty="0">
+                          <a:solidFill>
+                            <a:srgbClr val="2B2B2B"/>
+                          </a:solidFill>
+                          <a:latin typeface="Meiryo UI" pitchFamily="34" charset="0"/>
+                          <a:ea typeface="Meiryo UI" pitchFamily="34" charset="-122"/>
+                          <a:cs typeface="Meiryo UI" pitchFamily="34" charset="-120"/>
+                        </a:rPr>
+                        <a:t>作業の必要性を自分で確認できる</a:t>
+                      </a:r>
+                      <a:endParaRPr lang="en-US" sz="700" dirty="0">
+                        <a:latin typeface="Meiryo UI" charset="0"/>
+                        <a:ea typeface="Meiryo UI" charset="0"/>
+                        <a:cs typeface="Meiryo UI" charset="0"/>
+                      </a:endParaRPr>
+                    </a:p>
+                  </a:txBody>
+                  <a:tcPr marL="54864" marR="54864" marT="54864" marB="54864" anchor="ctr">
+                    <a:lnL w="9525" cap="flat" cmpd="sng" algn="ctr">
+                      <a:solidFill>
+                        <a:srgbClr val="D3DED0"/>
+                      </a:solidFill>
+                      <a:prstDash val="solid"/>
+                      <a:round/>
+                      <a:headEnd type="none" w="med" len="med"/>
+                      <a:tailEnd type="none" w="med" len="med"/>
+                    </a:lnL>
+                    <a:lnR w="9525" cap="flat" cmpd="sng" algn="ctr">
+                      <a:solidFill>
+                        <a:srgbClr val="D3DED0"/>
+                      </a:solidFill>
+                      <a:prstDash val="solid"/>
+                      <a:round/>
+                      <a:headEnd type="none" w="med" len="med"/>
+                      <a:tailEnd type="none" w="med" len="med"/>
+                    </a:lnR>
+                    <a:lnT w="9525" cap="flat" cmpd="sng" algn="ctr">
+                      <a:solidFill>
+                        <a:srgbClr val="D3DED0"/>
+                      </a:solidFill>
+                      <a:prstDash val="solid"/>
+                      <a:round/>
+                      <a:headEnd type="none" w="med" len="med"/>
+                      <a:tailEnd type="none" w="med" len="med"/>
+                    </a:lnT>
+                    <a:lnB w="9525" cap="flat" cmpd="sng" algn="ctr">
+                      <a:solidFill>
+                        <a:srgbClr val="D3DED0"/>
+                      </a:solidFill>
+                      <a:prstDash val="solid"/>
+                      <a:round/>
+                      <a:headEnd type="none" w="med" len="med"/>
+                      <a:tailEnd type="none" w="med" len="med"/>
+                    </a:lnB>
+                    <a:solidFill>
+                      <a:srgbClr val="FFFFFF"/>
+                    </a:solidFill>
+                  </a:tcPr>
+                </a:tc>
+                <a:tc>
+                  <a:txBody>
+                    <a:bodyPr/>
+                    <a:lstStyle/>
+                    <a:p>
+                      <a:pPr algn="l" indent="0" marL="0">
+                        <a:buNone/>
+                      </a:pPr>
+                      <a:r>
+                        <a:rPr lang="en-US" sz="700" dirty="0">
+                          <a:solidFill>
+                            <a:srgbClr val="2B2B2B"/>
+                          </a:solidFill>
+                          <a:latin typeface="Meiryo UI" pitchFamily="34" charset="0"/>
+                          <a:ea typeface="Meiryo UI" pitchFamily="34" charset="-122"/>
+                          <a:cs typeface="Meiryo UI" pitchFamily="34" charset="-120"/>
+                        </a:rPr>
+                        <a:t>複数作業を跨ぎ手順を再設計できる</a:t>
+                      </a:r>
+                      <a:endParaRPr lang="en-US" sz="700" dirty="0">
+                        <a:latin typeface="Meiryo UI" charset="0"/>
+                        <a:ea typeface="Meiryo UI" charset="0"/>
+                        <a:cs typeface="Meiryo UI" charset="0"/>
+                      </a:endParaRPr>
+                    </a:p>
+                  </a:txBody>
+                  <a:tcPr marL="54864" marR="54864" marT="54864" marB="54864" anchor="ctr">
+                    <a:lnL w="9525" cap="flat" cmpd="sng" algn="ctr">
+                      <a:solidFill>
+                        <a:srgbClr val="D3DED0"/>
+                      </a:solidFill>
+                      <a:prstDash val="solid"/>
+                      <a:round/>
+                      <a:headEnd type="none" w="med" len="med"/>
+                      <a:tailEnd type="none" w="med" len="med"/>
+                    </a:lnL>
+                    <a:lnR w="9525" cap="flat" cmpd="sng" algn="ctr">
+                      <a:solidFill>
+                        <a:srgbClr val="D3DED0"/>
+                      </a:solidFill>
+                      <a:prstDash val="solid"/>
+                      <a:round/>
+                      <a:headEnd type="none" w="med" len="med"/>
+                      <a:tailEnd type="none" w="med" len="med"/>
+                    </a:lnR>
+                    <a:lnT w="9525" cap="flat" cmpd="sng" algn="ctr">
+                      <a:solidFill>
+                        <a:srgbClr val="D3DED0"/>
+                      </a:solidFill>
+                      <a:prstDash val="solid"/>
+                      <a:round/>
+                      <a:headEnd type="none" w="med" len="med"/>
+                      <a:tailEnd type="none" w="med" len="med"/>
+                    </a:lnT>
+                    <a:lnB w="9525" cap="flat" cmpd="sng" algn="ctr">
+                      <a:solidFill>
+                        <a:srgbClr val="D3DED0"/>
+                      </a:solidFill>
+                      <a:prstDash val="solid"/>
+                      <a:round/>
+                      <a:headEnd type="none" w="med" len="med"/>
+                      <a:tailEnd type="none" w="med" len="med"/>
+                    </a:lnB>
+                    <a:solidFill>
+                      <a:srgbClr val="FFFFFF"/>
+                    </a:solidFill>
+                  </a:tcPr>
+                </a:tc>
+                <a:tc>
+                  <a:txBody>
+                    <a:bodyPr/>
+                    <a:lstStyle/>
+                    <a:p>
+                      <a:pPr algn="l" indent="0" marL="0">
+                        <a:buNone/>
+                      </a:pPr>
+                      <a:r>
+                        <a:rPr lang="en-US" sz="700" dirty="0">
+                          <a:solidFill>
+                            <a:srgbClr val="2B2B2B"/>
+                          </a:solidFill>
+                          <a:latin typeface="Meiryo UI" pitchFamily="34" charset="0"/>
+                          <a:ea typeface="Meiryo UI" pitchFamily="34" charset="-122"/>
+                          <a:cs typeface="Meiryo UI" pitchFamily="34" charset="-120"/>
+                        </a:rPr>
+                        <a:t>効果を時間・人数で定量化できる</a:t>
+                      </a:r>
+                      <a:endParaRPr lang="en-US" sz="700" dirty="0">
+                        <a:latin typeface="Meiryo UI" charset="0"/>
+                        <a:ea typeface="Meiryo UI" charset="0"/>
+                        <a:cs typeface="Meiryo UI" charset="0"/>
+                      </a:endParaRPr>
+                    </a:p>
+                  </a:txBody>
+                  <a:tcPr marL="54864" marR="54864" marT="54864" marB="54864" anchor="ctr">
+                    <a:lnL w="9525" cap="flat" cmpd="sng" algn="ctr">
+                      <a:solidFill>
+                        <a:srgbClr val="D3DED0"/>
+                      </a:solidFill>
+                      <a:prstDash val="solid"/>
+                      <a:round/>
+                      <a:headEnd type="none" w="med" len="med"/>
+                      <a:tailEnd type="none" w="med" len="med"/>
+                    </a:lnL>
+                    <a:lnR w="9525" cap="flat" cmpd="sng" algn="ctr">
+                      <a:solidFill>
+                        <a:srgbClr val="D3DED0"/>
+                      </a:solidFill>
+                      <a:prstDash val="solid"/>
+                      <a:round/>
+                      <a:headEnd type="none" w="med" len="med"/>
+                      <a:tailEnd type="none" w="med" len="med"/>
+                    </a:lnR>
+                    <a:lnT w="9525" cap="flat" cmpd="sng" algn="ctr">
+                      <a:solidFill>
+                        <a:srgbClr val="D3DED0"/>
+                      </a:solidFill>
+                      <a:prstDash val="solid"/>
+                      <a:round/>
+                      <a:headEnd type="none" w="med" len="med"/>
+                      <a:tailEnd type="none" w="med" len="med"/>
+                    </a:lnT>
+                    <a:lnB w="9525" cap="flat" cmpd="sng" algn="ctr">
+                      <a:solidFill>
+                        <a:srgbClr val="D3DED0"/>
+                      </a:solidFill>
+                      <a:prstDash val="solid"/>
+                      <a:round/>
+                      <a:headEnd type="none" w="med" len="med"/>
+                      <a:tailEnd type="none" w="med" len="med"/>
+                    </a:lnB>
+                    <a:solidFill>
+                      <a:srgbClr val="FFFFFF"/>
+                    </a:solidFill>
+                  </a:tcPr>
+                </a:tc>
+                <a:tc>
+                  <a:txBody>
+                    <a:bodyPr/>
+                    <a:lstStyle/>
+                    <a:p>
+                      <a:pPr algn="l" indent="0" marL="0">
+                        <a:buNone/>
+                      </a:pPr>
+                      <a:r>
+                        <a:rPr lang="en-US" sz="700" b="1" dirty="0">
+                          <a:solidFill>
+                            <a:srgbClr val="1F3D20"/>
+                          </a:solidFill>
+                          <a:latin typeface="Meiryo UI" pitchFamily="34" charset="0"/>
+                          <a:ea typeface="Meiryo UI" pitchFamily="34" charset="-122"/>
+                          <a:cs typeface="Meiryo UI" pitchFamily="34" charset="-120"/>
+                        </a:rPr>
+                        <a:t>★到達点(ベース層)</a:t>
+                      </a:r>
+                      <a:endParaRPr lang="en-US" sz="700" dirty="0">
+                        <a:latin typeface="Meiryo UI" charset="0"/>
+                        <a:ea typeface="Meiryo UI" charset="0"/>
+                        <a:cs typeface="Meiryo UI" charset="0"/>
+                      </a:endParaRPr>
+                    </a:p>
+                    <a:p>
+                      <a:pPr algn="l" indent="0" marL="0">
+                        <a:buNone/>
+                      </a:pPr>
+                      <a:r>
+                        <a:rPr lang="en-US" sz="700" b="1" dirty="0">
+                          <a:solidFill>
+                            <a:srgbClr val="1F3D20"/>
+                          </a:solidFill>
+                          <a:latin typeface="Meiryo UI" pitchFamily="34" charset="0"/>
+                          <a:ea typeface="Meiryo UI" pitchFamily="34" charset="-122"/>
+                          <a:cs typeface="Meiryo UI" pitchFamily="34" charset="-120"/>
+                        </a:rPr>
+                        <a:t>現場を動かしながら報告できる</a:t>
+                      </a:r>
+                      <a:endParaRPr lang="en-US" sz="700" dirty="0">
+                        <a:latin typeface="Meiryo UI" charset="0"/>
+                        <a:ea typeface="Meiryo UI" charset="0"/>
+                        <a:cs typeface="Meiryo UI" charset="0"/>
+                      </a:endParaRPr>
+                    </a:p>
+                  </a:txBody>
+                  <a:tcPr marL="54864" marR="54864" marT="54864" marB="54864" anchor="ctr">
+                    <a:lnL w="9525" cap="flat" cmpd="sng" algn="ctr">
+                      <a:solidFill>
+                        <a:srgbClr val="D3DED0"/>
+                      </a:solidFill>
+                      <a:prstDash val="solid"/>
+                      <a:round/>
+                      <a:headEnd type="none" w="med" len="med"/>
+                      <a:tailEnd type="none" w="med" len="med"/>
+                    </a:lnL>
+                    <a:lnR w="9525" cap="flat" cmpd="sng" algn="ctr">
+                      <a:solidFill>
+                        <a:srgbClr val="D3DED0"/>
+                      </a:solidFill>
+                      <a:prstDash val="solid"/>
+                      <a:round/>
+                      <a:headEnd type="none" w="med" len="med"/>
+                      <a:tailEnd type="none" w="med" len="med"/>
+                    </a:lnR>
+                    <a:lnT w="9525" cap="flat" cmpd="sng" algn="ctr">
+                      <a:solidFill>
+                        <a:srgbClr val="D3DED0"/>
+                      </a:solidFill>
+                      <a:prstDash val="solid"/>
+                      <a:round/>
+                      <a:headEnd type="none" w="med" len="med"/>
+                      <a:tailEnd type="none" w="med" len="med"/>
+                    </a:lnT>
+                    <a:lnB w="9525" cap="flat" cmpd="sng" algn="ctr">
+                      <a:solidFill>
+                        <a:srgbClr val="D3DED0"/>
+                      </a:solidFill>
+                      <a:prstDash val="solid"/>
+                      <a:round/>
+                      <a:headEnd type="none" w="med" len="med"/>
+                      <a:tailEnd type="none" w="med" len="med"/>
+                    </a:lnB>
+                    <a:solidFill>
+                      <a:srgbClr val="DFEFDA"/>
+                    </a:solidFill>
+                  </a:tcPr>
+                </a:tc>
+              </a:tr>
+              <a:tr h="868680">
+                <a:tc>
+                  <a:txBody>
+                    <a:bodyPr/>
+                    <a:lstStyle/>
+                    <a:p>
+                      <a:pPr algn="l" indent="0" marL="0">
+                        <a:buNone/>
+                      </a:pPr>
+                      <a:r>
+                        <a:rPr lang="en-US" sz="760" b="1" dirty="0">
+                          <a:solidFill>
+                            <a:srgbClr val="1F3D20"/>
+                          </a:solidFill>
+                          <a:latin typeface="Meiryo UI" pitchFamily="34" charset="0"/>
+                          <a:ea typeface="Meiryo UI" pitchFamily="34" charset="-122"/>
+                          <a:cs typeface="Meiryo UI" pitchFamily="34" charset="-120"/>
+                        </a:rPr>
+                        <a:t>Level3 統合設計</a:t>
+                      </a:r>
+                      <a:endParaRPr lang="en-US" sz="760" dirty="0">
+                        <a:latin typeface="Meiryo UI" charset="0"/>
+                        <a:ea typeface="Meiryo UI" charset="0"/>
+                        <a:cs typeface="Meiryo UI" charset="0"/>
+                      </a:endParaRPr>
+                    </a:p>
+                    <a:p>
+                      <a:pPr algn="l" indent="0" marL="0">
+                        <a:buNone/>
+                      </a:pPr>
+                      <a:r>
+                        <a:rPr lang="en-US" sz="760" b="1" dirty="0">
+                          <a:solidFill>
+                            <a:srgbClr val="1F3D20"/>
+                          </a:solidFill>
+                          <a:latin typeface="Meiryo UI" pitchFamily="34" charset="0"/>
+                          <a:ea typeface="Meiryo UI" pitchFamily="34" charset="-122"/>
+                          <a:cs typeface="Meiryo UI" pitchFamily="34" charset="-120"/>
+                        </a:rPr>
+                        <a:t>(複数ロボット協調・ROS設計)</a:t>
+                      </a:r>
+                      <a:endParaRPr lang="en-US" sz="760" dirty="0">
+                        <a:latin typeface="Meiryo UI" charset="0"/>
+                        <a:ea typeface="Meiryo UI" charset="0"/>
+                        <a:cs typeface="Meiryo UI" charset="0"/>
+                      </a:endParaRPr>
+                    </a:p>
+                  </a:txBody>
+                  <a:tcPr marL="54864" marR="54864" marT="54864" marB="54864" anchor="ctr">
+                    <a:lnL w="9525" cap="flat" cmpd="sng" algn="ctr">
+                      <a:solidFill>
+                        <a:srgbClr val="D3DED0"/>
+                      </a:solidFill>
+                      <a:prstDash val="solid"/>
+                      <a:round/>
+                      <a:headEnd type="none" w="med" len="med"/>
+                      <a:tailEnd type="none" w="med" len="med"/>
+                    </a:lnL>
+                    <a:lnR w="9525" cap="flat" cmpd="sng" algn="ctr">
+                      <a:solidFill>
+                        <a:srgbClr val="D3DED0"/>
+                      </a:solidFill>
+                      <a:prstDash val="solid"/>
+                      <a:round/>
+                      <a:headEnd type="none" w="med" len="med"/>
+                      <a:tailEnd type="none" w="med" len="med"/>
+                    </a:lnR>
+                    <a:lnT w="9525" cap="flat" cmpd="sng" algn="ctr">
+                      <a:solidFill>
+                        <a:srgbClr val="D3DED0"/>
+                      </a:solidFill>
+                      <a:prstDash val="solid"/>
+                      <a:round/>
+                      <a:headEnd type="none" w="med" len="med"/>
+                      <a:tailEnd type="none" w="med" len="med"/>
+                    </a:lnT>
+                    <a:lnB w="9525" cap="flat" cmpd="sng" algn="ctr">
+                      <a:solidFill>
+                        <a:srgbClr val="D3DED0"/>
+                      </a:solidFill>
+                      <a:prstDash val="solid"/>
+                      <a:round/>
+                      <a:headEnd type="none" w="med" len="med"/>
+                      <a:tailEnd type="none" w="med" len="med"/>
+                    </a:lnB>
+                    <a:solidFill>
+                      <a:srgbClr val="DFEBDB"/>
+                    </a:solidFill>
+                  </a:tcPr>
+                </a:tc>
+                <a:tc>
+                  <a:txBody>
+                    <a:bodyPr/>
+                    <a:lstStyle/>
+                    <a:p>
+                      <a:pPr algn="l" indent="0" marL="0">
+                        <a:buNone/>
+                      </a:pPr>
+                      <a:r>
+                        <a:rPr lang="en-US" sz="700" dirty="0">
+                          <a:solidFill>
+                            <a:srgbClr val="2B2B2B"/>
+                          </a:solidFill>
+                          <a:latin typeface="Meiryo UI" pitchFamily="34" charset="0"/>
+                          <a:ea typeface="Meiryo UI" pitchFamily="34" charset="-122"/>
+                          <a:cs typeface="Meiryo UI" pitchFamily="34" charset="-120"/>
+                        </a:rPr>
+                        <a:t>設計視点から作業の要否を判断できる</a:t>
+                      </a:r>
+                      <a:endParaRPr lang="en-US" sz="700" dirty="0">
+                        <a:latin typeface="Meiryo UI" charset="0"/>
+                        <a:ea typeface="Meiryo UI" charset="0"/>
+                        <a:cs typeface="Meiryo UI" charset="0"/>
+                      </a:endParaRPr>
+                    </a:p>
+                  </a:txBody>
+                  <a:tcPr marL="54864" marR="54864" marT="54864" marB="54864" anchor="ctr">
+                    <a:lnL w="9525" cap="flat" cmpd="sng" algn="ctr">
+                      <a:solidFill>
+                        <a:srgbClr val="D3DED0"/>
+                      </a:solidFill>
+                      <a:prstDash val="solid"/>
+                      <a:round/>
+                      <a:headEnd type="none" w="med" len="med"/>
+                      <a:tailEnd type="none" w="med" len="med"/>
+                    </a:lnL>
+                    <a:lnR w="9525" cap="flat" cmpd="sng" algn="ctr">
+                      <a:solidFill>
+                        <a:srgbClr val="D3DED0"/>
+                      </a:solidFill>
+                      <a:prstDash val="solid"/>
+                      <a:round/>
+                      <a:headEnd type="none" w="med" len="med"/>
+                      <a:tailEnd type="none" w="med" len="med"/>
+                    </a:lnR>
+                    <a:lnT w="9525" cap="flat" cmpd="sng" algn="ctr">
+                      <a:solidFill>
+                        <a:srgbClr val="D3DED0"/>
+                      </a:solidFill>
+                      <a:prstDash val="solid"/>
+                      <a:round/>
+                      <a:headEnd type="none" w="med" len="med"/>
+                      <a:tailEnd type="none" w="med" len="med"/>
+                    </a:lnT>
+                    <a:lnB w="9525" cap="flat" cmpd="sng" algn="ctr">
+                      <a:solidFill>
+                        <a:srgbClr val="D3DED0"/>
+                      </a:solidFill>
+                      <a:prstDash val="solid"/>
+                      <a:round/>
+                      <a:headEnd type="none" w="med" len="med"/>
+                      <a:tailEnd type="none" w="med" len="med"/>
+                    </a:lnB>
+                    <a:solidFill>
+                      <a:srgbClr val="FFFFFF"/>
+                    </a:solidFill>
+                  </a:tcPr>
+                </a:tc>
+                <a:tc>
+                  <a:txBody>
+                    <a:bodyPr/>
+                    <a:lstStyle/>
+                    <a:p>
+                      <a:pPr algn="l" indent="0" marL="0">
+                        <a:buNone/>
+                      </a:pPr>
+                      <a:r>
+                        <a:rPr lang="en-US" sz="700" dirty="0">
+                          <a:solidFill>
+                            <a:srgbClr val="2B2B2B"/>
+                          </a:solidFill>
+                          <a:latin typeface="Meiryo UI" pitchFamily="34" charset="0"/>
+                          <a:ea typeface="Meiryo UI" pitchFamily="34" charset="-122"/>
+                          <a:cs typeface="Meiryo UI" pitchFamily="34" charset="-120"/>
+                        </a:rPr>
+                        <a:t>複数ラインを跨いだ再設計ができる</a:t>
+                      </a:r>
+                      <a:endParaRPr lang="en-US" sz="700" dirty="0">
+                        <a:latin typeface="Meiryo UI" charset="0"/>
+                        <a:ea typeface="Meiryo UI" charset="0"/>
+                        <a:cs typeface="Meiryo UI" charset="0"/>
+                      </a:endParaRPr>
+                    </a:p>
+                  </a:txBody>
+                  <a:tcPr marL="54864" marR="54864" marT="54864" marB="54864" anchor="ctr">
+                    <a:lnL w="9525" cap="flat" cmpd="sng" algn="ctr">
+                      <a:solidFill>
+                        <a:srgbClr val="D3DED0"/>
+                      </a:solidFill>
+                      <a:prstDash val="solid"/>
+                      <a:round/>
+                      <a:headEnd type="none" w="med" len="med"/>
+                      <a:tailEnd type="none" w="med" len="med"/>
+                    </a:lnL>
+                    <a:lnR w="9525" cap="flat" cmpd="sng" algn="ctr">
+                      <a:solidFill>
+                        <a:srgbClr val="D3DED0"/>
+                      </a:solidFill>
+                      <a:prstDash val="solid"/>
+                      <a:round/>
+                      <a:headEnd type="none" w="med" len="med"/>
+                      <a:tailEnd type="none" w="med" len="med"/>
+                    </a:lnR>
+                    <a:lnT w="9525" cap="flat" cmpd="sng" algn="ctr">
+                      <a:solidFill>
+                        <a:srgbClr val="D3DED0"/>
+                      </a:solidFill>
+                      <a:prstDash val="solid"/>
+                      <a:round/>
+                      <a:headEnd type="none" w="med" len="med"/>
+                      <a:tailEnd type="none" w="med" len="med"/>
+                    </a:lnT>
+                    <a:lnB w="9525" cap="flat" cmpd="sng" algn="ctr">
+                      <a:solidFill>
+                        <a:srgbClr val="D3DED0"/>
+                      </a:solidFill>
+                      <a:prstDash val="solid"/>
+                      <a:round/>
+                      <a:headEnd type="none" w="med" len="med"/>
+                      <a:tailEnd type="none" w="med" len="med"/>
+                    </a:lnB>
+                    <a:solidFill>
+                      <a:srgbClr val="FFFFFF"/>
+                    </a:solidFill>
+                  </a:tcPr>
+                </a:tc>
+                <a:tc>
+                  <a:txBody>
+                    <a:bodyPr/>
+                    <a:lstStyle/>
+                    <a:p>
+                      <a:pPr algn="l" indent="0" marL="0">
+                        <a:buNone/>
+                      </a:pPr>
+                      <a:r>
+                        <a:rPr lang="en-US" sz="700" b="1" dirty="0">
+                          <a:solidFill>
+                            <a:srgbClr val="1F3D20"/>
+                          </a:solidFill>
+                          <a:latin typeface="Meiryo UI" pitchFamily="34" charset="0"/>
+                          <a:ea typeface="Meiryo UI" pitchFamily="34" charset="-122"/>
+                          <a:cs typeface="Meiryo UI" pitchFamily="34" charset="-120"/>
+                        </a:rPr>
+                        <a:t>★到達点(コア人材)</a:t>
+                      </a:r>
+                      <a:endParaRPr lang="en-US" sz="700" dirty="0">
+                        <a:latin typeface="Meiryo UI" charset="0"/>
+                        <a:ea typeface="Meiryo UI" charset="0"/>
+                        <a:cs typeface="Meiryo UI" charset="0"/>
+                      </a:endParaRPr>
+                    </a:p>
+                    <a:p>
+                      <a:pPr algn="l" indent="0" marL="0">
+                        <a:buNone/>
+                      </a:pPr>
+                      <a:r>
+                        <a:rPr lang="en-US" sz="700" b="1" dirty="0">
+                          <a:solidFill>
+                            <a:srgbClr val="1F3D20"/>
+                          </a:solidFill>
+                          <a:latin typeface="Meiryo UI" pitchFamily="34" charset="0"/>
+                          <a:ea typeface="Meiryo UI" pitchFamily="34" charset="-122"/>
+                          <a:cs typeface="Meiryo UI" pitchFamily="34" charset="-120"/>
+                        </a:rPr>
+                        <a:t>投資対効果を設計に組み込める</a:t>
+                      </a:r>
+                      <a:endParaRPr lang="en-US" sz="700" dirty="0">
+                        <a:latin typeface="Meiryo UI" charset="0"/>
+                        <a:ea typeface="Meiryo UI" charset="0"/>
+                        <a:cs typeface="Meiryo UI" charset="0"/>
+                      </a:endParaRPr>
+                    </a:p>
+                  </a:txBody>
+                  <a:tcPr marL="54864" marR="54864" marT="54864" marB="54864" anchor="ctr">
+                    <a:lnL w="9525" cap="flat" cmpd="sng" algn="ctr">
+                      <a:solidFill>
+                        <a:srgbClr val="D3DED0"/>
+                      </a:solidFill>
+                      <a:prstDash val="solid"/>
+                      <a:round/>
+                      <a:headEnd type="none" w="med" len="med"/>
+                      <a:tailEnd type="none" w="med" len="med"/>
+                    </a:lnL>
+                    <a:lnR w="9525" cap="flat" cmpd="sng" algn="ctr">
+                      <a:solidFill>
+                        <a:srgbClr val="D3DED0"/>
+                      </a:solidFill>
+                      <a:prstDash val="solid"/>
+                      <a:round/>
+                      <a:headEnd type="none" w="med" len="med"/>
+                      <a:tailEnd type="none" w="med" len="med"/>
+                    </a:lnR>
+                    <a:lnT w="9525" cap="flat" cmpd="sng" algn="ctr">
+                      <a:solidFill>
+                        <a:srgbClr val="D3DED0"/>
+                      </a:solidFill>
+                      <a:prstDash val="solid"/>
+                      <a:round/>
+                      <a:headEnd type="none" w="med" len="med"/>
+                      <a:tailEnd type="none" w="med" len="med"/>
+                    </a:lnT>
+                    <a:lnB w="9525" cap="flat" cmpd="sng" algn="ctr">
+                      <a:solidFill>
+                        <a:srgbClr val="D3DED0"/>
+                      </a:solidFill>
+                      <a:prstDash val="solid"/>
+                      <a:round/>
+                      <a:headEnd type="none" w="med" len="med"/>
+                      <a:tailEnd type="none" w="med" len="med"/>
+                    </a:lnB>
+                    <a:solidFill>
+                      <a:srgbClr val="DFEFDA"/>
+                    </a:solidFill>
+                  </a:tcPr>
+                </a:tc>
+                <a:tc>
+                  <a:txBody>
+                    <a:bodyPr/>
+                    <a:lstStyle/>
+                    <a:p>
+                      <a:pPr algn="l" indent="0" marL="0">
+                        <a:buNone/>
+                      </a:pPr>
+                      <a:r>
+                        <a:rPr lang="en-US" sz="700" b="1" dirty="0">
+                          <a:solidFill>
+                            <a:srgbClr val="1F3D20"/>
+                          </a:solidFill>
+                          <a:latin typeface="Meiryo UI" pitchFamily="34" charset="0"/>
+                          <a:ea typeface="Meiryo UI" pitchFamily="34" charset="-122"/>
+                          <a:cs typeface="Meiryo UI" pitchFamily="34" charset="-120"/>
+                        </a:rPr>
+                        <a:t>★到達点(コア上位)</a:t>
+                      </a:r>
+                      <a:endParaRPr lang="en-US" sz="700" dirty="0">
+                        <a:latin typeface="Meiryo UI" charset="0"/>
+                        <a:ea typeface="Meiryo UI" charset="0"/>
+                        <a:cs typeface="Meiryo UI" charset="0"/>
+                      </a:endParaRPr>
+                    </a:p>
+                    <a:p>
+                      <a:pPr algn="l" indent="0" marL="0">
+                        <a:buNone/>
+                      </a:pPr>
+                      <a:r>
+                        <a:rPr lang="en-US" sz="700" b="1" dirty="0">
+                          <a:solidFill>
+                            <a:srgbClr val="1F3D20"/>
+                          </a:solidFill>
+                          <a:latin typeface="Meiryo UI" pitchFamily="34" charset="0"/>
+                          <a:ea typeface="Meiryo UI" pitchFamily="34" charset="-122"/>
+                          <a:cs typeface="Meiryo UI" pitchFamily="34" charset="-120"/>
+                        </a:rPr>
+                        <a:t>全社展開を主導できる</a:t>
+                      </a:r>
+                      <a:endParaRPr lang="en-US" sz="700" dirty="0">
+                        <a:latin typeface="Meiryo UI" charset="0"/>
+                        <a:ea typeface="Meiryo UI" charset="0"/>
+                        <a:cs typeface="Meiryo UI" charset="0"/>
+                      </a:endParaRPr>
+                    </a:p>
+                  </a:txBody>
+                  <a:tcPr marL="54864" marR="54864" marT="54864" marB="54864" anchor="ctr">
+                    <a:lnL w="9525" cap="flat" cmpd="sng" algn="ctr">
+                      <a:solidFill>
+                        <a:srgbClr val="D3DED0"/>
+                      </a:solidFill>
+                      <a:prstDash val="solid"/>
+                      <a:round/>
+                      <a:headEnd type="none" w="med" len="med"/>
+                      <a:tailEnd type="none" w="med" len="med"/>
+                    </a:lnL>
+                    <a:lnR w="9525" cap="flat" cmpd="sng" algn="ctr">
+                      <a:solidFill>
+                        <a:srgbClr val="D3DED0"/>
+                      </a:solidFill>
+                      <a:prstDash val="solid"/>
+                      <a:round/>
+                      <a:headEnd type="none" w="med" len="med"/>
+                      <a:tailEnd type="none" w="med" len="med"/>
+                    </a:lnR>
+                    <a:lnT w="9525" cap="flat" cmpd="sng" algn="ctr">
+                      <a:solidFill>
+                        <a:srgbClr val="D3DED0"/>
+                      </a:solidFill>
+                      <a:prstDash val="solid"/>
+                      <a:round/>
+                      <a:headEnd type="none" w="med" len="med"/>
+                      <a:tailEnd type="none" w="med" len="med"/>
+                    </a:lnT>
+                    <a:lnB w="9525" cap="flat" cmpd="sng" algn="ctr">
+                      <a:solidFill>
+                        <a:srgbClr val="D3DED0"/>
+                      </a:solidFill>
+                      <a:prstDash val="solid"/>
+                      <a:round/>
+                      <a:headEnd type="none" w="med" len="med"/>
+                      <a:tailEnd type="none" w="med" len="med"/>
+                    </a:lnB>
+                    <a:solidFill>
+                      <a:srgbClr val="DFEFDA"/>
+                    </a:solidFill>
+                  </a:tcPr>
+                </a:tc>
+              </a:tr>
+              <a:tr h="868680">
+                <a:tc>
+                  <a:txBody>
+                    <a:bodyPr/>
+                    <a:lstStyle/>
+                    <a:p>
+                      <a:pPr algn="l" indent="0" marL="0">
+                        <a:buNone/>
+                      </a:pPr>
+                      <a:r>
+                        <a:rPr lang="en-US" sz="760" b="1" dirty="0">
+                          <a:solidFill>
+                            <a:srgbClr val="1F3D20"/>
+                          </a:solidFill>
+                          <a:latin typeface="Meiryo UI" pitchFamily="34" charset="0"/>
+                          <a:ea typeface="Meiryo UI" pitchFamily="34" charset="-122"/>
+                          <a:cs typeface="Meiryo UI" pitchFamily="34" charset="-120"/>
+                        </a:rPr>
+                        <a:t>Level4 内製化</a:t>
+                      </a:r>
+                      <a:endParaRPr lang="en-US" sz="760" dirty="0">
+                        <a:latin typeface="Meiryo UI" charset="0"/>
+                        <a:ea typeface="Meiryo UI" charset="0"/>
+                        <a:cs typeface="Meiryo UI" charset="0"/>
+                      </a:endParaRPr>
+                    </a:p>
+                    <a:p>
+                      <a:pPr algn="l" indent="0" marL="0">
+                        <a:buNone/>
+                      </a:pPr>
+                      <a:r>
+                        <a:rPr lang="en-US" sz="760" b="1" dirty="0">
+                          <a:solidFill>
+                            <a:srgbClr val="1F3D20"/>
+                          </a:solidFill>
+                          <a:latin typeface="Meiryo UI" pitchFamily="34" charset="0"/>
+                          <a:ea typeface="Meiryo UI" pitchFamily="34" charset="-122"/>
+                          <a:cs typeface="Meiryo UI" pitchFamily="34" charset="-120"/>
+                        </a:rPr>
+                        <a:t>(AIモデル開発・機構設計)</a:t>
+                      </a:r>
+                      <a:endParaRPr lang="en-US" sz="760" dirty="0">
+                        <a:latin typeface="Meiryo UI" charset="0"/>
+                        <a:ea typeface="Meiryo UI" charset="0"/>
+                        <a:cs typeface="Meiryo UI" charset="0"/>
+                      </a:endParaRPr>
+                    </a:p>
+                  </a:txBody>
+                  <a:tcPr marL="54864" marR="54864" marT="54864" marB="54864" anchor="ctr">
+                    <a:lnL w="9525" cap="flat" cmpd="sng" algn="ctr">
+                      <a:solidFill>
+                        <a:srgbClr val="D3DED0"/>
+                      </a:solidFill>
+                      <a:prstDash val="solid"/>
+                      <a:round/>
+                      <a:headEnd type="none" w="med" len="med"/>
+                      <a:tailEnd type="none" w="med" len="med"/>
+                    </a:lnL>
+                    <a:lnR w="9525" cap="flat" cmpd="sng" algn="ctr">
+                      <a:solidFill>
+                        <a:srgbClr val="D3DED0"/>
+                      </a:solidFill>
+                      <a:prstDash val="solid"/>
+                      <a:round/>
+                      <a:headEnd type="none" w="med" len="med"/>
+                      <a:tailEnd type="none" w="med" len="med"/>
+                    </a:lnR>
+                    <a:lnT w="9525" cap="flat" cmpd="sng" algn="ctr">
+                      <a:solidFill>
+                        <a:srgbClr val="D3DED0"/>
+                      </a:solidFill>
+                      <a:prstDash val="solid"/>
+                      <a:round/>
+                      <a:headEnd type="none" w="med" len="med"/>
+                      <a:tailEnd type="none" w="med" len="med"/>
+                    </a:lnT>
+                    <a:lnB w="9525" cap="flat" cmpd="sng" algn="ctr">
+                      <a:solidFill>
+                        <a:srgbClr val="D3DED0"/>
+                      </a:solidFill>
+                      <a:prstDash val="solid"/>
+                      <a:round/>
+                      <a:headEnd type="none" w="med" len="med"/>
+                      <a:tailEnd type="none" w="med" len="med"/>
+                    </a:lnB>
+                    <a:solidFill>
+                      <a:srgbClr val="DFEBDB"/>
+                    </a:solidFill>
+                  </a:tcPr>
+                </a:tc>
+                <a:tc>
+                  <a:txBody>
+                    <a:bodyPr/>
+                    <a:lstStyle/>
+                    <a:p>
+                      <a:pPr algn="l" indent="0" marL="0">
+                        <a:buNone/>
+                      </a:pPr>
+                      <a:r>
+                        <a:rPr lang="en-US" sz="700" dirty="0">
+                          <a:solidFill>
+                            <a:srgbClr val="B85042"/>
+                          </a:solidFill>
+                          <a:latin typeface="Meiryo UI" pitchFamily="34" charset="0"/>
+                          <a:ea typeface="Meiryo UI" pitchFamily="34" charset="-122"/>
+                          <a:cs typeface="Meiryo UI" pitchFamily="34" charset="-120"/>
+                        </a:rPr>
+                        <a:t>技術特化リスク:</a:t>
+                      </a:r>
+                      <a:endParaRPr lang="en-US" sz="700" dirty="0">
+                        <a:latin typeface="Meiryo UI" charset="0"/>
+                        <a:ea typeface="Meiryo UI" charset="0"/>
+                        <a:cs typeface="Meiryo UI" charset="0"/>
+                      </a:endParaRPr>
+                    </a:p>
+                    <a:p>
+                      <a:pPr algn="l" indent="0" marL="0">
+                        <a:buNone/>
+                      </a:pPr>
+                      <a:r>
+                        <a:rPr lang="en-US" sz="700" dirty="0">
+                          <a:solidFill>
+                            <a:srgbClr val="B85042"/>
+                          </a:solidFill>
+                          <a:latin typeface="Meiryo UI" pitchFamily="34" charset="0"/>
+                          <a:ea typeface="Meiryo UI" pitchFamily="34" charset="-122"/>
+                          <a:cs typeface="Meiryo UI" pitchFamily="34" charset="-120"/>
+                        </a:rPr>
+                        <a:t>構想力が伴わないと視野が狭まる</a:t>
+                      </a:r>
+                      <a:endParaRPr lang="en-US" sz="700" dirty="0">
+                        <a:latin typeface="Meiryo UI" charset="0"/>
+                        <a:ea typeface="Meiryo UI" charset="0"/>
+                        <a:cs typeface="Meiryo UI" charset="0"/>
+                      </a:endParaRPr>
+                    </a:p>
+                  </a:txBody>
+                  <a:tcPr marL="54864" marR="54864" marT="54864" marB="54864" anchor="ctr">
+                    <a:lnL w="9525" cap="flat" cmpd="sng" algn="ctr">
+                      <a:solidFill>
+                        <a:srgbClr val="D3DED0"/>
+                      </a:solidFill>
+                      <a:prstDash val="solid"/>
+                      <a:round/>
+                      <a:headEnd type="none" w="med" len="med"/>
+                      <a:tailEnd type="none" w="med" len="med"/>
+                    </a:lnL>
+                    <a:lnR w="9525" cap="flat" cmpd="sng" algn="ctr">
+                      <a:solidFill>
+                        <a:srgbClr val="D3DED0"/>
+                      </a:solidFill>
+                      <a:prstDash val="solid"/>
+                      <a:round/>
+                      <a:headEnd type="none" w="med" len="med"/>
+                      <a:tailEnd type="none" w="med" len="med"/>
+                    </a:lnR>
+                    <a:lnT w="9525" cap="flat" cmpd="sng" algn="ctr">
+                      <a:solidFill>
+                        <a:srgbClr val="D3DED0"/>
+                      </a:solidFill>
+                      <a:prstDash val="solid"/>
+                      <a:round/>
+                      <a:headEnd type="none" w="med" len="med"/>
+                      <a:tailEnd type="none" w="med" len="med"/>
+                    </a:lnT>
+                    <a:lnB w="9525" cap="flat" cmpd="sng" algn="ctr">
+                      <a:solidFill>
+                        <a:srgbClr val="D3DED0"/>
+                      </a:solidFill>
+                      <a:prstDash val="solid"/>
+                      <a:round/>
+                      <a:headEnd type="none" w="med" len="med"/>
+                      <a:tailEnd type="none" w="med" len="med"/>
+                    </a:lnB>
+                    <a:solidFill>
+                      <a:srgbClr val="F6E3DE"/>
+                    </a:solidFill>
+                  </a:tcPr>
+                </a:tc>
+                <a:tc>
+                  <a:txBody>
+                    <a:bodyPr/>
+                    <a:lstStyle/>
+                    <a:p>
+                      <a:pPr algn="l" indent="0" marL="0">
+                        <a:buNone/>
+                      </a:pPr>
+                      <a:r>
+                        <a:rPr lang="en-US" sz="700" dirty="0">
+                          <a:solidFill>
+                            <a:srgbClr val="B85042"/>
+                          </a:solidFill>
+                          <a:latin typeface="Meiryo UI" pitchFamily="34" charset="0"/>
+                          <a:ea typeface="Meiryo UI" pitchFamily="34" charset="-122"/>
+                          <a:cs typeface="Meiryo UI" pitchFamily="34" charset="-120"/>
+                        </a:rPr>
+                        <a:t>技術特化リスク:</a:t>
+                      </a:r>
+                      <a:endParaRPr lang="en-US" sz="700" dirty="0">
+                        <a:latin typeface="Meiryo UI" charset="0"/>
+                        <a:ea typeface="Meiryo UI" charset="0"/>
+                        <a:cs typeface="Meiryo UI" charset="0"/>
+                      </a:endParaRPr>
+                    </a:p>
+                    <a:p>
+                      <a:pPr algn="l" indent="0" marL="0">
+                        <a:buNone/>
+                      </a:pPr>
+                      <a:r>
+                        <a:rPr lang="en-US" sz="700" dirty="0">
+                          <a:solidFill>
+                            <a:srgbClr val="B85042"/>
+                          </a:solidFill>
+                          <a:latin typeface="Meiryo UI" pitchFamily="34" charset="0"/>
+                          <a:ea typeface="Meiryo UI" pitchFamily="34" charset="-122"/>
+                          <a:cs typeface="Meiryo UI" pitchFamily="34" charset="-120"/>
+                        </a:rPr>
+                        <a:t>工程は組み替えられない</a:t>
+                      </a:r>
+                      <a:endParaRPr lang="en-US" sz="700" dirty="0">
+                        <a:latin typeface="Meiryo UI" charset="0"/>
+                        <a:ea typeface="Meiryo UI" charset="0"/>
+                        <a:cs typeface="Meiryo UI" charset="0"/>
+                      </a:endParaRPr>
+                    </a:p>
+                  </a:txBody>
+                  <a:tcPr marL="54864" marR="54864" marT="54864" marB="54864" anchor="ctr">
+                    <a:lnL w="9525" cap="flat" cmpd="sng" algn="ctr">
+                      <a:solidFill>
+                        <a:srgbClr val="D3DED0"/>
+                      </a:solidFill>
+                      <a:prstDash val="solid"/>
+                      <a:round/>
+                      <a:headEnd type="none" w="med" len="med"/>
+                      <a:tailEnd type="none" w="med" len="med"/>
+                    </a:lnL>
+                    <a:lnR w="9525" cap="flat" cmpd="sng" algn="ctr">
+                      <a:solidFill>
+                        <a:srgbClr val="D3DED0"/>
+                      </a:solidFill>
+                      <a:prstDash val="solid"/>
+                      <a:round/>
+                      <a:headEnd type="none" w="med" len="med"/>
+                      <a:tailEnd type="none" w="med" len="med"/>
+                    </a:lnR>
+                    <a:lnT w="9525" cap="flat" cmpd="sng" algn="ctr">
+                      <a:solidFill>
+                        <a:srgbClr val="D3DED0"/>
+                      </a:solidFill>
+                      <a:prstDash val="solid"/>
+                      <a:round/>
+                      <a:headEnd type="none" w="med" len="med"/>
+                      <a:tailEnd type="none" w="med" len="med"/>
+                    </a:lnT>
+                    <a:lnB w="9525" cap="flat" cmpd="sng" algn="ctr">
+                      <a:solidFill>
+                        <a:srgbClr val="D3DED0"/>
+                      </a:solidFill>
+                      <a:prstDash val="solid"/>
+                      <a:round/>
+                      <a:headEnd type="none" w="med" len="med"/>
+                      <a:tailEnd type="none" w="med" len="med"/>
+                    </a:lnB>
+                    <a:solidFill>
+                      <a:srgbClr val="F6E3DE"/>
+                    </a:solidFill>
+                  </a:tcPr>
+                </a:tc>
+                <a:tc>
+                  <a:txBody>
+                    <a:bodyPr/>
+                    <a:lstStyle/>
+                    <a:p>
+                      <a:pPr algn="l" indent="0" marL="0">
+                        <a:buNone/>
+                      </a:pPr>
+                      <a:r>
+                        <a:rPr lang="en-US" sz="700" dirty="0">
+                          <a:solidFill>
+                            <a:srgbClr val="B85042"/>
+                          </a:solidFill>
+                          <a:latin typeface="Meiryo UI" pitchFamily="34" charset="0"/>
+                          <a:ea typeface="Meiryo UI" pitchFamily="34" charset="-122"/>
+                          <a:cs typeface="Meiryo UI" pitchFamily="34" charset="-120"/>
+                        </a:rPr>
+                        <a:t>技術特化リスク:</a:t>
+                      </a:r>
+                      <a:endParaRPr lang="en-US" sz="700" dirty="0">
+                        <a:latin typeface="Meiryo UI" charset="0"/>
+                        <a:ea typeface="Meiryo UI" charset="0"/>
+                        <a:cs typeface="Meiryo UI" charset="0"/>
+                      </a:endParaRPr>
+                    </a:p>
+                    <a:p>
+                      <a:pPr algn="l" indent="0" marL="0">
+                        <a:buNone/>
+                      </a:pPr>
+                      <a:r>
+                        <a:rPr lang="en-US" sz="700" dirty="0">
+                          <a:solidFill>
+                            <a:srgbClr val="B85042"/>
+                          </a:solidFill>
+                          <a:latin typeface="Meiryo UI" pitchFamily="34" charset="0"/>
+                          <a:ea typeface="Meiryo UI" pitchFamily="34" charset="-122"/>
+                          <a:cs typeface="Meiryo UI" pitchFamily="34" charset="-120"/>
+                        </a:rPr>
+                        <a:t>投資判断は他者に依存</a:t>
+                      </a:r>
+                      <a:endParaRPr lang="en-US" sz="700" dirty="0">
+                        <a:latin typeface="Meiryo UI" charset="0"/>
+                        <a:ea typeface="Meiryo UI" charset="0"/>
+                        <a:cs typeface="Meiryo UI" charset="0"/>
+                      </a:endParaRPr>
+                    </a:p>
+                  </a:txBody>
+                  <a:tcPr marL="54864" marR="54864" marT="54864" marB="54864" anchor="ctr">
+                    <a:lnL w="9525" cap="flat" cmpd="sng" algn="ctr">
+                      <a:solidFill>
+                        <a:srgbClr val="D3DED0"/>
+                      </a:solidFill>
+                      <a:prstDash val="solid"/>
+                      <a:round/>
+                      <a:headEnd type="none" w="med" len="med"/>
+                      <a:tailEnd type="none" w="med" len="med"/>
+                    </a:lnL>
+                    <a:lnR w="9525" cap="flat" cmpd="sng" algn="ctr">
+                      <a:solidFill>
+                        <a:srgbClr val="D3DED0"/>
+                      </a:solidFill>
+                      <a:prstDash val="solid"/>
+                      <a:round/>
+                      <a:headEnd type="none" w="med" len="med"/>
+                      <a:tailEnd type="none" w="med" len="med"/>
+                    </a:lnR>
+                    <a:lnT w="9525" cap="flat" cmpd="sng" algn="ctr">
+                      <a:solidFill>
+                        <a:srgbClr val="D3DED0"/>
+                      </a:solidFill>
+                      <a:prstDash val="solid"/>
+                      <a:round/>
+                      <a:headEnd type="none" w="med" len="med"/>
+                      <a:tailEnd type="none" w="med" len="med"/>
+                    </a:lnT>
+                    <a:lnB w="9525" cap="flat" cmpd="sng" algn="ctr">
+                      <a:solidFill>
+                        <a:srgbClr val="D3DED0"/>
+                      </a:solidFill>
+                      <a:prstDash val="solid"/>
+                      <a:round/>
+                      <a:headEnd type="none" w="med" len="med"/>
+                      <a:tailEnd type="none" w="med" len="med"/>
+                    </a:lnB>
+                    <a:solidFill>
+                      <a:srgbClr val="F6E3DE"/>
+                    </a:solidFill>
+                  </a:tcPr>
+                </a:tc>
+                <a:tc>
+                  <a:txBody>
+                    <a:bodyPr/>
+                    <a:lstStyle/>
+                    <a:p>
+                      <a:pPr algn="l" indent="0" marL="0">
+                        <a:buNone/>
+                      </a:pPr>
+                      <a:r>
+                        <a:rPr lang="en-US" sz="700" dirty="0">
+                          <a:solidFill>
+                            <a:srgbClr val="8A6D3B"/>
+                          </a:solidFill>
+                          <a:latin typeface="Meiryo UI" pitchFamily="34" charset="0"/>
+                          <a:ea typeface="Meiryo UI" pitchFamily="34" charset="-122"/>
+                          <a:cs typeface="Meiryo UI" pitchFamily="34" charset="-120"/>
+                        </a:rPr>
+                        <a:t>稀少ゾーン:</a:t>
+                      </a:r>
+                      <a:endParaRPr lang="en-US" sz="700" dirty="0">
+                        <a:latin typeface="Meiryo UI" charset="0"/>
+                        <a:ea typeface="Meiryo UI" charset="0"/>
+                        <a:cs typeface="Meiryo UI" charset="0"/>
+                      </a:endParaRPr>
+                    </a:p>
+                    <a:p>
+                      <a:pPr algn="l" indent="0" marL="0">
+                        <a:buNone/>
+                      </a:pPr>
+                      <a:r>
+                        <a:rPr lang="en-US" sz="700" dirty="0">
+                          <a:solidFill>
+                            <a:srgbClr val="8A6D3B"/>
+                          </a:solidFill>
+                          <a:latin typeface="Meiryo UI" pitchFamily="34" charset="0"/>
+                          <a:ea typeface="Meiryo UI" pitchFamily="34" charset="-122"/>
+                          <a:cs typeface="Meiryo UI" pitchFamily="34" charset="-120"/>
+                        </a:rPr>
+                        <a:t>技術×組織を動かす力を両方持つ</a:t>
+                      </a:r>
+                      <a:endParaRPr lang="en-US" sz="700" dirty="0">
+                        <a:latin typeface="Meiryo UI" charset="0"/>
+                        <a:ea typeface="Meiryo UI" charset="0"/>
+                        <a:cs typeface="Meiryo UI" charset="0"/>
+                      </a:endParaRPr>
+                    </a:p>
+                    <a:p>
+                      <a:pPr algn="l" indent="0" marL="0">
+                        <a:buNone/>
+                      </a:pPr>
+                      <a:r>
+                        <a:rPr lang="en-US" sz="700" dirty="0">
+                          <a:solidFill>
+                            <a:srgbClr val="8A6D3B"/>
+                          </a:solidFill>
+                          <a:latin typeface="Meiryo UI" pitchFamily="34" charset="0"/>
+                          <a:ea typeface="Meiryo UI" pitchFamily="34" charset="-122"/>
+                          <a:cs typeface="Meiryo UI" pitchFamily="34" charset="-120"/>
+                        </a:rPr>
+                        <a:t>次世代PEM候補</a:t>
+                      </a:r>
+                      <a:endParaRPr lang="en-US" sz="700" dirty="0">
+                        <a:latin typeface="Meiryo UI" charset="0"/>
+                        <a:ea typeface="Meiryo UI" charset="0"/>
+                        <a:cs typeface="Meiryo UI" charset="0"/>
+                      </a:endParaRPr>
+                    </a:p>
+                  </a:txBody>
+                  <a:tcPr marL="54864" marR="54864" marT="54864" marB="54864" anchor="ctr">
+                    <a:lnL w="9525" cap="flat" cmpd="sng" algn="ctr">
+                      <a:solidFill>
+                        <a:srgbClr val="D3DED0"/>
+                      </a:solidFill>
+                      <a:prstDash val="solid"/>
+                      <a:round/>
+                      <a:headEnd type="none" w="med" len="med"/>
+                      <a:tailEnd type="none" w="med" len="med"/>
+                    </a:lnL>
+                    <a:lnR w="9525" cap="flat" cmpd="sng" algn="ctr">
+                      <a:solidFill>
+                        <a:srgbClr val="D3DED0"/>
+                      </a:solidFill>
+                      <a:prstDash val="solid"/>
+                      <a:round/>
+                      <a:headEnd type="none" w="med" len="med"/>
+                      <a:tailEnd type="none" w="med" len="med"/>
+                    </a:lnR>
+                    <a:lnT w="9525" cap="flat" cmpd="sng" algn="ctr">
+                      <a:solidFill>
+                        <a:srgbClr val="D3DED0"/>
+                      </a:solidFill>
+                      <a:prstDash val="solid"/>
+                      <a:round/>
+                      <a:headEnd type="none" w="med" len="med"/>
+                      <a:tailEnd type="none" w="med" len="med"/>
+                    </a:lnT>
+                    <a:lnB w="9525" cap="flat" cmpd="sng" algn="ctr">
+                      <a:solidFill>
+                        <a:srgbClr val="D3DED0"/>
+                      </a:solidFill>
+                      <a:prstDash val="solid"/>
+                      <a:round/>
+                      <a:headEnd type="none" w="med" len="med"/>
+                      <a:tailEnd type="none" w="med" len="med"/>
+                    </a:lnB>
+                    <a:solidFill>
+                      <a:srgbClr val="FDF3E3"/>
+                    </a:solidFill>
+                  </a:tcPr>
+                </a:tc>
+              </a:tr>
+            </a:tbl>
+          </a:graphicData>
+        </a:graphic>
+      </p:graphicFrame>
+      <p:sp>
+        <p:nvSpPr>
+          <p:cNvPr id="5" name="Shape 2"/>
+          <p:cNvSpPr/>
+          <p:nvPr/>
+        </p:nvSpPr>
+        <p:spPr>
+          <a:xfrm>
+            <a:off x="274320" y="5440680"/>
+            <a:ext cx="11640312" cy="731520"/>
+          </a:xfrm>
+          <a:prstGeom prst="roundRect">
+            <a:avLst>
+              <a:gd name="adj" fmla="val 7500"/>
+            </a:avLst>
+          </a:prstGeom>
+          <a:solidFill>
+            <a:srgbClr val="FBEDEA"/>
+          </a:solidFill>
+          <a:ln w="12700">
+            <a:solidFill>
+              <a:srgbClr val="B85042"/>
+            </a:solidFill>
+            <a:prstDash val="solid"/>
+          </a:ln>
+        </p:spPr>
+      </p:sp>
+      <p:sp>
+        <p:nvSpPr>
+          <p:cNvPr id="6" name="Text 3"/>
+          <p:cNvSpPr/>
+          <p:nvPr/>
+        </p:nvSpPr>
+        <p:spPr>
+          <a:xfrm>
+            <a:off x="420624" y="5440680"/>
+            <a:ext cx="11338560" cy="731520"/>
+          </a:xfrm>
+          <a:prstGeom prst="rect">
+            <a:avLst/>
+          </a:prstGeom>
+          <a:noFill/>
+          <a:ln/>
+        </p:spPr>
+        <p:txBody>
+          <a:bodyPr wrap="square" lIns="0" tIns="0" rIns="0" bIns="0" rtlCol="0" anchor="ctr"/>
+          <a:lstStyle/>
+          <a:p>
+            <a:pPr indent="0" marL="0">
+              <a:lnSpc>
+                <a:spcPct val="115000"/>
+              </a:lnSpc>
+              <a:buNone/>
+            </a:pPr>
+            <a:r>
+              <a:rPr lang="en-US" sz="950" b="1" dirty="0">
+                <a:solidFill>
+                  <a:srgbClr val="B85042"/>
+                </a:solidFill>
+                <a:latin typeface="Meiryo UI" pitchFamily="34" charset="0"/>
+                <a:ea typeface="Meiryo UI" pitchFamily="34" charset="-122"/>
+                <a:cs typeface="Meiryo UI" pitchFamily="34" charset="-120"/>
+              </a:rPr>
+              <a:t>現行計画の落とし穴: </a:t>
+            </a:r>
+            <a:pPr indent="0" marL="0">
+              <a:lnSpc>
+                <a:spcPct val="115000"/>
+              </a:lnSpc>
+              <a:buNone/>
+            </a:pPr>
+            <a:r>
+              <a:rPr lang="en-US" sz="860" dirty="0">
+                <a:solidFill>
+                  <a:srgbClr val="2B2B2B"/>
+                </a:solidFill>
+                <a:latin typeface="Meiryo UI" pitchFamily="34" charset="0"/>
+                <a:ea typeface="Meiryo UI" pitchFamily="34" charset="-122"/>
+                <a:cs typeface="Meiryo UI" pitchFamily="34" charset="-120"/>
+              </a:rPr>
+              <a:t>Off-JT中心の育成はLevel1→Level4の技術軸(縦)だけを伸ばす設計で、構想力軸(横)への投資が無い。
+</a:t>
+            </a:r>
+            <a:pPr indent="0" marL="0">
+              <a:lnSpc>
+                <a:spcPct val="115000"/>
+              </a:lnSpc>
+              <a:buNone/>
+            </a:pPr>
+            <a:r>
+              <a:rPr lang="en-US" sz="860" dirty="0">
+                <a:solidFill>
+                  <a:srgbClr val="2B2B2B"/>
+                </a:solidFill>
+                <a:latin typeface="Meiryo UI" pitchFamily="34" charset="0"/>
+                <a:ea typeface="Meiryo UI" pitchFamily="34" charset="-122"/>
+                <a:cs typeface="Meiryo UI" pitchFamily="34" charset="-120"/>
+              </a:rPr>
+              <a:t>このままではLevel4×C1(技術は高いが「何を解くべきか」を判断できない)へ向かうリスクがある。目指すのは右下ではなく、中段〜右の★ゾーンである。</a:t>
+            </a:r>
+            <a:endParaRPr lang="en-US" sz="950" dirty="0"/>
+          </a:p>
+        </p:txBody>
+      </p:sp>
+      <p:sp>
+        <p:nvSpPr>
+          <p:cNvPr id="7" name="Text 4"/>
+          <p:cNvSpPr/>
+          <p:nvPr/>
+        </p:nvSpPr>
+        <p:spPr>
+          <a:xfrm>
+            <a:off x="274320" y="6309360"/>
+            <a:ext cx="11640312" cy="228600"/>
+          </a:xfrm>
+          <a:prstGeom prst="rect">
+            <a:avLst/>
+          </a:prstGeom>
+          <a:noFill/>
+          <a:ln/>
+        </p:spPr>
+        <p:txBody>
+          <a:bodyPr wrap="square" lIns="0" tIns="0" rIns="0" bIns="0" rtlCol="0" anchor="t"/>
+          <a:lstStyle/>
+          <a:p>
+            <a:pPr indent="0" marL="0">
+              <a:buNone/>
+            </a:pPr>
+            <a:r>
+              <a:rPr lang="en-US" sz="650" dirty="0">
+                <a:solidFill>
+                  <a:srgbClr val="595959"/>
+                </a:solidFill>
+                <a:latin typeface="Meiryo UI" pitchFamily="34" charset="0"/>
+                <a:ea typeface="Meiryo UI" pitchFamily="34" charset="-122"/>
+                <a:cs typeface="Meiryo UI" pitchFamily="34" charset="-120"/>
+              </a:rPr>
+              <a:t>出典: 強化人材②(DX人材ロボティクス)技術レベル・育成スキーム(生産技術戦略会議骨子案)、ラインアーキテクト人材育成プログラム資料</a:t>
+            </a:r>
+            <a:endParaRPr lang="en-US" sz="650" dirty="0"/>
+          </a:p>
+        </p:txBody>
+      </p:sp>
+    </p:spTree>
+  </p:cSld>
+  <p:clrMapOvr>
+    <a:masterClrMapping/>
+  </p:clrMapOvr>
+</p:sld>
+</file>
+
+<file path=ppt/slides/slide5.xml><?xml version="1.0" encoding="utf-8"?>
+<p:sld xmlns:a="http://schemas.openxmlformats.org/drawingml/2006/main" xmlns:r="http://schemas.openxmlformats.org/officeDocument/2006/relationships" xmlns:p="http://schemas.openxmlformats.org/presentationml/2006/main">
+  <p:cSld name="Slide 5">
+    <p:bg>
+      <p:bgPr>
+        <a:solidFill>
+          <a:srgbClr val="FFFFFF"/>
+        </a:solidFill>
+      </p:bgPr>
+    </p:bg>
+    <p:spTree>
+      <p:nvGrpSpPr>
+        <p:cNvPr id="1" name=""/>
+        <p:cNvGrpSpPr/>
+        <p:nvPr/>
+      </p:nvGrpSpPr>
+      <p:grpSpPr>
+        <a:xfrm>
+          <a:off x="0" y="0"/>
+          <a:ext cx="0" cy="0"/>
+          <a:chOff x="0" y="0"/>
+          <a:chExt cx="0" cy="0"/>
+        </a:xfrm>
+      </p:grpSpPr>
+      <p:sp>
+        <p:nvSpPr>
+          <p:cNvPr id="2" name="Text 0"/>
+          <p:cNvSpPr/>
+          <p:nvPr/>
+        </p:nvSpPr>
+        <p:spPr>
+          <a:xfrm>
+            <a:off x="274320" y="91440"/>
+            <a:ext cx="8229600" cy="365760"/>
+          </a:xfrm>
+          <a:prstGeom prst="rect">
+            <a:avLst/>
+          </a:prstGeom>
+          <a:noFill/>
+          <a:ln/>
+        </p:spPr>
+        <p:txBody>
+          <a:bodyPr wrap="square" lIns="0" tIns="0" rIns="0" bIns="0" rtlCol="0" anchor="ctr"/>
+          <a:lstStyle/>
+          <a:p>
+            <a:pPr indent="0" marL="0">
+              <a:buNone/>
+            </a:pPr>
+            <a:r>
+              <a:rPr lang="en-US" sz="1800" b="1" dirty="0">
+                <a:solidFill>
+                  <a:srgbClr val="1F3D20"/>
+                </a:solidFill>
+                <a:latin typeface="Meiryo UI" pitchFamily="34" charset="0"/>
+                <a:ea typeface="Meiryo UI" pitchFamily="34" charset="-122"/>
+                <a:cs typeface="Meiryo UI" pitchFamily="34" charset="-120"/>
+              </a:rPr>
+              <a:t>構想力レベルの詳細定義 — C1〜C4</a:t>
+            </a:r>
+            <a:endParaRPr lang="en-US" sz="1800" dirty="0"/>
+          </a:p>
+        </p:txBody>
+      </p:sp>
+      <p:sp>
+        <p:nvSpPr>
+          <p:cNvPr id="3" name="Text 1"/>
+          <p:cNvSpPr/>
+          <p:nvPr/>
+        </p:nvSpPr>
+        <p:spPr>
+          <a:xfrm>
+            <a:off x="274320" y="457200"/>
+            <a:ext cx="11640312" cy="237744"/>
+          </a:xfrm>
+          <a:prstGeom prst="rect">
+            <a:avLst/>
+          </a:prstGeom>
+          <a:noFill/>
+          <a:ln/>
+        </p:spPr>
+        <p:txBody>
+          <a:bodyPr wrap="square" lIns="0" tIns="0" rIns="0" bIns="0" rtlCol="0" anchor="ctr"/>
+          <a:lstStyle/>
+          <a:p>
+            <a:pPr indent="0" marL="0">
+              <a:buNone/>
+            </a:pPr>
+            <a:r>
+              <a:rPr lang="en-US" sz="950" b="1" dirty="0">
+                <a:solidFill>
+                  <a:srgbClr val="B85042"/>
+                </a:solidFill>
+                <a:latin typeface="Meiryo UI" pitchFamily="34" charset="0"/>
+                <a:ea typeface="Meiryo UI" pitchFamily="34" charset="-122"/>
+                <a:cs typeface="Meiryo UI" pitchFamily="34" charset="-120"/>
+              </a:rPr>
+              <a:t>各レベルを「自問」「合格ライン」「典型的な失敗」「成果物」の4点で定義し、評価委員会の判定基準とする</a:t>
+            </a:r>
+            <a:endParaRPr lang="en-US" sz="950" dirty="0"/>
+          </a:p>
+        </p:txBody>
+      </p:sp>
+      <p:graphicFrame>
+        <p:nvGraphicFramePr>
+          <p:cNvPr id="6" name="Table 0"/>
+          <p:cNvGraphicFramePr>
+            <a:graphicFrameLocks noGrp="1"/>
+          </p:cNvGraphicFramePr>
+          <p:nvPr>
+            <p:extLst>
+              <p:ext uri="{D42A27DB-BD31-4B8C-83A1-F6EECF244321}">
+                <p14:modId xmlns:p14="http://schemas.microsoft.com/office/powerpoint/2010/main" val="1579011935"/>
+              </p:ext>
+            </p:extLst>
+          </p:nvPr>
+        </p:nvGraphicFramePr>
+        <p:xfrm>
+          <a:off x="274320" y="786384"/>
+          <a:ext cx="11640312" cy="914400"/>
+        </p:xfrm>
+        <a:graphic>
+          <a:graphicData uri="http://schemas.openxmlformats.org/drawingml/2006/table">
+            <a:tbl>
+              <a:tblPr/>
+              <a:tblGrid>
+                <a:gridCol w="1554480"/>
+                <a:gridCol w="2286000"/>
+                <a:gridCol w="2743200"/>
+                <a:gridCol w="2404872"/>
+                <a:gridCol w="2651760"/>
+              </a:tblGrid>
+              <a:tr h="457200">
+                <a:tc>
+                  <a:txBody>
+                    <a:bodyPr/>
+                    <a:lstStyle/>
+                    <a:p>
+                      <a:pPr algn="l" indent="0" marL="0">
+                        <a:buNone/>
+                      </a:pPr>
+                      <a:r>
+                        <a:rPr lang="en-US" sz="760" dirty="0">
+                          <a:solidFill>
+                            <a:srgbClr val="2B2B2B"/>
+                          </a:solidFill>
+                          <a:latin typeface="Meiryo UI" pitchFamily="34" charset="0"/>
+                          <a:ea typeface="Meiryo UI" pitchFamily="34" charset="-122"/>
+                          <a:cs typeface="Meiryo UI" pitchFamily="34" charset="-120"/>
+                        </a:rPr>
+                        <a:t>レベル</a:t>
+                      </a:r>
+                      <a:endParaRPr lang="en-US" sz="760" dirty="0">
+                        <a:latin typeface="Meiryo UI" charset="0"/>
+                        <a:ea typeface="Meiryo UI" charset="0"/>
+                        <a:cs typeface="Meiryo UI" charset="0"/>
+                      </a:endParaRPr>
+                    </a:p>
+                  </a:txBody>
+                  <a:tcPr marL="54864" marR="54864" marT="54864" marB="54864" anchor="ctr">
+                    <a:lnL w="6350" cap="flat" cmpd="sng" algn="ctr">
+                      <a:solidFill>
+                        <a:srgbClr val="D3DED0"/>
+                      </a:solidFill>
+                      <a:prstDash val="solid"/>
+                      <a:round/>
+                      <a:headEnd type="none" w="med" len="med"/>
+                      <a:tailEnd type="none" w="med" len="med"/>
+                    </a:lnL>
+                    <a:lnR w="6350" cap="flat" cmpd="sng" algn="ctr">
+                      <a:solidFill>
+                        <a:srgbClr val="D3DED0"/>
+                      </a:solidFill>
+                      <a:prstDash val="solid"/>
+                      <a:round/>
+                      <a:headEnd type="none" w="med" len="med"/>
+                      <a:tailEnd type="none" w="med" len="med"/>
+                    </a:lnR>
+                    <a:lnT w="6350" cap="flat" cmpd="sng" algn="ctr">
+                      <a:solidFill>
+                        <a:srgbClr val="D3DED0"/>
+                      </a:solidFill>
+                      <a:prstDash val="solid"/>
+                      <a:round/>
+                      <a:headEnd type="none" w="med" len="med"/>
+                      <a:tailEnd type="none" w="med" len="med"/>
+                    </a:lnT>
+                    <a:lnB w="6350" cap="flat" cmpd="sng" algn="ctr">
+                      <a:solidFill>
+                        <a:srgbClr val="D3DED0"/>
+                      </a:solidFill>
+                      <a:prstDash val="solid"/>
+                      <a:round/>
+                      <a:headEnd type="none" w="med" len="med"/>
+                      <a:tailEnd type="none" w="med" len="med"/>
+                    </a:lnB>
+                  </a:tcPr>
+                </a:tc>
+                <a:tc>
+                  <a:txBody>
+                    <a:bodyPr/>
+                    <a:lstStyle/>
+                    <a:p>
+                      <a:pPr algn="l" indent="0" marL="0">
+                        <a:buNone/>
+                      </a:pPr>
+                      <a:r>
+                        <a:rPr lang="en-US" sz="760" dirty="0">
+                          <a:solidFill>
+                            <a:srgbClr val="2B2B2B"/>
+                          </a:solidFill>
+                          <a:latin typeface="Meiryo UI" pitchFamily="34" charset="0"/>
+                          <a:ea typeface="Meiryo UI" pitchFamily="34" charset="-122"/>
+                          <a:cs typeface="Meiryo UI" pitchFamily="34" charset="-120"/>
+                        </a:rPr>
+                        <a:t>自問</a:t>
+                      </a:r>
+                      <a:endParaRPr lang="en-US" sz="760" dirty="0">
+                        <a:latin typeface="Meiryo UI" charset="0"/>
+                        <a:ea typeface="Meiryo UI" charset="0"/>
+                        <a:cs typeface="Meiryo UI" charset="0"/>
+                      </a:endParaRPr>
+                    </a:p>
+                    <a:p>
+                      <a:pPr algn="l" indent="0" marL="0">
+                        <a:buNone/>
+                      </a:pPr>
+                      <a:r>
+                        <a:rPr lang="en-US" sz="760" dirty="0">
+                          <a:solidFill>
+                            <a:srgbClr val="2B2B2B"/>
+                          </a:solidFill>
+                          <a:latin typeface="Meiryo UI" pitchFamily="34" charset="0"/>
+                          <a:ea typeface="Meiryo UI" pitchFamily="34" charset="-122"/>
+                          <a:cs typeface="Meiryo UI" pitchFamily="34" charset="-120"/>
+                        </a:rPr>
+                        <a:t>(この問いを持てているか)</a:t>
+                      </a:r>
+                      <a:endParaRPr lang="en-US" sz="760" dirty="0">
+                        <a:latin typeface="Meiryo UI" charset="0"/>
+                        <a:ea typeface="Meiryo UI" charset="0"/>
+                        <a:cs typeface="Meiryo UI" charset="0"/>
+                      </a:endParaRPr>
+                    </a:p>
+                  </a:txBody>
+                  <a:tcPr marL="54864" marR="54864" marT="54864" marB="54864" anchor="ctr">
+                    <a:lnL w="6350" cap="flat" cmpd="sng" algn="ctr">
+                      <a:solidFill>
+                        <a:srgbClr val="D3DED0"/>
+                      </a:solidFill>
+                      <a:prstDash val="solid"/>
+                      <a:round/>
+                      <a:headEnd type="none" w="med" len="med"/>
+                      <a:tailEnd type="none" w="med" len="med"/>
+                    </a:lnL>
+                    <a:lnR w="6350" cap="flat" cmpd="sng" algn="ctr">
+                      <a:solidFill>
+                        <a:srgbClr val="D3DED0"/>
+                      </a:solidFill>
+                      <a:prstDash val="solid"/>
+                      <a:round/>
+                      <a:headEnd type="none" w="med" len="med"/>
+                      <a:tailEnd type="none" w="med" len="med"/>
+                    </a:lnR>
+                    <a:lnT w="6350" cap="flat" cmpd="sng" algn="ctr">
+                      <a:solidFill>
+                        <a:srgbClr val="D3DED0"/>
+                      </a:solidFill>
+                      <a:prstDash val="solid"/>
+                      <a:round/>
+                      <a:headEnd type="none" w="med" len="med"/>
+                      <a:tailEnd type="none" w="med" len="med"/>
+                    </a:lnT>
+                    <a:lnB w="6350" cap="flat" cmpd="sng" algn="ctr">
+                      <a:solidFill>
+                        <a:srgbClr val="D3DED0"/>
+                      </a:solidFill>
+                      <a:prstDash val="solid"/>
+                      <a:round/>
+                      <a:headEnd type="none" w="med" len="med"/>
+                      <a:tailEnd type="none" w="med" len="med"/>
+                    </a:lnB>
+                  </a:tcPr>
+                </a:tc>
+                <a:tc>
+                  <a:txBody>
+                    <a:bodyPr/>
+                    <a:lstStyle/>
+                    <a:p>
+                      <a:pPr algn="l" indent="0" marL="0">
+                        <a:buNone/>
+                      </a:pPr>
+                      <a:r>
+                        <a:rPr lang="en-US" sz="760" dirty="0">
+                          <a:solidFill>
+                            <a:srgbClr val="2B2B2B"/>
+                          </a:solidFill>
+                          <a:latin typeface="Meiryo UI" pitchFamily="34" charset="0"/>
+                          <a:ea typeface="Meiryo UI" pitchFamily="34" charset="-122"/>
+                          <a:cs typeface="Meiryo UI" pitchFamily="34" charset="-120"/>
+                        </a:rPr>
+                        <a:t>合格ライン</a:t>
+                      </a:r>
+                      <a:endParaRPr lang="en-US" sz="760" dirty="0">
+                        <a:latin typeface="Meiryo UI" charset="0"/>
+                        <a:ea typeface="Meiryo UI" charset="0"/>
+                        <a:cs typeface="Meiryo UI" charset="0"/>
+                      </a:endParaRPr>
+                    </a:p>
+                    <a:p>
+                      <a:pPr algn="l" indent="0" marL="0">
+                        <a:buNone/>
+                      </a:pPr>
+                      <a:r>
+                        <a:rPr lang="en-US" sz="760" dirty="0">
+                          <a:solidFill>
+                            <a:srgbClr val="2B2B2B"/>
+                          </a:solidFill>
+                          <a:latin typeface="Meiryo UI" pitchFamily="34" charset="0"/>
+                          <a:ea typeface="Meiryo UI" pitchFamily="34" charset="-122"/>
+                          <a:cs typeface="Meiryo UI" pitchFamily="34" charset="-120"/>
+                        </a:rPr>
+                        <a:t>(判断基準)</a:t>
+                      </a:r>
+                      <a:endParaRPr lang="en-US" sz="760" dirty="0">
+                        <a:latin typeface="Meiryo UI" charset="0"/>
+                        <a:ea typeface="Meiryo UI" charset="0"/>
+                        <a:cs typeface="Meiryo UI" charset="0"/>
+                      </a:endParaRPr>
+                    </a:p>
+                  </a:txBody>
+                  <a:tcPr marL="54864" marR="54864" marT="54864" marB="54864" anchor="ctr">
+                    <a:lnL w="6350" cap="flat" cmpd="sng" algn="ctr">
+                      <a:solidFill>
+                        <a:srgbClr val="D3DED0"/>
+                      </a:solidFill>
+                      <a:prstDash val="solid"/>
+                      <a:round/>
+                      <a:headEnd type="none" w="med" len="med"/>
+                      <a:tailEnd type="none" w="med" len="med"/>
+                    </a:lnL>
+                    <a:lnR w="6350" cap="flat" cmpd="sng" algn="ctr">
+                      <a:solidFill>
+                        <a:srgbClr val="D3DED0"/>
+                      </a:solidFill>
+                      <a:prstDash val="solid"/>
+                      <a:round/>
+                      <a:headEnd type="none" w="med" len="med"/>
+                      <a:tailEnd type="none" w="med" len="med"/>
+                    </a:lnR>
+                    <a:lnT w="6350" cap="flat" cmpd="sng" algn="ctr">
+                      <a:solidFill>
+                        <a:srgbClr val="D3DED0"/>
+                      </a:solidFill>
+                      <a:prstDash val="solid"/>
+                      <a:round/>
+                      <a:headEnd type="none" w="med" len="med"/>
+                      <a:tailEnd type="none" w="med" len="med"/>
+                    </a:lnT>
+                    <a:lnB w="6350" cap="flat" cmpd="sng" algn="ctr">
+                      <a:solidFill>
+                        <a:srgbClr val="D3DED0"/>
+                      </a:solidFill>
+                      <a:prstDash val="solid"/>
+                      <a:round/>
+                      <a:headEnd type="none" w="med" len="med"/>
+                      <a:tailEnd type="none" w="med" len="med"/>
+                    </a:lnB>
+                  </a:tcPr>
+                </a:tc>
+                <a:tc>
+                  <a:txBody>
+                    <a:bodyPr/>
+                    <a:lstStyle/>
+                    <a:p>
+                      <a:pPr algn="l" indent="0" marL="0">
+                        <a:buNone/>
+                      </a:pPr>
+                      <a:r>
+                        <a:rPr lang="en-US" sz="760" dirty="0">
+                          <a:solidFill>
+                            <a:srgbClr val="2B2B2B"/>
+                          </a:solidFill>
+                          <a:latin typeface="Meiryo UI" pitchFamily="34" charset="0"/>
+                          <a:ea typeface="Meiryo UI" pitchFamily="34" charset="-122"/>
+                          <a:cs typeface="Meiryo UI" pitchFamily="34" charset="-120"/>
+                        </a:rPr>
+                        <a:t>典型的な失敗パターン</a:t>
+                      </a:r>
+                      <a:endParaRPr lang="en-US" sz="760" dirty="0">
+                        <a:latin typeface="Meiryo UI" charset="0"/>
+                        <a:ea typeface="Meiryo UI" charset="0"/>
+                        <a:cs typeface="Meiryo UI" charset="0"/>
+                      </a:endParaRPr>
+                    </a:p>
+                  </a:txBody>
+                  <a:tcPr marL="54864" marR="54864" marT="54864" marB="54864" anchor="ctr">
+                    <a:lnL w="6350" cap="flat" cmpd="sng" algn="ctr">
+                      <a:solidFill>
+                        <a:srgbClr val="D3DED0"/>
+                      </a:solidFill>
+                      <a:prstDash val="solid"/>
+                      <a:round/>
+                      <a:headEnd type="none" w="med" len="med"/>
+                      <a:tailEnd type="none" w="med" len="med"/>
+                    </a:lnL>
+                    <a:lnR w="6350" cap="flat" cmpd="sng" algn="ctr">
+                      <a:solidFill>
+                        <a:srgbClr val="D3DED0"/>
+                      </a:solidFill>
+                      <a:prstDash val="solid"/>
+                      <a:round/>
+                      <a:headEnd type="none" w="med" len="med"/>
+                      <a:tailEnd type="none" w="med" len="med"/>
+                    </a:lnR>
+                    <a:lnT w="6350" cap="flat" cmpd="sng" algn="ctr">
+                      <a:solidFill>
+                        <a:srgbClr val="D3DED0"/>
+                      </a:solidFill>
+                      <a:prstDash val="solid"/>
+                      <a:round/>
+                      <a:headEnd type="none" w="med" len="med"/>
+                      <a:tailEnd type="none" w="med" len="med"/>
+                    </a:lnT>
+                    <a:lnB w="6350" cap="flat" cmpd="sng" algn="ctr">
+                      <a:solidFill>
+                        <a:srgbClr val="D3DED0"/>
+                      </a:solidFill>
+                      <a:prstDash val="solid"/>
+                      <a:round/>
+                      <a:headEnd type="none" w="med" len="med"/>
+                      <a:tailEnd type="none" w="med" len="med"/>
+                    </a:lnB>
+                  </a:tcPr>
+                </a:tc>
+                <a:tc>
+                  <a:txBody>
+                    <a:bodyPr/>
+                    <a:lstStyle/>
+                    <a:p>
+                      <a:pPr algn="l" indent="0" marL="0">
+                        <a:buNone/>
+                      </a:pPr>
+                      <a:r>
+                        <a:rPr lang="en-US" sz="760" dirty="0">
+                          <a:solidFill>
+                            <a:srgbClr val="2B2B2B"/>
+                          </a:solidFill>
+                          <a:latin typeface="Meiryo UI" pitchFamily="34" charset="0"/>
+                          <a:ea typeface="Meiryo UI" pitchFamily="34" charset="-122"/>
+                          <a:cs typeface="Meiryo UI" pitchFamily="34" charset="-120"/>
+                        </a:rPr>
+                        <a:t>合格の証拠(成果物)</a:t>
+                      </a:r>
+                      <a:endParaRPr lang="en-US" sz="760" dirty="0">
+                        <a:latin typeface="Meiryo UI" charset="0"/>
+                        <a:ea typeface="Meiryo UI" charset="0"/>
+                        <a:cs typeface="Meiryo UI" charset="0"/>
+                      </a:endParaRPr>
+                    </a:p>
+                  </a:txBody>
+                  <a:tcPr marL="54864" marR="54864" marT="54864" marB="54864" anchor="ctr">
+                    <a:lnL w="6350" cap="flat" cmpd="sng" algn="ctr">
+                      <a:solidFill>
+                        <a:srgbClr val="D3DED0"/>
+                      </a:solidFill>
+                      <a:prstDash val="solid"/>
+                      <a:round/>
+                      <a:headEnd type="none" w="med" len="med"/>
+                      <a:tailEnd type="none" w="med" len="med"/>
+                    </a:lnL>
+                    <a:lnR w="6350" cap="flat" cmpd="sng" algn="ctr">
+                      <a:solidFill>
+                        <a:srgbClr val="D3DED0"/>
+                      </a:solidFill>
+                      <a:prstDash val="solid"/>
+                      <a:round/>
+                      <a:headEnd type="none" w="med" len="med"/>
+                      <a:tailEnd type="none" w="med" len="med"/>
+                    </a:lnR>
+                    <a:lnT w="6350" cap="flat" cmpd="sng" algn="ctr">
+                      <a:solidFill>
+                        <a:srgbClr val="D3DED0"/>
+                      </a:solidFill>
+                      <a:prstDash val="solid"/>
+                      <a:round/>
+                      <a:headEnd type="none" w="med" len="med"/>
+                      <a:tailEnd type="none" w="med" len="med"/>
+                    </a:lnT>
+                    <a:lnB w="6350" cap="flat" cmpd="sng" algn="ctr">
+                      <a:solidFill>
+                        <a:srgbClr val="D3DED0"/>
+                      </a:solidFill>
+                      <a:prstDash val="solid"/>
+                      <a:round/>
+                      <a:headEnd type="none" w="med" len="med"/>
+                      <a:tailEnd type="none" w="med" len="med"/>
+                    </a:lnB>
+                  </a:tcPr>
+                </a:tc>
+              </a:tr>
+              <a:tr h="1051560">
+                <a:tc>
+                  <a:txBody>
+                    <a:bodyPr/>
+                    <a:lstStyle/>
+                    <a:p>
+                      <a:pPr algn="l" indent="0" marL="0">
+                        <a:buNone/>
+                      </a:pPr>
+                      <a:r>
+                        <a:rPr lang="en-US" sz="900" b="1" dirty="0">
+                          <a:solidFill>
+                            <a:srgbClr val="1F3D20"/>
+                          </a:solidFill>
+                          <a:latin typeface="Meiryo UI" pitchFamily="34" charset="0"/>
+                          <a:ea typeface="Meiryo UI" pitchFamily="34" charset="-122"/>
+                          <a:cs typeface="Meiryo UI" pitchFamily="34" charset="-120"/>
+                        </a:rPr>
+                        <a:t>C1</a:t>
+                      </a:r>
+                      <a:endParaRPr lang="en-US" sz="900" dirty="0">
+                        <a:latin typeface="Meiryo UI" charset="0"/>
+                        <a:ea typeface="Meiryo UI" charset="0"/>
+                        <a:cs typeface="Meiryo UI" charset="0"/>
+                      </a:endParaRPr>
+                    </a:p>
+                    <a:p>
+                      <a:pPr algn="l" indent="0" marL="0">
+                        <a:buNone/>
+                      </a:pPr>
+                      <a:r>
+                        <a:rPr lang="en-US" sz="900" b="1" dirty="0">
+                          <a:solidFill>
+                            <a:srgbClr val="1F3D20"/>
+                          </a:solidFill>
+                          <a:latin typeface="Meiryo UI" pitchFamily="34" charset="0"/>
+                          <a:ea typeface="Meiryo UI" pitchFamily="34" charset="-122"/>
+                          <a:cs typeface="Meiryo UI" pitchFamily="34" charset="-120"/>
+                        </a:rPr>
+                        <a:t>基準を疑う</a:t>
+                      </a:r>
+                      <a:endParaRPr lang="en-US" sz="900" dirty="0">
+                        <a:latin typeface="Meiryo UI" charset="0"/>
+                        <a:ea typeface="Meiryo UI" charset="0"/>
+                        <a:cs typeface="Meiryo UI" charset="0"/>
+                      </a:endParaRPr>
+                    </a:p>
+                  </a:txBody>
+                  <a:tcPr marL="54864" marR="54864" marT="54864" marB="54864" anchor="ctr">
+                    <a:lnL w="6350" cap="flat" cmpd="sng" algn="ctr">
+                      <a:solidFill>
+                        <a:srgbClr val="D3DED0"/>
+                      </a:solidFill>
+                      <a:prstDash val="solid"/>
+                      <a:round/>
+                      <a:headEnd type="none" w="med" len="med"/>
+                      <a:tailEnd type="none" w="med" len="med"/>
+                    </a:lnL>
+                    <a:lnR w="6350" cap="flat" cmpd="sng" algn="ctr">
+                      <a:solidFill>
+                        <a:srgbClr val="D3DED0"/>
+                      </a:solidFill>
+                      <a:prstDash val="solid"/>
+                      <a:round/>
+                      <a:headEnd type="none" w="med" len="med"/>
+                      <a:tailEnd type="none" w="med" len="med"/>
+                    </a:lnR>
+                    <a:lnT w="6350" cap="flat" cmpd="sng" algn="ctr">
+                      <a:solidFill>
+                        <a:srgbClr val="D3DED0"/>
+                      </a:solidFill>
+                      <a:prstDash val="solid"/>
+                      <a:round/>
+                      <a:headEnd type="none" w="med" len="med"/>
+                      <a:tailEnd type="none" w="med" len="med"/>
+                    </a:lnT>
+                    <a:lnB w="6350" cap="flat" cmpd="sng" algn="ctr">
+                      <a:solidFill>
+                        <a:srgbClr val="D3DED0"/>
+                      </a:solidFill>
+                      <a:prstDash val="solid"/>
+                      <a:round/>
+                      <a:headEnd type="none" w="med" len="med"/>
+                      <a:tailEnd type="none" w="med" len="med"/>
+                    </a:lnB>
+                    <a:solidFill>
+                      <a:srgbClr val="DFEBDB"/>
+                    </a:solidFill>
+                  </a:tcPr>
+                </a:tc>
+                <a:tc>
+                  <a:txBody>
+                    <a:bodyPr/>
+                    <a:lstStyle/>
+                    <a:p>
+                      <a:pPr algn="l" indent="0" marL="0">
+                        <a:buNone/>
+                      </a:pPr>
+                      <a:r>
+                        <a:rPr lang="en-US" sz="760" i="1" dirty="0">
+                          <a:solidFill>
+                            <a:srgbClr val="2B2B2B"/>
+                          </a:solidFill>
+                          <a:latin typeface="Meiryo UI" pitchFamily="34" charset="0"/>
+                          <a:ea typeface="Meiryo UI" pitchFamily="34" charset="-122"/>
+                          <a:cs typeface="Meiryo UI" pitchFamily="34" charset="-120"/>
+                        </a:rPr>
+                        <a:t>「この作業は、</a:t>
+                      </a:r>
+                      <a:endParaRPr lang="en-US" sz="760" dirty="0">
+                        <a:latin typeface="Meiryo UI" charset="0"/>
+                        <a:ea typeface="Meiryo UI" charset="0"/>
+                        <a:cs typeface="Meiryo UI" charset="0"/>
+                      </a:endParaRPr>
+                    </a:p>
+                    <a:p>
+                      <a:pPr algn="l" indent="0" marL="0">
+                        <a:buNone/>
+                      </a:pPr>
+                      <a:r>
+                        <a:rPr lang="en-US" sz="760" i="1" dirty="0">
+                          <a:solidFill>
+                            <a:srgbClr val="2B2B2B"/>
+                          </a:solidFill>
+                          <a:latin typeface="Meiryo UI" pitchFamily="34" charset="0"/>
+                          <a:ea typeface="Meiryo UI" pitchFamily="34" charset="-122"/>
+                          <a:cs typeface="Meiryo UI" pitchFamily="34" charset="-120"/>
+                        </a:rPr>
+                        <a:t>そもそも必要か?」</a:t>
+                      </a:r>
+                      <a:endParaRPr lang="en-US" sz="760" dirty="0">
+                        <a:latin typeface="Meiryo UI" charset="0"/>
+                        <a:ea typeface="Meiryo UI" charset="0"/>
+                        <a:cs typeface="Meiryo UI" charset="0"/>
+                      </a:endParaRPr>
+                    </a:p>
+                  </a:txBody>
+                  <a:tcPr marL="54864" marR="54864" marT="54864" marB="54864" anchor="ctr">
+                    <a:lnL w="6350" cap="flat" cmpd="sng" algn="ctr">
+                      <a:solidFill>
+                        <a:srgbClr val="D3DED0"/>
+                      </a:solidFill>
+                      <a:prstDash val="solid"/>
+                      <a:round/>
+                      <a:headEnd type="none" w="med" len="med"/>
+                      <a:tailEnd type="none" w="med" len="med"/>
+                    </a:lnL>
+                    <a:lnR w="6350" cap="flat" cmpd="sng" algn="ctr">
+                      <a:solidFill>
+                        <a:srgbClr val="D3DED0"/>
+                      </a:solidFill>
+                      <a:prstDash val="solid"/>
+                      <a:round/>
+                      <a:headEnd type="none" w="med" len="med"/>
+                      <a:tailEnd type="none" w="med" len="med"/>
+                    </a:lnR>
+                    <a:lnT w="6350" cap="flat" cmpd="sng" algn="ctr">
+                      <a:solidFill>
+                        <a:srgbClr val="D3DED0"/>
+                      </a:solidFill>
+                      <a:prstDash val="solid"/>
+                      <a:round/>
+                      <a:headEnd type="none" w="med" len="med"/>
+                      <a:tailEnd type="none" w="med" len="med"/>
+                    </a:lnT>
+                    <a:lnB w="6350" cap="flat" cmpd="sng" algn="ctr">
+                      <a:solidFill>
+                        <a:srgbClr val="D3DED0"/>
+                      </a:solidFill>
+                      <a:prstDash val="solid"/>
+                      <a:round/>
+                      <a:headEnd type="none" w="med" len="med"/>
+                      <a:tailEnd type="none" w="med" len="med"/>
+                    </a:lnB>
+                  </a:tcPr>
+                </a:tc>
+                <a:tc>
+                  <a:txBody>
+                    <a:bodyPr/>
+                    <a:lstStyle/>
+                    <a:p>
+                      <a:pPr algn="l" indent="0" marL="0">
+                        <a:buNone/>
+                      </a:pPr>
+                      <a:r>
+                        <a:rPr lang="en-US" sz="760" dirty="0">
+                          <a:solidFill>
+                            <a:srgbClr val="2B2B2B"/>
+                          </a:solidFill>
+                          <a:latin typeface="Meiryo UI" pitchFamily="34" charset="0"/>
+                          <a:ea typeface="Meiryo UI" pitchFamily="34" charset="-122"/>
+                          <a:cs typeface="Meiryo UI" pitchFamily="34" charset="-120"/>
+                        </a:rPr>
+                        <a:t>作業の根拠となる規定を自力で特定し、要求元(法規/業界/当社独自)を分類できる</a:t>
+                      </a:r>
+                      <a:endParaRPr lang="en-US" sz="760" dirty="0">
+                        <a:latin typeface="Meiryo UI" charset="0"/>
+                        <a:ea typeface="Meiryo UI" charset="0"/>
+                        <a:cs typeface="Meiryo UI" charset="0"/>
+                      </a:endParaRPr>
+                    </a:p>
+                  </a:txBody>
+                  <a:tcPr marL="54864" marR="54864" marT="54864" marB="54864" anchor="ctr">
+                    <a:lnL w="6350" cap="flat" cmpd="sng" algn="ctr">
+                      <a:solidFill>
+                        <a:srgbClr val="D3DED0"/>
+                      </a:solidFill>
+                      <a:prstDash val="solid"/>
+                      <a:round/>
+                      <a:headEnd type="none" w="med" len="med"/>
+                      <a:tailEnd type="none" w="med" len="med"/>
+                    </a:lnL>
+                    <a:lnR w="6350" cap="flat" cmpd="sng" algn="ctr">
+                      <a:solidFill>
+                        <a:srgbClr val="D3DED0"/>
+                      </a:solidFill>
+                      <a:prstDash val="solid"/>
+                      <a:round/>
+                      <a:headEnd type="none" w="med" len="med"/>
+                      <a:tailEnd type="none" w="med" len="med"/>
+                    </a:lnR>
+                    <a:lnT w="6350" cap="flat" cmpd="sng" algn="ctr">
+                      <a:solidFill>
+                        <a:srgbClr val="D3DED0"/>
+                      </a:solidFill>
+                      <a:prstDash val="solid"/>
+                      <a:round/>
+                      <a:headEnd type="none" w="med" len="med"/>
+                      <a:tailEnd type="none" w="med" len="med"/>
+                    </a:lnT>
+                    <a:lnB w="6350" cap="flat" cmpd="sng" algn="ctr">
+                      <a:solidFill>
+                        <a:srgbClr val="D3DED0"/>
+                      </a:solidFill>
+                      <a:prstDash val="solid"/>
+                      <a:round/>
+                      <a:headEnd type="none" w="med" len="med"/>
+                      <a:tailEnd type="none" w="med" len="med"/>
+                    </a:lnB>
+                  </a:tcPr>
+                </a:tc>
+                <a:tc>
+                  <a:txBody>
+                    <a:bodyPr/>
+                    <a:lstStyle/>
+                    <a:p>
+                      <a:pPr algn="l" indent="0" marL="0">
+                        <a:buNone/>
+                      </a:pPr>
+                      <a:r>
+                        <a:rPr lang="en-US" sz="760" dirty="0">
+                          <a:solidFill>
+                            <a:srgbClr val="B85042"/>
+                          </a:solidFill>
+                          <a:latin typeface="Meiryo UI" pitchFamily="34" charset="0"/>
+                          <a:ea typeface="Meiryo UI" pitchFamily="34" charset="-122"/>
+                          <a:cs typeface="Meiryo UI" pitchFamily="34" charset="-120"/>
+                        </a:rPr>
+                        <a:t>「昔からやっているから」を根拠として無条件に受け入れてしまう</a:t>
+                      </a:r>
+                      <a:endParaRPr lang="en-US" sz="760" dirty="0">
+                        <a:latin typeface="Meiryo UI" charset="0"/>
+                        <a:ea typeface="Meiryo UI" charset="0"/>
+                        <a:cs typeface="Meiryo UI" charset="0"/>
+                      </a:endParaRPr>
+                    </a:p>
+                  </a:txBody>
+                  <a:tcPr marL="54864" marR="54864" marT="54864" marB="54864" anchor="ctr">
+                    <a:lnL w="6350" cap="flat" cmpd="sng" algn="ctr">
+                      <a:solidFill>
+                        <a:srgbClr val="D3DED0"/>
+                      </a:solidFill>
+                      <a:prstDash val="solid"/>
+                      <a:round/>
+                      <a:headEnd type="none" w="med" len="med"/>
+                      <a:tailEnd type="none" w="med" len="med"/>
+                    </a:lnL>
+                    <a:lnR w="6350" cap="flat" cmpd="sng" algn="ctr">
+                      <a:solidFill>
+                        <a:srgbClr val="D3DED0"/>
+                      </a:solidFill>
+                      <a:prstDash val="solid"/>
+                      <a:round/>
+                      <a:headEnd type="none" w="med" len="med"/>
+                      <a:tailEnd type="none" w="med" len="med"/>
+                    </a:lnR>
+                    <a:lnT w="6350" cap="flat" cmpd="sng" algn="ctr">
+                      <a:solidFill>
+                        <a:srgbClr val="D3DED0"/>
+                      </a:solidFill>
+                      <a:prstDash val="solid"/>
+                      <a:round/>
+                      <a:headEnd type="none" w="med" len="med"/>
+                      <a:tailEnd type="none" w="med" len="med"/>
+                    </a:lnT>
+                    <a:lnB w="6350" cap="flat" cmpd="sng" algn="ctr">
+                      <a:solidFill>
+                        <a:srgbClr val="D3DED0"/>
+                      </a:solidFill>
+                      <a:prstDash val="solid"/>
+                      <a:round/>
+                      <a:headEnd type="none" w="med" len="med"/>
+                      <a:tailEnd type="none" w="med" len="med"/>
+                    </a:lnB>
+                  </a:tcPr>
+                </a:tc>
+                <a:tc>
+                  <a:txBody>
+                    <a:bodyPr/>
+                    <a:lstStyle/>
+                    <a:p>
+                      <a:pPr algn="l" indent="0" marL="0">
+                        <a:buNone/>
+                      </a:pPr>
+                      <a:r>
+                        <a:rPr lang="en-US" sz="760" b="1" dirty="0">
+                          <a:solidFill>
+                            <a:srgbClr val="2C5F2D"/>
+                          </a:solidFill>
+                          <a:latin typeface="Meiryo UI" pitchFamily="34" charset="0"/>
+                          <a:ea typeface="Meiryo UI" pitchFamily="34" charset="-122"/>
+                          <a:cs typeface="Meiryo UI" pitchFamily="34" charset="-120"/>
+                        </a:rPr>
+                        <a:t>改定提案がQA変更管理プロセスに提出され、採否判定を受けている</a:t>
+                      </a:r>
+                      <a:endParaRPr lang="en-US" sz="760" dirty="0">
+                        <a:latin typeface="Meiryo UI" charset="0"/>
+                        <a:ea typeface="Meiryo UI" charset="0"/>
+                        <a:cs typeface="Meiryo UI" charset="0"/>
+                      </a:endParaRPr>
+                    </a:p>
+                  </a:txBody>
+                  <a:tcPr marL="54864" marR="54864" marT="54864" marB="54864" anchor="ctr">
+                    <a:lnL w="6350" cap="flat" cmpd="sng" algn="ctr">
+                      <a:solidFill>
+                        <a:srgbClr val="D3DED0"/>
+                      </a:solidFill>
+                      <a:prstDash val="solid"/>
+                      <a:round/>
+                      <a:headEnd type="none" w="med" len="med"/>
+                      <a:tailEnd type="none" w="med" len="med"/>
+                    </a:lnL>
+                    <a:lnR w="6350" cap="flat" cmpd="sng" algn="ctr">
+                      <a:solidFill>
+                        <a:srgbClr val="D3DED0"/>
+                      </a:solidFill>
+                      <a:prstDash val="solid"/>
+                      <a:round/>
+                      <a:headEnd type="none" w="med" len="med"/>
+                      <a:tailEnd type="none" w="med" len="med"/>
+                    </a:lnR>
+                    <a:lnT w="6350" cap="flat" cmpd="sng" algn="ctr">
+                      <a:solidFill>
+                        <a:srgbClr val="D3DED0"/>
+                      </a:solidFill>
+                      <a:prstDash val="solid"/>
+                      <a:round/>
+                      <a:headEnd type="none" w="med" len="med"/>
+                      <a:tailEnd type="none" w="med" len="med"/>
+                    </a:lnT>
+                    <a:lnB w="6350" cap="flat" cmpd="sng" algn="ctr">
+                      <a:solidFill>
+                        <a:srgbClr val="D3DED0"/>
+                      </a:solidFill>
+                      <a:prstDash val="solid"/>
+                      <a:round/>
+                      <a:headEnd type="none" w="med" len="med"/>
+                      <a:tailEnd type="none" w="med" len="med"/>
+                    </a:lnB>
+                  </a:tcPr>
+                </a:tc>
+              </a:tr>
+              <a:tr h="1051560">
+                <a:tc>
+                  <a:txBody>
+                    <a:bodyPr/>
+                    <a:lstStyle/>
+                    <a:p>
+                      <a:pPr algn="l" indent="0" marL="0">
+                        <a:buNone/>
+                      </a:pPr>
+                      <a:r>
+                        <a:rPr lang="en-US" sz="900" b="1" dirty="0">
+                          <a:solidFill>
+                            <a:srgbClr val="1F3D20"/>
+                          </a:solidFill>
+                          <a:latin typeface="Meiryo UI" pitchFamily="34" charset="0"/>
+                          <a:ea typeface="Meiryo UI" pitchFamily="34" charset="-122"/>
+                          <a:cs typeface="Meiryo UI" pitchFamily="34" charset="-120"/>
+                        </a:rPr>
+                        <a:t>C2</a:t>
+                      </a:r>
+                      <a:endParaRPr lang="en-US" sz="900" dirty="0">
+                        <a:latin typeface="Meiryo UI" charset="0"/>
+                        <a:ea typeface="Meiryo UI" charset="0"/>
+                        <a:cs typeface="Meiryo UI" charset="0"/>
+                      </a:endParaRPr>
+                    </a:p>
+                    <a:p>
+                      <a:pPr algn="l" indent="0" marL="0">
+                        <a:buNone/>
+                      </a:pPr>
+                      <a:r>
+                        <a:rPr lang="en-US" sz="900" b="1" dirty="0">
+                          <a:solidFill>
+                            <a:srgbClr val="1F3D20"/>
+                          </a:solidFill>
+                          <a:latin typeface="Meiryo UI" pitchFamily="34" charset="0"/>
+                          <a:ea typeface="Meiryo UI" pitchFamily="34" charset="-122"/>
+                          <a:cs typeface="Meiryo UI" pitchFamily="34" charset="-120"/>
+                        </a:rPr>
+                        <a:t>工程を再設計する</a:t>
+                      </a:r>
+                      <a:endParaRPr lang="en-US" sz="900" dirty="0">
+                        <a:latin typeface="Meiryo UI" charset="0"/>
+                        <a:ea typeface="Meiryo UI" charset="0"/>
+                        <a:cs typeface="Meiryo UI" charset="0"/>
+                      </a:endParaRPr>
+                    </a:p>
+                  </a:txBody>
+                  <a:tcPr marL="54864" marR="54864" marT="54864" marB="54864" anchor="ctr">
+                    <a:lnL w="6350" cap="flat" cmpd="sng" algn="ctr">
+                      <a:solidFill>
+                        <a:srgbClr val="D3DED0"/>
+                      </a:solidFill>
+                      <a:prstDash val="solid"/>
+                      <a:round/>
+                      <a:headEnd type="none" w="med" len="med"/>
+                      <a:tailEnd type="none" w="med" len="med"/>
+                    </a:lnL>
+                    <a:lnR w="6350" cap="flat" cmpd="sng" algn="ctr">
+                      <a:solidFill>
+                        <a:srgbClr val="D3DED0"/>
+                      </a:solidFill>
+                      <a:prstDash val="solid"/>
+                      <a:round/>
+                      <a:headEnd type="none" w="med" len="med"/>
+                      <a:tailEnd type="none" w="med" len="med"/>
+                    </a:lnR>
+                    <a:lnT w="6350" cap="flat" cmpd="sng" algn="ctr">
+                      <a:solidFill>
+                        <a:srgbClr val="D3DED0"/>
+                      </a:solidFill>
+                      <a:prstDash val="solid"/>
+                      <a:round/>
+                      <a:headEnd type="none" w="med" len="med"/>
+                      <a:tailEnd type="none" w="med" len="med"/>
+                    </a:lnT>
+                    <a:lnB w="6350" cap="flat" cmpd="sng" algn="ctr">
+                      <a:solidFill>
+                        <a:srgbClr val="D3DED0"/>
+                      </a:solidFill>
+                      <a:prstDash val="solid"/>
+                      <a:round/>
+                      <a:headEnd type="none" w="med" len="med"/>
+                      <a:tailEnd type="none" w="med" len="med"/>
+                    </a:lnB>
+                    <a:solidFill>
+                      <a:srgbClr val="DFEBDB"/>
+                    </a:solidFill>
+                  </a:tcPr>
+                </a:tc>
+                <a:tc>
+                  <a:txBody>
+                    <a:bodyPr/>
+                    <a:lstStyle/>
+                    <a:p>
+                      <a:pPr algn="l" indent="0" marL="0">
+                        <a:buNone/>
+                      </a:pPr>
+                      <a:r>
+                        <a:rPr lang="en-US" sz="760" i="1" dirty="0">
+                          <a:solidFill>
+                            <a:srgbClr val="2B2B2B"/>
+                          </a:solidFill>
+                          <a:latin typeface="Meiryo UI" pitchFamily="34" charset="0"/>
+                          <a:ea typeface="Meiryo UI" pitchFamily="34" charset="-122"/>
+                          <a:cs typeface="Meiryo UI" pitchFamily="34" charset="-120"/>
+                        </a:rPr>
+                        <a:t>「残った作業を、</a:t>
+                      </a:r>
+                      <a:endParaRPr lang="en-US" sz="760" dirty="0">
+                        <a:latin typeface="Meiryo UI" charset="0"/>
+                        <a:ea typeface="Meiryo UI" charset="0"/>
+                        <a:cs typeface="Meiryo UI" charset="0"/>
+                      </a:endParaRPr>
+                    </a:p>
+                    <a:p>
+                      <a:pPr algn="l" indent="0" marL="0">
+                        <a:buNone/>
+                      </a:pPr>
+                      <a:r>
+                        <a:rPr lang="en-US" sz="760" i="1" dirty="0">
+                          <a:solidFill>
+                            <a:srgbClr val="2B2B2B"/>
+                          </a:solidFill>
+                          <a:latin typeface="Meiryo UI" pitchFamily="34" charset="0"/>
+                          <a:ea typeface="Meiryo UI" pitchFamily="34" charset="-122"/>
+                          <a:cs typeface="Meiryo UI" pitchFamily="34" charset="-120"/>
+                        </a:rPr>
+                        <a:t>少なくできないか?」</a:t>
+                      </a:r>
+                      <a:endParaRPr lang="en-US" sz="760" dirty="0">
+                        <a:latin typeface="Meiryo UI" charset="0"/>
+                        <a:ea typeface="Meiryo UI" charset="0"/>
+                        <a:cs typeface="Meiryo UI" charset="0"/>
+                      </a:endParaRPr>
+                    </a:p>
+                  </a:txBody>
+                  <a:tcPr marL="54864" marR="54864" marT="54864" marB="54864" anchor="ctr">
+                    <a:lnL w="6350" cap="flat" cmpd="sng" algn="ctr">
+                      <a:solidFill>
+                        <a:srgbClr val="D3DED0"/>
+                      </a:solidFill>
+                      <a:prstDash val="solid"/>
+                      <a:round/>
+                      <a:headEnd type="none" w="med" len="med"/>
+                      <a:tailEnd type="none" w="med" len="med"/>
+                    </a:lnL>
+                    <a:lnR w="6350" cap="flat" cmpd="sng" algn="ctr">
+                      <a:solidFill>
+                        <a:srgbClr val="D3DED0"/>
+                      </a:solidFill>
+                      <a:prstDash val="solid"/>
+                      <a:round/>
+                      <a:headEnd type="none" w="med" len="med"/>
+                      <a:tailEnd type="none" w="med" len="med"/>
+                    </a:lnR>
+                    <a:lnT w="6350" cap="flat" cmpd="sng" algn="ctr">
+                      <a:solidFill>
+                        <a:srgbClr val="D3DED0"/>
+                      </a:solidFill>
+                      <a:prstDash val="solid"/>
+                      <a:round/>
+                      <a:headEnd type="none" w="med" len="med"/>
+                      <a:tailEnd type="none" w="med" len="med"/>
+                    </a:lnT>
+                    <a:lnB w="6350" cap="flat" cmpd="sng" algn="ctr">
+                      <a:solidFill>
+                        <a:srgbClr val="D3DED0"/>
+                      </a:solidFill>
+                      <a:prstDash val="solid"/>
+                      <a:round/>
+                      <a:headEnd type="none" w="med" len="med"/>
+                      <a:tailEnd type="none" w="med" len="med"/>
+                    </a:lnB>
+                  </a:tcPr>
+                </a:tc>
+                <a:tc>
+                  <a:txBody>
+                    <a:bodyPr/>
+                    <a:lstStyle/>
+                    <a:p>
+                      <a:pPr algn="l" indent="0" marL="0">
+                        <a:buNone/>
+                      </a:pPr>
+                      <a:r>
+                        <a:rPr lang="en-US" sz="760" dirty="0">
+                          <a:solidFill>
+                            <a:srgbClr val="2B2B2B"/>
+                          </a:solidFill>
+                          <a:latin typeface="Meiryo UI" pitchFamily="34" charset="0"/>
+                          <a:ea typeface="Meiryo UI" pitchFamily="34" charset="-122"/>
+                          <a:cs typeface="Meiryo UI" pitchFamily="34" charset="-120"/>
+                        </a:rPr>
+                        <a:t>複数の作業・ラインを跨いで重複・ムダを発見し、ECRSで再設計案を作れる</a:t>
+                      </a:r>
+                      <a:endParaRPr lang="en-US" sz="760" dirty="0">
+                        <a:latin typeface="Meiryo UI" charset="0"/>
+                        <a:ea typeface="Meiryo UI" charset="0"/>
+                        <a:cs typeface="Meiryo UI" charset="0"/>
+                      </a:endParaRPr>
+                    </a:p>
+                  </a:txBody>
+                  <a:tcPr marL="54864" marR="54864" marT="54864" marB="54864" anchor="ctr">
+                    <a:lnL w="6350" cap="flat" cmpd="sng" algn="ctr">
+                      <a:solidFill>
+                        <a:srgbClr val="D3DED0"/>
+                      </a:solidFill>
+                      <a:prstDash val="solid"/>
+                      <a:round/>
+                      <a:headEnd type="none" w="med" len="med"/>
+                      <a:tailEnd type="none" w="med" len="med"/>
+                    </a:lnL>
+                    <a:lnR w="6350" cap="flat" cmpd="sng" algn="ctr">
+                      <a:solidFill>
+                        <a:srgbClr val="D3DED0"/>
+                      </a:solidFill>
+                      <a:prstDash val="solid"/>
+                      <a:round/>
+                      <a:headEnd type="none" w="med" len="med"/>
+                      <a:tailEnd type="none" w="med" len="med"/>
+                    </a:lnR>
+                    <a:lnT w="6350" cap="flat" cmpd="sng" algn="ctr">
+                      <a:solidFill>
+                        <a:srgbClr val="D3DED0"/>
+                      </a:solidFill>
+                      <a:prstDash val="solid"/>
+                      <a:round/>
+                      <a:headEnd type="none" w="med" len="med"/>
+                      <a:tailEnd type="none" w="med" len="med"/>
+                    </a:lnT>
+                    <a:lnB w="6350" cap="flat" cmpd="sng" algn="ctr">
+                      <a:solidFill>
+                        <a:srgbClr val="D3DED0"/>
+                      </a:solidFill>
+                      <a:prstDash val="solid"/>
+                      <a:round/>
+                      <a:headEnd type="none" w="med" len="med"/>
+                      <a:tailEnd type="none" w="med" len="med"/>
+                    </a:lnB>
+                  </a:tcPr>
+                </a:tc>
+                <a:tc>
+                  <a:txBody>
+                    <a:bodyPr/>
+                    <a:lstStyle/>
+                    <a:p>
+                      <a:pPr algn="l" indent="0" marL="0">
+                        <a:buNone/>
+                      </a:pPr>
+                      <a:r>
+                        <a:rPr lang="en-US" sz="760" dirty="0">
+                          <a:solidFill>
+                            <a:srgbClr val="B85042"/>
+                          </a:solidFill>
+                          <a:latin typeface="Meiryo UI" pitchFamily="34" charset="0"/>
+                          <a:ea typeface="Meiryo UI" pitchFamily="34" charset="-122"/>
+                          <a:cs typeface="Meiryo UI" pitchFamily="34" charset="-120"/>
+                        </a:rPr>
+                        <a:t>自分の担当範囲だけで最適化し、前後工程への影響を見落とす</a:t>
+                      </a:r>
+                      <a:endParaRPr lang="en-US" sz="760" dirty="0">
+                        <a:latin typeface="Meiryo UI" charset="0"/>
+                        <a:ea typeface="Meiryo UI" charset="0"/>
+                        <a:cs typeface="Meiryo UI" charset="0"/>
+                      </a:endParaRPr>
+                    </a:p>
+                  </a:txBody>
+                  <a:tcPr marL="54864" marR="54864" marT="54864" marB="54864" anchor="ctr">
+                    <a:lnL w="6350" cap="flat" cmpd="sng" algn="ctr">
+                      <a:solidFill>
+                        <a:srgbClr val="D3DED0"/>
+                      </a:solidFill>
+                      <a:prstDash val="solid"/>
+                      <a:round/>
+                      <a:headEnd type="none" w="med" len="med"/>
+                      <a:tailEnd type="none" w="med" len="med"/>
+                    </a:lnL>
+                    <a:lnR w="6350" cap="flat" cmpd="sng" algn="ctr">
+                      <a:solidFill>
+                        <a:srgbClr val="D3DED0"/>
+                      </a:solidFill>
+                      <a:prstDash val="solid"/>
+                      <a:round/>
+                      <a:headEnd type="none" w="med" len="med"/>
+                      <a:tailEnd type="none" w="med" len="med"/>
+                    </a:lnR>
+                    <a:lnT w="6350" cap="flat" cmpd="sng" algn="ctr">
+                      <a:solidFill>
+                        <a:srgbClr val="D3DED0"/>
+                      </a:solidFill>
+                      <a:prstDash val="solid"/>
+                      <a:round/>
+                      <a:headEnd type="none" w="med" len="med"/>
+                      <a:tailEnd type="none" w="med" len="med"/>
+                    </a:lnT>
+                    <a:lnB w="6350" cap="flat" cmpd="sng" algn="ctr">
+                      <a:solidFill>
+                        <a:srgbClr val="D3DED0"/>
+                      </a:solidFill>
+                      <a:prstDash val="solid"/>
+                      <a:round/>
+                      <a:headEnd type="none" w="med" len="med"/>
+                      <a:tailEnd type="none" w="med" len="med"/>
+                    </a:lnB>
+                  </a:tcPr>
+                </a:tc>
+                <a:tc>
+                  <a:txBody>
+                    <a:bodyPr/>
+                    <a:lstStyle/>
+                    <a:p>
+                      <a:pPr algn="l" indent="0" marL="0">
+                        <a:buNone/>
+                      </a:pPr>
+                      <a:r>
+                        <a:rPr lang="en-US" sz="760" b="1" dirty="0">
+                          <a:solidFill>
+                            <a:srgbClr val="2C5F2D"/>
+                          </a:solidFill>
+                          <a:latin typeface="Meiryo UI" pitchFamily="34" charset="0"/>
+                          <a:ea typeface="Meiryo UI" pitchFamily="34" charset="-122"/>
+                          <a:cs typeface="Meiryo UI" pitchFamily="34" charset="-120"/>
+                        </a:rPr>
+                        <a:t>リードしたテーマで定量効果(▲人数・時間)を測定し、月次報告で説明している</a:t>
+                      </a:r>
+                      <a:endParaRPr lang="en-US" sz="760" dirty="0">
+                        <a:latin typeface="Meiryo UI" charset="0"/>
+                        <a:ea typeface="Meiryo UI" charset="0"/>
+                        <a:cs typeface="Meiryo UI" charset="0"/>
+                      </a:endParaRPr>
+                    </a:p>
+                  </a:txBody>
+                  <a:tcPr marL="54864" marR="54864" marT="54864" marB="54864" anchor="ctr">
+                    <a:lnL w="6350" cap="flat" cmpd="sng" algn="ctr">
+                      <a:solidFill>
+                        <a:srgbClr val="D3DED0"/>
+                      </a:solidFill>
+                      <a:prstDash val="solid"/>
+                      <a:round/>
+                      <a:headEnd type="none" w="med" len="med"/>
+                      <a:tailEnd type="none" w="med" len="med"/>
+                    </a:lnL>
+                    <a:lnR w="6350" cap="flat" cmpd="sng" algn="ctr">
+                      <a:solidFill>
+                        <a:srgbClr val="D3DED0"/>
+                      </a:solidFill>
+                      <a:prstDash val="solid"/>
+                      <a:round/>
+                      <a:headEnd type="none" w="med" len="med"/>
+                      <a:tailEnd type="none" w="med" len="med"/>
+                    </a:lnR>
+                    <a:lnT w="6350" cap="flat" cmpd="sng" algn="ctr">
+                      <a:solidFill>
+                        <a:srgbClr val="D3DED0"/>
+                      </a:solidFill>
+                      <a:prstDash val="solid"/>
+                      <a:round/>
+                      <a:headEnd type="none" w="med" len="med"/>
+                      <a:tailEnd type="none" w="med" len="med"/>
+                    </a:lnT>
+                    <a:lnB w="6350" cap="flat" cmpd="sng" algn="ctr">
+                      <a:solidFill>
+                        <a:srgbClr val="D3DED0"/>
+                      </a:solidFill>
+                      <a:prstDash val="solid"/>
+                      <a:round/>
+                      <a:headEnd type="none" w="med" len="med"/>
+                      <a:tailEnd type="none" w="med" len="med"/>
+                    </a:lnB>
+                  </a:tcPr>
+                </a:tc>
+              </a:tr>
+              <a:tr h="1051560">
+                <a:tc>
+                  <a:txBody>
+                    <a:bodyPr/>
+                    <a:lstStyle/>
+                    <a:p>
+                      <a:pPr algn="l" indent="0" marL="0">
+                        <a:buNone/>
+                      </a:pPr>
+                      <a:r>
+                        <a:rPr lang="en-US" sz="900" b="1" dirty="0">
+                          <a:solidFill>
+                            <a:srgbClr val="1F3D20"/>
+                          </a:solidFill>
+                          <a:latin typeface="Meiryo UI" pitchFamily="34" charset="0"/>
+                          <a:ea typeface="Meiryo UI" pitchFamily="34" charset="-122"/>
+                          <a:cs typeface="Meiryo UI" pitchFamily="34" charset="-120"/>
+                        </a:rPr>
+                        <a:t>C3</a:t>
+                      </a:r>
+                      <a:endParaRPr lang="en-US" sz="900" dirty="0">
+                        <a:latin typeface="Meiryo UI" charset="0"/>
+                        <a:ea typeface="Meiryo UI" charset="0"/>
+                        <a:cs typeface="Meiryo UI" charset="0"/>
+                      </a:endParaRPr>
+                    </a:p>
+                    <a:p>
+                      <a:pPr algn="l" indent="0" marL="0">
+                        <a:buNone/>
+                      </a:pPr>
+                      <a:r>
+                        <a:rPr lang="en-US" sz="900" b="1" dirty="0">
+                          <a:solidFill>
+                            <a:srgbClr val="1F3D20"/>
+                          </a:solidFill>
+                          <a:latin typeface="Meiryo UI" pitchFamily="34" charset="0"/>
+                          <a:ea typeface="Meiryo UI" pitchFamily="34" charset="-122"/>
+                          <a:cs typeface="Meiryo UI" pitchFamily="34" charset="-120"/>
+                        </a:rPr>
+                        <a:t>投資判断する</a:t>
+                      </a:r>
+                      <a:endParaRPr lang="en-US" sz="900" dirty="0">
+                        <a:latin typeface="Meiryo UI" charset="0"/>
+                        <a:ea typeface="Meiryo UI" charset="0"/>
+                        <a:cs typeface="Meiryo UI" charset="0"/>
+                      </a:endParaRPr>
+                    </a:p>
+                  </a:txBody>
+                  <a:tcPr marL="54864" marR="54864" marT="54864" marB="54864" anchor="ctr">
+                    <a:lnL w="6350" cap="flat" cmpd="sng" algn="ctr">
+                      <a:solidFill>
+                        <a:srgbClr val="D3DED0"/>
+                      </a:solidFill>
+                      <a:prstDash val="solid"/>
+                      <a:round/>
+                      <a:headEnd type="none" w="med" len="med"/>
+                      <a:tailEnd type="none" w="med" len="med"/>
+                    </a:lnL>
+                    <a:lnR w="6350" cap="flat" cmpd="sng" algn="ctr">
+                      <a:solidFill>
+                        <a:srgbClr val="D3DED0"/>
+                      </a:solidFill>
+                      <a:prstDash val="solid"/>
+                      <a:round/>
+                      <a:headEnd type="none" w="med" len="med"/>
+                      <a:tailEnd type="none" w="med" len="med"/>
+                    </a:lnR>
+                    <a:lnT w="6350" cap="flat" cmpd="sng" algn="ctr">
+                      <a:solidFill>
+                        <a:srgbClr val="D3DED0"/>
+                      </a:solidFill>
+                      <a:prstDash val="solid"/>
+                      <a:round/>
+                      <a:headEnd type="none" w="med" len="med"/>
+                      <a:tailEnd type="none" w="med" len="med"/>
+                    </a:lnT>
+                    <a:lnB w="6350" cap="flat" cmpd="sng" algn="ctr">
+                      <a:solidFill>
+                        <a:srgbClr val="D3DED0"/>
+                      </a:solidFill>
+                      <a:prstDash val="solid"/>
+                      <a:round/>
+                      <a:headEnd type="none" w="med" len="med"/>
+                      <a:tailEnd type="none" w="med" len="med"/>
+                    </a:lnB>
+                    <a:solidFill>
+                      <a:srgbClr val="DFEBDB"/>
+                    </a:solidFill>
+                  </a:tcPr>
+                </a:tc>
+                <a:tc>
+                  <a:txBody>
+                    <a:bodyPr/>
+                    <a:lstStyle/>
+                    <a:p>
+                      <a:pPr algn="l" indent="0" marL="0">
+                        <a:buNone/>
+                      </a:pPr>
+                      <a:r>
+                        <a:rPr lang="en-US" sz="760" i="1" dirty="0">
+                          <a:solidFill>
+                            <a:srgbClr val="2B2B2B"/>
+                          </a:solidFill>
+                          <a:latin typeface="Meiryo UI" pitchFamily="34" charset="0"/>
+                          <a:ea typeface="Meiryo UI" pitchFamily="34" charset="-122"/>
+                          <a:cs typeface="Meiryo UI" pitchFamily="34" charset="-120"/>
+                        </a:rPr>
+                        <a:t>「その技術に、</a:t>
+                      </a:r>
+                      <a:endParaRPr lang="en-US" sz="760" dirty="0">
+                        <a:latin typeface="Meiryo UI" charset="0"/>
+                        <a:ea typeface="Meiryo UI" charset="0"/>
+                        <a:cs typeface="Meiryo UI" charset="0"/>
+                      </a:endParaRPr>
+                    </a:p>
+                    <a:p>
+                      <a:pPr algn="l" indent="0" marL="0">
+                        <a:buNone/>
+                      </a:pPr>
+                      <a:r>
+                        <a:rPr lang="en-US" sz="760" i="1" dirty="0">
+                          <a:solidFill>
+                            <a:srgbClr val="2B2B2B"/>
+                          </a:solidFill>
+                          <a:latin typeface="Meiryo UI" pitchFamily="34" charset="0"/>
+                          <a:ea typeface="Meiryo UI" pitchFamily="34" charset="-122"/>
+                          <a:cs typeface="Meiryo UI" pitchFamily="34" charset="-120"/>
+                        </a:rPr>
+                        <a:t>投資する価値があるか?」</a:t>
+                      </a:r>
+                      <a:endParaRPr lang="en-US" sz="760" dirty="0">
+                        <a:latin typeface="Meiryo UI" charset="0"/>
+                        <a:ea typeface="Meiryo UI" charset="0"/>
+                        <a:cs typeface="Meiryo UI" charset="0"/>
+                      </a:endParaRPr>
+                    </a:p>
+                  </a:txBody>
+                  <a:tcPr marL="54864" marR="54864" marT="54864" marB="54864" anchor="ctr">
+                    <a:lnL w="6350" cap="flat" cmpd="sng" algn="ctr">
+                      <a:solidFill>
+                        <a:srgbClr val="D3DED0"/>
+                      </a:solidFill>
+                      <a:prstDash val="solid"/>
+                      <a:round/>
+                      <a:headEnd type="none" w="med" len="med"/>
+                      <a:tailEnd type="none" w="med" len="med"/>
+                    </a:lnL>
+                    <a:lnR w="6350" cap="flat" cmpd="sng" algn="ctr">
+                      <a:solidFill>
+                        <a:srgbClr val="D3DED0"/>
+                      </a:solidFill>
+                      <a:prstDash val="solid"/>
+                      <a:round/>
+                      <a:headEnd type="none" w="med" len="med"/>
+                      <a:tailEnd type="none" w="med" len="med"/>
+                    </a:lnR>
+                    <a:lnT w="6350" cap="flat" cmpd="sng" algn="ctr">
+                      <a:solidFill>
+                        <a:srgbClr val="D3DED0"/>
+                      </a:solidFill>
+                      <a:prstDash val="solid"/>
+                      <a:round/>
+                      <a:headEnd type="none" w="med" len="med"/>
+                      <a:tailEnd type="none" w="med" len="med"/>
+                    </a:lnT>
+                    <a:lnB w="6350" cap="flat" cmpd="sng" algn="ctr">
+                      <a:solidFill>
+                        <a:srgbClr val="D3DED0"/>
+                      </a:solidFill>
+                      <a:prstDash val="solid"/>
+                      <a:round/>
+                      <a:headEnd type="none" w="med" len="med"/>
+                      <a:tailEnd type="none" w="med" len="med"/>
+                    </a:lnB>
+                  </a:tcPr>
+                </a:tc>
+                <a:tc>
+                  <a:txBody>
+                    <a:bodyPr/>
+                    <a:lstStyle/>
+                    <a:p>
+                      <a:pPr algn="l" indent="0" marL="0">
+                        <a:buNone/>
+                      </a:pPr>
+                      <a:r>
+                        <a:rPr lang="en-US" sz="760" dirty="0">
+                          <a:solidFill>
+                            <a:srgbClr val="2B2B2B"/>
+                          </a:solidFill>
+                          <a:latin typeface="Meiryo UI" pitchFamily="34" charset="0"/>
+                          <a:ea typeface="Meiryo UI" pitchFamily="34" charset="-122"/>
+                          <a:cs typeface="Meiryo UI" pitchFamily="34" charset="-120"/>
+                        </a:rPr>
+                        <a:t>効果をOEE正味・ROIで定量化し、投資額との比較でビジネスケースを書ける</a:t>
+                      </a:r>
+                      <a:endParaRPr lang="en-US" sz="760" dirty="0">
+                        <a:latin typeface="Meiryo UI" charset="0"/>
+                        <a:ea typeface="Meiryo UI" charset="0"/>
+                        <a:cs typeface="Meiryo UI" charset="0"/>
+                      </a:endParaRPr>
+                    </a:p>
+                  </a:txBody>
+                  <a:tcPr marL="54864" marR="54864" marT="54864" marB="54864" anchor="ctr">
+                    <a:lnL w="6350" cap="flat" cmpd="sng" algn="ctr">
+                      <a:solidFill>
+                        <a:srgbClr val="D3DED0"/>
+                      </a:solidFill>
+                      <a:prstDash val="solid"/>
+                      <a:round/>
+                      <a:headEnd type="none" w="med" len="med"/>
+                      <a:tailEnd type="none" w="med" len="med"/>
+                    </a:lnL>
+                    <a:lnR w="6350" cap="flat" cmpd="sng" algn="ctr">
+                      <a:solidFill>
+                        <a:srgbClr val="D3DED0"/>
+                      </a:solidFill>
+                      <a:prstDash val="solid"/>
+                      <a:round/>
+                      <a:headEnd type="none" w="med" len="med"/>
+                      <a:tailEnd type="none" w="med" len="med"/>
+                    </a:lnR>
+                    <a:lnT w="6350" cap="flat" cmpd="sng" algn="ctr">
+                      <a:solidFill>
+                        <a:srgbClr val="D3DED0"/>
+                      </a:solidFill>
+                      <a:prstDash val="solid"/>
+                      <a:round/>
+                      <a:headEnd type="none" w="med" len="med"/>
+                      <a:tailEnd type="none" w="med" len="med"/>
+                    </a:lnT>
+                    <a:lnB w="6350" cap="flat" cmpd="sng" algn="ctr">
+                      <a:solidFill>
+                        <a:srgbClr val="D3DED0"/>
+                      </a:solidFill>
+                      <a:prstDash val="solid"/>
+                      <a:round/>
+                      <a:headEnd type="none" w="med" len="med"/>
+                      <a:tailEnd type="none" w="med" len="med"/>
+                    </a:lnB>
+                  </a:tcPr>
+                </a:tc>
+                <a:tc>
+                  <a:txBody>
+                    <a:bodyPr/>
+                    <a:lstStyle/>
+                    <a:p>
+                      <a:pPr algn="l" indent="0" marL="0">
+                        <a:buNone/>
+                      </a:pPr>
+                      <a:r>
+                        <a:rPr lang="en-US" sz="760" dirty="0">
+                          <a:solidFill>
+                            <a:srgbClr val="B85042"/>
+                          </a:solidFill>
+                          <a:latin typeface="Meiryo UI" pitchFamily="34" charset="0"/>
+                          <a:ea typeface="Meiryo UI" pitchFamily="34" charset="-122"/>
+                          <a:cs typeface="Meiryo UI" pitchFamily="34" charset="-120"/>
+                        </a:rPr>
+                        <a:t>技術的な魅力だけで投資を推薦し、費用対効果の検証を欠く</a:t>
+                      </a:r>
+                      <a:endParaRPr lang="en-US" sz="760" dirty="0">
+                        <a:latin typeface="Meiryo UI" charset="0"/>
+                        <a:ea typeface="Meiryo UI" charset="0"/>
+                        <a:cs typeface="Meiryo UI" charset="0"/>
+                      </a:endParaRPr>
+                    </a:p>
+                  </a:txBody>
+                  <a:tcPr marL="54864" marR="54864" marT="54864" marB="54864" anchor="ctr">
+                    <a:lnL w="6350" cap="flat" cmpd="sng" algn="ctr">
+                      <a:solidFill>
+                        <a:srgbClr val="D3DED0"/>
+                      </a:solidFill>
+                      <a:prstDash val="solid"/>
+                      <a:round/>
+                      <a:headEnd type="none" w="med" len="med"/>
+                      <a:tailEnd type="none" w="med" len="med"/>
+                    </a:lnL>
+                    <a:lnR w="6350" cap="flat" cmpd="sng" algn="ctr">
+                      <a:solidFill>
+                        <a:srgbClr val="D3DED0"/>
+                      </a:solidFill>
+                      <a:prstDash val="solid"/>
+                      <a:round/>
+                      <a:headEnd type="none" w="med" len="med"/>
+                      <a:tailEnd type="none" w="med" len="med"/>
+                    </a:lnR>
+                    <a:lnT w="6350" cap="flat" cmpd="sng" algn="ctr">
+                      <a:solidFill>
+                        <a:srgbClr val="D3DED0"/>
+                      </a:solidFill>
+                      <a:prstDash val="solid"/>
+                      <a:round/>
+                      <a:headEnd type="none" w="med" len="med"/>
+                      <a:tailEnd type="none" w="med" len="med"/>
+                    </a:lnT>
+                    <a:lnB w="6350" cap="flat" cmpd="sng" algn="ctr">
+                      <a:solidFill>
+                        <a:srgbClr val="D3DED0"/>
+                      </a:solidFill>
+                      <a:prstDash val="solid"/>
+                      <a:round/>
+                      <a:headEnd type="none" w="med" len="med"/>
+                      <a:tailEnd type="none" w="med" len="med"/>
+                    </a:lnB>
+                  </a:tcPr>
+                </a:tc>
+                <a:tc>
+                  <a:txBody>
+                    <a:bodyPr/>
+                    <a:lstStyle/>
+                    <a:p>
+                      <a:pPr algn="l" indent="0" marL="0">
+                        <a:buNone/>
+                      </a:pPr>
+                      <a:r>
+                        <a:rPr lang="en-US" sz="760" b="1" dirty="0">
+                          <a:solidFill>
+                            <a:srgbClr val="2C5F2D"/>
+                          </a:solidFill>
+                          <a:latin typeface="Meiryo UI" pitchFamily="34" charset="0"/>
+                          <a:ea typeface="Meiryo UI" pitchFamily="34" charset="-122"/>
+                          <a:cs typeface="Meiryo UI" pitchFamily="34" charset="-120"/>
+                        </a:rPr>
+                        <a:t>自分の分析・PoC結果が、実際の投資意思決定資料に引用・採用されている</a:t>
+                      </a:r>
+                      <a:endParaRPr lang="en-US" sz="760" dirty="0">
+                        <a:latin typeface="Meiryo UI" charset="0"/>
+                        <a:ea typeface="Meiryo UI" charset="0"/>
+                        <a:cs typeface="Meiryo UI" charset="0"/>
+                      </a:endParaRPr>
+                    </a:p>
+                  </a:txBody>
+                  <a:tcPr marL="54864" marR="54864" marT="54864" marB="54864" anchor="ctr">
+                    <a:lnL w="6350" cap="flat" cmpd="sng" algn="ctr">
+                      <a:solidFill>
+                        <a:srgbClr val="D3DED0"/>
+                      </a:solidFill>
+                      <a:prstDash val="solid"/>
+                      <a:round/>
+                      <a:headEnd type="none" w="med" len="med"/>
+                      <a:tailEnd type="none" w="med" len="med"/>
+                    </a:lnL>
+                    <a:lnR w="6350" cap="flat" cmpd="sng" algn="ctr">
+                      <a:solidFill>
+                        <a:srgbClr val="D3DED0"/>
+                      </a:solidFill>
+                      <a:prstDash val="solid"/>
+                      <a:round/>
+                      <a:headEnd type="none" w="med" len="med"/>
+                      <a:tailEnd type="none" w="med" len="med"/>
+                    </a:lnR>
+                    <a:lnT w="6350" cap="flat" cmpd="sng" algn="ctr">
+                      <a:solidFill>
+                        <a:srgbClr val="D3DED0"/>
+                      </a:solidFill>
+                      <a:prstDash val="solid"/>
+                      <a:round/>
+                      <a:headEnd type="none" w="med" len="med"/>
+                      <a:tailEnd type="none" w="med" len="med"/>
+                    </a:lnT>
+                    <a:lnB w="6350" cap="flat" cmpd="sng" algn="ctr">
+                      <a:solidFill>
+                        <a:srgbClr val="D3DED0"/>
+                      </a:solidFill>
+                      <a:prstDash val="solid"/>
+                      <a:round/>
+                      <a:headEnd type="none" w="med" len="med"/>
+                      <a:tailEnd type="none" w="med" len="med"/>
+                    </a:lnB>
+                  </a:tcPr>
+                </a:tc>
+              </a:tr>
+              <a:tr h="1051560">
+                <a:tc>
+                  <a:txBody>
+                    <a:bodyPr/>
+                    <a:lstStyle/>
+                    <a:p>
+                      <a:pPr algn="l" indent="0" marL="0">
+                        <a:buNone/>
+                      </a:pPr>
+                      <a:r>
+                        <a:rPr lang="en-US" sz="900" b="1" dirty="0">
+                          <a:solidFill>
+                            <a:srgbClr val="1F3D20"/>
+                          </a:solidFill>
+                          <a:latin typeface="Meiryo UI" pitchFamily="34" charset="0"/>
+                          <a:ea typeface="Meiryo UI" pitchFamily="34" charset="-122"/>
+                          <a:cs typeface="Meiryo UI" pitchFamily="34" charset="-120"/>
+                        </a:rPr>
+                        <a:t>C4</a:t>
+                      </a:r>
+                      <a:endParaRPr lang="en-US" sz="900" dirty="0">
+                        <a:latin typeface="Meiryo UI" charset="0"/>
+                        <a:ea typeface="Meiryo UI" charset="0"/>
+                        <a:cs typeface="Meiryo UI" charset="0"/>
+                      </a:endParaRPr>
+                    </a:p>
+                    <a:p>
+                      <a:pPr algn="l" indent="0" marL="0">
+                        <a:buNone/>
+                      </a:pPr>
+                      <a:r>
+                        <a:rPr lang="en-US" sz="900" b="1" dirty="0">
+                          <a:solidFill>
+                            <a:srgbClr val="1F3D20"/>
+                          </a:solidFill>
+                          <a:latin typeface="Meiryo UI" pitchFamily="34" charset="0"/>
+                          <a:ea typeface="Meiryo UI" pitchFamily="34" charset="-122"/>
+                          <a:cs typeface="Meiryo UI" pitchFamily="34" charset="-120"/>
+                        </a:rPr>
+                        <a:t>組織を動かす</a:t>
+                      </a:r>
+                      <a:endParaRPr lang="en-US" sz="900" dirty="0">
+                        <a:latin typeface="Meiryo UI" charset="0"/>
+                        <a:ea typeface="Meiryo UI" charset="0"/>
+                        <a:cs typeface="Meiryo UI" charset="0"/>
+                      </a:endParaRPr>
+                    </a:p>
+                  </a:txBody>
+                  <a:tcPr marL="54864" marR="54864" marT="54864" marB="54864" anchor="ctr">
+                    <a:lnL w="6350" cap="flat" cmpd="sng" algn="ctr">
+                      <a:solidFill>
+                        <a:srgbClr val="D3DED0"/>
+                      </a:solidFill>
+                      <a:prstDash val="solid"/>
+                      <a:round/>
+                      <a:headEnd type="none" w="med" len="med"/>
+                      <a:tailEnd type="none" w="med" len="med"/>
+                    </a:lnL>
+                    <a:lnR w="6350" cap="flat" cmpd="sng" algn="ctr">
+                      <a:solidFill>
+                        <a:srgbClr val="D3DED0"/>
+                      </a:solidFill>
+                      <a:prstDash val="solid"/>
+                      <a:round/>
+                      <a:headEnd type="none" w="med" len="med"/>
+                      <a:tailEnd type="none" w="med" len="med"/>
+                    </a:lnR>
+                    <a:lnT w="6350" cap="flat" cmpd="sng" algn="ctr">
+                      <a:solidFill>
+                        <a:srgbClr val="D3DED0"/>
+                      </a:solidFill>
+                      <a:prstDash val="solid"/>
+                      <a:round/>
+                      <a:headEnd type="none" w="med" len="med"/>
+                      <a:tailEnd type="none" w="med" len="med"/>
+                    </a:lnT>
+                    <a:lnB w="6350" cap="flat" cmpd="sng" algn="ctr">
+                      <a:solidFill>
+                        <a:srgbClr val="D3DED0"/>
+                      </a:solidFill>
+                      <a:prstDash val="solid"/>
+                      <a:round/>
+                      <a:headEnd type="none" w="med" len="med"/>
+                      <a:tailEnd type="none" w="med" len="med"/>
+                    </a:lnB>
+                    <a:solidFill>
+                      <a:srgbClr val="DFEBDB"/>
+                    </a:solidFill>
+                  </a:tcPr>
+                </a:tc>
+                <a:tc>
+                  <a:txBody>
+                    <a:bodyPr/>
+                    <a:lstStyle/>
+                    <a:p>
+                      <a:pPr algn="l" indent="0" marL="0">
+                        <a:buNone/>
+                      </a:pPr>
+                      <a:r>
+                        <a:rPr lang="en-US" sz="760" i="1" dirty="0">
+                          <a:solidFill>
+                            <a:srgbClr val="2B2B2B"/>
+                          </a:solidFill>
+                          <a:latin typeface="Meiryo UI" pitchFamily="34" charset="0"/>
+                          <a:ea typeface="Meiryo UI" pitchFamily="34" charset="-122"/>
+                          <a:cs typeface="Meiryo UI" pitchFamily="34" charset="-120"/>
+                        </a:rPr>
+                        <a:t>「品質保証・現場・経営を、</a:t>
+                      </a:r>
+                      <a:endParaRPr lang="en-US" sz="760" dirty="0">
+                        <a:latin typeface="Meiryo UI" charset="0"/>
+                        <a:ea typeface="Meiryo UI" charset="0"/>
+                        <a:cs typeface="Meiryo UI" charset="0"/>
+                      </a:endParaRPr>
+                    </a:p>
+                    <a:p>
+                      <a:pPr algn="l" indent="0" marL="0">
+                        <a:buNone/>
+                      </a:pPr>
+                      <a:r>
+                        <a:rPr lang="en-US" sz="760" i="1" dirty="0">
+                          <a:solidFill>
+                            <a:srgbClr val="2B2B2B"/>
+                          </a:solidFill>
+                          <a:latin typeface="Meiryo UI" pitchFamily="34" charset="0"/>
+                          <a:ea typeface="Meiryo UI" pitchFamily="34" charset="-122"/>
+                          <a:cs typeface="Meiryo UI" pitchFamily="34" charset="-120"/>
+                        </a:rPr>
+                        <a:t>どう合意させるか?」</a:t>
+                      </a:r>
+                      <a:endParaRPr lang="en-US" sz="760" dirty="0">
+                        <a:latin typeface="Meiryo UI" charset="0"/>
+                        <a:ea typeface="Meiryo UI" charset="0"/>
+                        <a:cs typeface="Meiryo UI" charset="0"/>
+                      </a:endParaRPr>
+                    </a:p>
+                  </a:txBody>
+                  <a:tcPr marL="54864" marR="54864" marT="54864" marB="54864" anchor="ctr">
+                    <a:lnL w="6350" cap="flat" cmpd="sng" algn="ctr">
+                      <a:solidFill>
+                        <a:srgbClr val="D3DED0"/>
+                      </a:solidFill>
+                      <a:prstDash val="solid"/>
+                      <a:round/>
+                      <a:headEnd type="none" w="med" len="med"/>
+                      <a:tailEnd type="none" w="med" len="med"/>
+                    </a:lnL>
+                    <a:lnR w="6350" cap="flat" cmpd="sng" algn="ctr">
+                      <a:solidFill>
+                        <a:srgbClr val="D3DED0"/>
+                      </a:solidFill>
+                      <a:prstDash val="solid"/>
+                      <a:round/>
+                      <a:headEnd type="none" w="med" len="med"/>
+                      <a:tailEnd type="none" w="med" len="med"/>
+                    </a:lnR>
+                    <a:lnT w="6350" cap="flat" cmpd="sng" algn="ctr">
+                      <a:solidFill>
+                        <a:srgbClr val="D3DED0"/>
+                      </a:solidFill>
+                      <a:prstDash val="solid"/>
+                      <a:round/>
+                      <a:headEnd type="none" w="med" len="med"/>
+                      <a:tailEnd type="none" w="med" len="med"/>
+                    </a:lnT>
+                    <a:lnB w="6350" cap="flat" cmpd="sng" algn="ctr">
+                      <a:solidFill>
+                        <a:srgbClr val="D3DED0"/>
+                      </a:solidFill>
+                      <a:prstDash val="solid"/>
+                      <a:round/>
+                      <a:headEnd type="none" w="med" len="med"/>
+                      <a:tailEnd type="none" w="med" len="med"/>
+                    </a:lnB>
+                  </a:tcPr>
+                </a:tc>
+                <a:tc>
+                  <a:txBody>
+                    <a:bodyPr/>
+                    <a:lstStyle/>
+                    <a:p>
+                      <a:pPr algn="l" indent="0" marL="0">
+                        <a:buNone/>
+                      </a:pPr>
+                      <a:r>
+                        <a:rPr lang="en-US" sz="760" dirty="0">
+                          <a:solidFill>
+                            <a:srgbClr val="2B2B2B"/>
+                          </a:solidFill>
+                          <a:latin typeface="Meiryo UI" pitchFamily="34" charset="0"/>
+                          <a:ea typeface="Meiryo UI" pitchFamily="34" charset="-122"/>
+                          <a:cs typeface="Meiryo UI" pitchFamily="34" charset="-120"/>
+                        </a:rPr>
+                        <a:t>抵抗(品質懸念・現場の慣行・部門間の利害)を理解し、合意形成の道筋を設計できる</a:t>
+                      </a:r>
+                      <a:endParaRPr lang="en-US" sz="760" dirty="0">
+                        <a:latin typeface="Meiryo UI" charset="0"/>
+                        <a:ea typeface="Meiryo UI" charset="0"/>
+                        <a:cs typeface="Meiryo UI" charset="0"/>
+                      </a:endParaRPr>
+                    </a:p>
+                  </a:txBody>
+                  <a:tcPr marL="54864" marR="54864" marT="54864" marB="54864" anchor="ctr">
+                    <a:lnL w="6350" cap="flat" cmpd="sng" algn="ctr">
+                      <a:solidFill>
+                        <a:srgbClr val="D3DED0"/>
+                      </a:solidFill>
+                      <a:prstDash val="solid"/>
+                      <a:round/>
+                      <a:headEnd type="none" w="med" len="med"/>
+                      <a:tailEnd type="none" w="med" len="med"/>
+                    </a:lnL>
+                    <a:lnR w="6350" cap="flat" cmpd="sng" algn="ctr">
+                      <a:solidFill>
+                        <a:srgbClr val="D3DED0"/>
+                      </a:solidFill>
+                      <a:prstDash val="solid"/>
+                      <a:round/>
+                      <a:headEnd type="none" w="med" len="med"/>
+                      <a:tailEnd type="none" w="med" len="med"/>
+                    </a:lnR>
+                    <a:lnT w="6350" cap="flat" cmpd="sng" algn="ctr">
+                      <a:solidFill>
+                        <a:srgbClr val="D3DED0"/>
+                      </a:solidFill>
+                      <a:prstDash val="solid"/>
+                      <a:round/>
+                      <a:headEnd type="none" w="med" len="med"/>
+                      <a:tailEnd type="none" w="med" len="med"/>
+                    </a:lnT>
+                    <a:lnB w="6350" cap="flat" cmpd="sng" algn="ctr">
+                      <a:solidFill>
+                        <a:srgbClr val="D3DED0"/>
+                      </a:solidFill>
+                      <a:prstDash val="solid"/>
+                      <a:round/>
+                      <a:headEnd type="none" w="med" len="med"/>
+                      <a:tailEnd type="none" w="med" len="med"/>
+                    </a:lnB>
+                  </a:tcPr>
+                </a:tc>
+                <a:tc>
+                  <a:txBody>
+                    <a:bodyPr/>
+                    <a:lstStyle/>
+                    <a:p>
+                      <a:pPr algn="l" indent="0" marL="0">
+                        <a:buNone/>
+                      </a:pPr>
+                      <a:r>
+                        <a:rPr lang="en-US" sz="760" dirty="0">
+                          <a:solidFill>
+                            <a:srgbClr val="B85042"/>
+                          </a:solidFill>
+                          <a:latin typeface="Meiryo UI" pitchFamily="34" charset="0"/>
+                          <a:ea typeface="Meiryo UI" pitchFamily="34" charset="-122"/>
+                          <a:cs typeface="Meiryo UI" pitchFamily="34" charset="-120"/>
+                        </a:rPr>
+                        <a:t>正しい分析を持っていても、関係部門を説得できず実行に至らない</a:t>
+                      </a:r>
+                      <a:endParaRPr lang="en-US" sz="760" dirty="0">
+                        <a:latin typeface="Meiryo UI" charset="0"/>
+                        <a:ea typeface="Meiryo UI" charset="0"/>
+                        <a:cs typeface="Meiryo UI" charset="0"/>
+                      </a:endParaRPr>
+                    </a:p>
+                  </a:txBody>
+                  <a:tcPr marL="54864" marR="54864" marT="54864" marB="54864" anchor="ctr">
+                    <a:lnL w="6350" cap="flat" cmpd="sng" algn="ctr">
+                      <a:solidFill>
+                        <a:srgbClr val="D3DED0"/>
+                      </a:solidFill>
+                      <a:prstDash val="solid"/>
+                      <a:round/>
+                      <a:headEnd type="none" w="med" len="med"/>
+                      <a:tailEnd type="none" w="med" len="med"/>
+                    </a:lnL>
+                    <a:lnR w="6350" cap="flat" cmpd="sng" algn="ctr">
+                      <a:solidFill>
+                        <a:srgbClr val="D3DED0"/>
+                      </a:solidFill>
+                      <a:prstDash val="solid"/>
+                      <a:round/>
+                      <a:headEnd type="none" w="med" len="med"/>
+                      <a:tailEnd type="none" w="med" len="med"/>
+                    </a:lnR>
+                    <a:lnT w="6350" cap="flat" cmpd="sng" algn="ctr">
+                      <a:solidFill>
+                        <a:srgbClr val="D3DED0"/>
+                      </a:solidFill>
+                      <a:prstDash val="solid"/>
+                      <a:round/>
+                      <a:headEnd type="none" w="med" len="med"/>
+                      <a:tailEnd type="none" w="med" len="med"/>
+                    </a:lnT>
+                    <a:lnB w="6350" cap="flat" cmpd="sng" algn="ctr">
+                      <a:solidFill>
+                        <a:srgbClr val="D3DED0"/>
+                      </a:solidFill>
+                      <a:prstDash val="solid"/>
+                      <a:round/>
+                      <a:headEnd type="none" w="med" len="med"/>
+                      <a:tailEnd type="none" w="med" len="med"/>
+                    </a:lnB>
+                  </a:tcPr>
+                </a:tc>
+                <a:tc>
+                  <a:txBody>
+                    <a:bodyPr/>
+                    <a:lstStyle/>
+                    <a:p>
+                      <a:pPr algn="l" indent="0" marL="0">
+                        <a:buNone/>
+                      </a:pPr>
+                      <a:r>
+                        <a:rPr lang="en-US" sz="760" b="1" dirty="0">
+                          <a:solidFill>
+                            <a:srgbClr val="2C5F2D"/>
+                          </a:solidFill>
+                          <a:latin typeface="Meiryo UI" pitchFamily="34" charset="0"/>
+                          <a:ea typeface="Meiryo UI" pitchFamily="34" charset="-122"/>
+                          <a:cs typeface="Meiryo UI" pitchFamily="34" charset="-120"/>
+                        </a:rPr>
+                        <a:t>横展開先で自分がいなくても同水準の効果が再現され、後継者を育てている</a:t>
+                      </a:r>
+                      <a:endParaRPr lang="en-US" sz="760" dirty="0">
+                        <a:latin typeface="Meiryo UI" charset="0"/>
+                        <a:ea typeface="Meiryo UI" charset="0"/>
+                        <a:cs typeface="Meiryo UI" charset="0"/>
+                      </a:endParaRPr>
+                    </a:p>
+                  </a:txBody>
+                  <a:tcPr marL="54864" marR="54864" marT="54864" marB="54864" anchor="ctr">
+                    <a:lnL w="6350" cap="flat" cmpd="sng" algn="ctr">
+                      <a:solidFill>
+                        <a:srgbClr val="D3DED0"/>
+                      </a:solidFill>
+                      <a:prstDash val="solid"/>
+                      <a:round/>
+                      <a:headEnd type="none" w="med" len="med"/>
+                      <a:tailEnd type="none" w="med" len="med"/>
+                    </a:lnL>
+                    <a:lnR w="6350" cap="flat" cmpd="sng" algn="ctr">
+                      <a:solidFill>
+                        <a:srgbClr val="D3DED0"/>
+                      </a:solidFill>
+                      <a:prstDash val="solid"/>
+                      <a:round/>
+                      <a:headEnd type="none" w="med" len="med"/>
+                      <a:tailEnd type="none" w="med" len="med"/>
+                    </a:lnR>
+                    <a:lnT w="6350" cap="flat" cmpd="sng" algn="ctr">
+                      <a:solidFill>
+                        <a:srgbClr val="D3DED0"/>
+                      </a:solidFill>
+                      <a:prstDash val="solid"/>
+                      <a:round/>
+                      <a:headEnd type="none" w="med" len="med"/>
+                      <a:tailEnd type="none" w="med" len="med"/>
+                    </a:lnT>
+                    <a:lnB w="6350" cap="flat" cmpd="sng" algn="ctr">
+                      <a:solidFill>
+                        <a:srgbClr val="D3DED0"/>
+                      </a:solidFill>
+                      <a:prstDash val="solid"/>
+                      <a:round/>
+                      <a:headEnd type="none" w="med" len="med"/>
+                      <a:tailEnd type="none" w="med" len="med"/>
+                    </a:lnB>
+                  </a:tcPr>
+                </a:tc>
+              </a:tr>
+            </a:tbl>
+          </a:graphicData>
+        </a:graphic>
+      </p:graphicFrame>
+      <p:sp>
+        <p:nvSpPr>
+          <p:cNvPr id="5" name="Shape 2"/>
+          <p:cNvSpPr/>
+          <p:nvPr/>
+        </p:nvSpPr>
+        <p:spPr>
+          <a:xfrm>
+            <a:off x="274320" y="5806440"/>
+            <a:ext cx="11640312" cy="502920"/>
+          </a:xfrm>
+          <a:prstGeom prst="roundRect">
+            <a:avLst>
+              <a:gd name="adj" fmla="val 10909"/>
+            </a:avLst>
+          </a:prstGeom>
+          <a:solidFill>
+            <a:srgbClr val="F3F8F1"/>
+          </a:solidFill>
+          <a:ln w="12700">
+            <a:solidFill>
+              <a:srgbClr val="2C5F2D"/>
+            </a:solidFill>
+            <a:prstDash val="solid"/>
+          </a:ln>
+        </p:spPr>
+      </p:sp>
+      <p:sp>
+        <p:nvSpPr>
+          <p:cNvPr id="6" name="Text 3"/>
+          <p:cNvSpPr/>
+          <p:nvPr/>
+        </p:nvSpPr>
+        <p:spPr>
+          <a:xfrm>
+            <a:off x="420624" y="5806440"/>
+            <a:ext cx="11338560" cy="502920"/>
+          </a:xfrm>
+          <a:prstGeom prst="rect">
+            <a:avLst/>
+          </a:prstGeom>
+          <a:noFill/>
+          <a:ln/>
+        </p:spPr>
+        <p:txBody>
+          <a:bodyPr wrap="square" lIns="0" tIns="0" rIns="0" bIns="0" rtlCol="0" anchor="ctr"/>
+          <a:lstStyle/>
+          <a:p>
+            <a:pPr indent="0" marL="0">
+              <a:buNone/>
+            </a:pPr>
+            <a:r>
+              <a:rPr lang="en-US" sz="880" b="1" dirty="0">
+                <a:solidFill>
+                  <a:srgbClr val="1F3D20"/>
+                </a:solidFill>
+                <a:latin typeface="Meiryo UI" pitchFamily="34" charset="0"/>
+                <a:ea typeface="Meiryo UI" pitchFamily="34" charset="-122"/>
+                <a:cs typeface="Meiryo UI" pitchFamily="34" charset="-120"/>
+              </a:rPr>
+              <a:t>この表が評価委員会(技術系上長+品質保証部門+SCM戦略部)の唯一の判定基準となる。技術試験の合格点や研修受講実績では進級を判定しない。</a:t>
+            </a:r>
+            <a:endParaRPr lang="en-US" sz="880" dirty="0"/>
+          </a:p>
+        </p:txBody>
+      </p:sp>
+      <p:sp>
+        <p:nvSpPr>
+          <p:cNvPr id="7" name="Text 4"/>
+          <p:cNvSpPr/>
+          <p:nvPr/>
+        </p:nvSpPr>
+        <p:spPr>
+          <a:xfrm>
+            <a:off x="274320" y="6382512"/>
+            <a:ext cx="11640312" cy="182880"/>
+          </a:xfrm>
+          <a:prstGeom prst="rect">
+            <a:avLst/>
+          </a:prstGeom>
+          <a:noFill/>
+          <a:ln/>
+        </p:spPr>
+        <p:txBody>
+          <a:bodyPr wrap="square" lIns="0" tIns="0" rIns="0" bIns="0" rtlCol="0" anchor="ctr"/>
+          <a:lstStyle/>
+          <a:p>
+            <a:pPr indent="0" marL="0">
+              <a:buNone/>
+            </a:pPr>
+            <a:r>
+              <a:rPr lang="en-US" sz="650" dirty="0">
+                <a:solidFill>
+                  <a:srgbClr val="595959"/>
+                </a:solidFill>
+                <a:latin typeface="Meiryo UI" pitchFamily="34" charset="0"/>
+                <a:ea typeface="Meiryo UI" pitchFamily="34" charset="-122"/>
+                <a:cs typeface="Meiryo UI" pitchFamily="34" charset="-120"/>
+              </a:rPr>
+              <a:t>出典: ラインアーキテクト人材育成プログラム資料</a:t>
+            </a:r>
+            <a:endParaRPr lang="en-US" sz="650" dirty="0"/>
+          </a:p>
+        </p:txBody>
+      </p:sp>
+    </p:spTree>
+  </p:cSld>
+  <p:clrMapOvr>
+    <a:masterClrMapping/>
+  </p:clrMapOvr>
+</p:sld>
+</file>
+
+<file path=ppt/slides/slide6.xml><?xml version="1.0" encoding="utf-8"?>
+<p:sld xmlns:a="http://schemas.openxmlformats.org/drawingml/2006/main" xmlns:r="http://schemas.openxmlformats.org/officeDocument/2006/relationships" xmlns:p="http://schemas.openxmlformats.org/presentationml/2006/main">
+  <p:cSld name="Slide 6">
+    <p:bg>
+      <p:bgPr>
+        <a:solidFill>
+          <a:srgbClr val="FFFFFF"/>
+        </a:solidFill>
+      </p:bgPr>
+    </p:bg>
+    <p:spTree>
+      <p:nvGrpSpPr>
+        <p:cNvPr id="1" name=""/>
+        <p:cNvGrpSpPr/>
+        <p:nvPr/>
+      </p:nvGrpSpPr>
+      <p:grpSpPr>
+        <a:xfrm>
+          <a:off x="0" y="0"/>
+          <a:ext cx="0" cy="0"/>
+          <a:chOff x="0" y="0"/>
+          <a:chExt cx="0" cy="0"/>
+        </a:xfrm>
+      </p:grpSpPr>
+      <p:sp>
+        <p:nvSpPr>
+          <p:cNvPr id="2" name="Text 0"/>
+          <p:cNvSpPr/>
+          <p:nvPr/>
+        </p:nvSpPr>
+        <p:spPr>
+          <a:xfrm>
+            <a:off x="274320" y="91440"/>
+            <a:ext cx="8686800" cy="365760"/>
+          </a:xfrm>
+          <a:prstGeom prst="rect">
+            <a:avLst/>
+          </a:prstGeom>
+          <a:noFill/>
+          <a:ln/>
+        </p:spPr>
+        <p:txBody>
+          <a:bodyPr wrap="square" lIns="0" tIns="0" rIns="0" bIns="0" rtlCol="0" anchor="ctr"/>
+          <a:lstStyle/>
+          <a:p>
+            <a:pPr indent="0" marL="0">
+              <a:buNone/>
+            </a:pPr>
+            <a:r>
+              <a:rPr lang="en-US" sz="1800" b="1" dirty="0">
+                <a:solidFill>
+                  <a:srgbClr val="1F3D20"/>
+                </a:solidFill>
+                <a:latin typeface="Meiryo UI" pitchFamily="34" charset="0"/>
+                <a:ea typeface="Meiryo UI" pitchFamily="34" charset="-122"/>
+                <a:cs typeface="Meiryo UI" pitchFamily="34" charset="-120"/>
+              </a:rPr>
+              <a:t>育成アプローチの詳細 — 運用サイクルと進級ゲート</a:t>
+            </a:r>
+            <a:endParaRPr lang="en-US" sz="1800" dirty="0"/>
+          </a:p>
+        </p:txBody>
+      </p:sp>
+      <p:sp>
+        <p:nvSpPr>
+          <p:cNvPr id="3" name="Text 1"/>
+          <p:cNvSpPr/>
+          <p:nvPr/>
+        </p:nvSpPr>
+        <p:spPr>
+          <a:xfrm>
+            <a:off x="274320" y="512064"/>
+            <a:ext cx="11640312" cy="237744"/>
+          </a:xfrm>
+          <a:prstGeom prst="rect">
+            <a:avLst/>
+          </a:prstGeom>
+          <a:noFill/>
+          <a:ln/>
+        </p:spPr>
+        <p:txBody>
+          <a:bodyPr wrap="square" lIns="0" tIns="0" rIns="0" bIns="0" rtlCol="0" anchor="ctr"/>
+          <a:lstStyle/>
+          <a:p>
+            <a:pPr indent="0" marL="0">
+              <a:buNone/>
+            </a:pPr>
+            <a:r>
+              <a:rPr lang="en-US" sz="1100" b="1" dirty="0">
+                <a:solidFill>
+                  <a:srgbClr val="1F3D20"/>
+                </a:solidFill>
+                <a:latin typeface="Meiryo UI" pitchFamily="34" charset="0"/>
+                <a:ea typeface="Meiryo UI" pitchFamily="34" charset="-122"/>
+                <a:cs typeface="Meiryo UI" pitchFamily="34" charset="-120"/>
+              </a:rPr>
+              <a:t>すべてのフェーズに共通する「月次運用サイクル」</a:t>
+            </a:r>
+            <a:endParaRPr lang="en-US" sz="1100" dirty="0"/>
+          </a:p>
+        </p:txBody>
+      </p:sp>
+      <p:sp>
+        <p:nvSpPr>
+          <p:cNvPr id="4" name="Shape 2"/>
+          <p:cNvSpPr/>
+          <p:nvPr/>
+        </p:nvSpPr>
+        <p:spPr>
+          <a:xfrm>
+            <a:off x="274320" y="841248"/>
+            <a:ext cx="2148840" cy="1417320"/>
+          </a:xfrm>
+          <a:prstGeom prst="roundRect">
+            <a:avLst>
+              <a:gd name="adj" fmla="val 3871"/>
+            </a:avLst>
+          </a:prstGeom>
+          <a:solidFill>
+            <a:srgbClr val="F3F8F1"/>
+          </a:solidFill>
+          <a:ln w="12700">
+            <a:solidFill>
+              <a:srgbClr val="2C5F2D"/>
+            </a:solidFill>
+            <a:prstDash val="solid"/>
+          </a:ln>
+        </p:spPr>
+      </p:sp>
+      <p:sp>
+        <p:nvSpPr>
+          <p:cNvPr id="5" name="Text 3"/>
+          <p:cNvSpPr/>
+          <p:nvPr/>
+        </p:nvSpPr>
+        <p:spPr>
+          <a:xfrm>
+            <a:off x="365760" y="896112"/>
+            <a:ext cx="1965960" cy="310896"/>
+          </a:xfrm>
+          <a:prstGeom prst="rect">
+            <a:avLst/>
+          </a:prstGeom>
+          <a:noFill/>
+          <a:ln/>
+        </p:spPr>
+        <p:txBody>
+          <a:bodyPr wrap="square" lIns="0" tIns="0" rIns="0" bIns="0" rtlCol="0" anchor="t"/>
+          <a:lstStyle/>
+          <a:p>
+            <a:pPr indent="0" marL="0">
+              <a:buNone/>
+            </a:pPr>
+            <a:r>
+              <a:rPr lang="en-US" sz="1400" b="1" dirty="0">
+                <a:solidFill>
+                  <a:srgbClr val="2C5F2D"/>
+                </a:solidFill>
+                <a:latin typeface="Meiryo UI" pitchFamily="34" charset="0"/>
+                <a:ea typeface="Meiryo UI" pitchFamily="34" charset="-122"/>
+                <a:cs typeface="Meiryo UI" pitchFamily="34" charset="-120"/>
+              </a:rPr>
+              <a:t>① </a:t>
+            </a:r>
+            <a:pPr indent="0" marL="0">
+              <a:buNone/>
+            </a:pPr>
+            <a:r>
+              <a:rPr lang="en-US" sz="950" b="1" dirty="0">
+                <a:solidFill>
+                  <a:srgbClr val="1F3D20"/>
+                </a:solidFill>
+                <a:latin typeface="Meiryo UI" pitchFamily="34" charset="0"/>
+                <a:ea typeface="Meiryo UI" pitchFamily="34" charset="-122"/>
+                <a:cs typeface="Meiryo UI" pitchFamily="34" charset="-120"/>
+              </a:rPr>
+              <a:t>実務にあたる</a:t>
+            </a:r>
+            <a:endParaRPr lang="en-US" sz="1400" dirty="0"/>
+          </a:p>
+        </p:txBody>
+      </p:sp>
+      <p:sp>
+        <p:nvSpPr>
+          <p:cNvPr id="6" name="Text 4"/>
+          <p:cNvSpPr/>
+          <p:nvPr/>
+        </p:nvSpPr>
+        <p:spPr>
+          <a:xfrm>
+            <a:off x="365760" y="1225296"/>
+            <a:ext cx="1965960" cy="1033272"/>
+          </a:xfrm>
+          <a:prstGeom prst="rect">
+            <a:avLst/>
+          </a:prstGeom>
+          <a:noFill/>
+          <a:ln/>
+        </p:spPr>
+        <p:txBody>
+          <a:bodyPr wrap="square" lIns="0" tIns="0" rIns="0" bIns="0" rtlCol="0" anchor="t"/>
+          <a:lstStyle/>
+          <a:p>
+            <a:pPr indent="0" marL="0">
+              <a:lnSpc>
+                <a:spcPct val="110000"/>
+              </a:lnSpc>
+              <a:buNone/>
+            </a:pPr>
+            <a:r>
+              <a:rPr lang="en-US" sz="740" dirty="0">
+                <a:solidFill>
+                  <a:srgbClr val="2B2B2B"/>
+                </a:solidFill>
+                <a:latin typeface="Meiryo UI" pitchFamily="34" charset="0"/>
+                <a:ea typeface="Meiryo UI" pitchFamily="34" charset="-122"/>
+                <a:cs typeface="Meiryo UI" pitchFamily="34" charset="-120"/>
+              </a:rPr>
+              <a:t>明石ボトルネック調査の実担当として、規定棚卸し・改善設計・PoC等を実行する</a:t>
+            </a:r>
+            <a:endParaRPr lang="en-US" sz="740" dirty="0"/>
+          </a:p>
+        </p:txBody>
+      </p:sp>
+      <p:sp>
+        <p:nvSpPr>
+          <p:cNvPr id="7" name="Text 5"/>
+          <p:cNvSpPr/>
+          <p:nvPr/>
+        </p:nvSpPr>
+        <p:spPr>
+          <a:xfrm>
+            <a:off x="2404872" y="841248"/>
+            <a:ext cx="164592" cy="1417320"/>
+          </a:xfrm>
+          <a:prstGeom prst="rect">
+            <a:avLst/>
+          </a:prstGeom>
+          <a:noFill/>
+          <a:ln/>
+        </p:spPr>
+        <p:txBody>
+          <a:bodyPr wrap="square" lIns="0" tIns="0" rIns="0" bIns="0" rtlCol="0" anchor="ctr"/>
+          <a:lstStyle/>
+          <a:p>
+            <a:pPr algn="ctr" indent="0" marL="0">
+              <a:buNone/>
+            </a:pPr>
+            <a:r>
+              <a:rPr lang="en-US" sz="1100" b="1" dirty="0">
+                <a:solidFill>
+                  <a:srgbClr val="2C5F2D"/>
+                </a:solidFill>
+                <a:latin typeface="Meiryo UI" pitchFamily="34" charset="0"/>
+                <a:ea typeface="Meiryo UI" pitchFamily="34" charset="-122"/>
+                <a:cs typeface="Meiryo UI" pitchFamily="34" charset="-120"/>
+              </a:rPr>
+              <a:t>▶</a:t>
+            </a:r>
+            <a:endParaRPr lang="en-US" sz="1100" dirty="0"/>
+          </a:p>
+        </p:txBody>
+      </p:sp>
+      <p:sp>
+        <p:nvSpPr>
+          <p:cNvPr id="8" name="Shape 6"/>
+          <p:cNvSpPr/>
+          <p:nvPr/>
+        </p:nvSpPr>
+        <p:spPr>
+          <a:xfrm>
+            <a:off x="2551176" y="841248"/>
+            <a:ext cx="2148840" cy="1417320"/>
+          </a:xfrm>
+          <a:prstGeom prst="roundRect">
+            <a:avLst>
+              <a:gd name="adj" fmla="val 3871"/>
+            </a:avLst>
+          </a:prstGeom>
+          <a:solidFill>
+            <a:srgbClr val="F3F8F1"/>
+          </a:solidFill>
+          <a:ln w="12700">
+            <a:solidFill>
+              <a:srgbClr val="2C5F2D"/>
+            </a:solidFill>
+            <a:prstDash val="solid"/>
+          </a:ln>
+        </p:spPr>
+      </p:sp>
+      <p:sp>
+        <p:nvSpPr>
+          <p:cNvPr id="9" name="Text 7"/>
+          <p:cNvSpPr/>
+          <p:nvPr/>
+        </p:nvSpPr>
+        <p:spPr>
+          <a:xfrm>
+            <a:off x="2642616" y="896112"/>
+            <a:ext cx="1965960" cy="310896"/>
+          </a:xfrm>
+          <a:prstGeom prst="rect">
+            <a:avLst/>
+          </a:prstGeom>
+          <a:noFill/>
+          <a:ln/>
+        </p:spPr>
+        <p:txBody>
+          <a:bodyPr wrap="square" lIns="0" tIns="0" rIns="0" bIns="0" rtlCol="0" anchor="t"/>
+          <a:lstStyle/>
+          <a:p>
+            <a:pPr indent="0" marL="0">
+              <a:buNone/>
+            </a:pPr>
+            <a:r>
+              <a:rPr lang="en-US" sz="1400" b="1" dirty="0">
+                <a:solidFill>
+                  <a:srgbClr val="2C5F2D"/>
+                </a:solidFill>
+                <a:latin typeface="Meiryo UI" pitchFamily="34" charset="0"/>
+                <a:ea typeface="Meiryo UI" pitchFamily="34" charset="-122"/>
+                <a:cs typeface="Meiryo UI" pitchFamily="34" charset="-120"/>
+              </a:rPr>
+              <a:t>② </a:t>
+            </a:r>
+            <a:pPr indent="0" marL="0">
+              <a:buNone/>
+            </a:pPr>
+            <a:r>
+              <a:rPr lang="en-US" sz="950" b="1" dirty="0">
+                <a:solidFill>
+                  <a:srgbClr val="1F3D20"/>
+                </a:solidFill>
+                <a:latin typeface="Meiryo UI" pitchFamily="34" charset="0"/>
+                <a:ea typeface="Meiryo UI" pitchFamily="34" charset="-122"/>
+                <a:cs typeface="Meiryo UI" pitchFamily="34" charset="-120"/>
+              </a:rPr>
+              <a:t>自分で振り返る</a:t>
+            </a:r>
+            <a:endParaRPr lang="en-US" sz="1400" dirty="0"/>
+          </a:p>
+        </p:txBody>
+      </p:sp>
+      <p:sp>
+        <p:nvSpPr>
+          <p:cNvPr id="10" name="Text 8"/>
+          <p:cNvSpPr/>
+          <p:nvPr/>
+        </p:nvSpPr>
+        <p:spPr>
+          <a:xfrm>
+            <a:off x="2642616" y="1225296"/>
+            <a:ext cx="1965960" cy="1033272"/>
+          </a:xfrm>
+          <a:prstGeom prst="rect">
+            <a:avLst/>
+          </a:prstGeom>
+          <a:noFill/>
+          <a:ln/>
+        </p:spPr>
+        <p:txBody>
+          <a:bodyPr wrap="square" lIns="0" tIns="0" rIns="0" bIns="0" rtlCol="0" anchor="t"/>
+          <a:lstStyle/>
+          <a:p>
+            <a:pPr indent="0" marL="0">
+              <a:lnSpc>
+                <a:spcPct val="110000"/>
+              </a:lnSpc>
+              <a:buNone/>
+            </a:pPr>
+            <a:r>
+              <a:rPr lang="en-US" sz="740" dirty="0">
+                <a:solidFill>
+                  <a:srgbClr val="2B2B2B"/>
+                </a:solidFill>
+                <a:latin typeface="Meiryo UI" pitchFamily="34" charset="0"/>
+                <a:ea typeface="Meiryo UI" pitchFamily="34" charset="-122"/>
+                <a:cs typeface="Meiryo UI" pitchFamily="34" charset="-120"/>
+              </a:rPr>
+              <a:t>何を疑い、何を判断したかを自分の言葉で記録する(ポートフォリオへの週次メモ)</a:t>
+            </a:r>
+            <a:endParaRPr lang="en-US" sz="740" dirty="0"/>
+          </a:p>
+        </p:txBody>
+      </p:sp>
+      <p:sp>
+        <p:nvSpPr>
+          <p:cNvPr id="11" name="Text 9"/>
+          <p:cNvSpPr/>
+          <p:nvPr/>
+        </p:nvSpPr>
+        <p:spPr>
+          <a:xfrm>
+            <a:off x="4681728" y="841248"/>
+            <a:ext cx="164592" cy="1417320"/>
+          </a:xfrm>
+          <a:prstGeom prst="rect">
+            <a:avLst/>
+          </a:prstGeom>
+          <a:noFill/>
+          <a:ln/>
+        </p:spPr>
+        <p:txBody>
+          <a:bodyPr wrap="square" lIns="0" tIns="0" rIns="0" bIns="0" rtlCol="0" anchor="ctr"/>
+          <a:lstStyle/>
+          <a:p>
+            <a:pPr algn="ctr" indent="0" marL="0">
+              <a:buNone/>
+            </a:pPr>
+            <a:r>
+              <a:rPr lang="en-US" sz="1100" b="1" dirty="0">
+                <a:solidFill>
+                  <a:srgbClr val="2C5F2D"/>
+                </a:solidFill>
+                <a:latin typeface="Meiryo UI" pitchFamily="34" charset="0"/>
+                <a:ea typeface="Meiryo UI" pitchFamily="34" charset="-122"/>
+                <a:cs typeface="Meiryo UI" pitchFamily="34" charset="-120"/>
+              </a:rPr>
+              <a:t>▶</a:t>
+            </a:r>
+            <a:endParaRPr lang="en-US" sz="1100" dirty="0"/>
+          </a:p>
+        </p:txBody>
+      </p:sp>
+      <p:sp>
+        <p:nvSpPr>
+          <p:cNvPr id="12" name="Shape 10"/>
+          <p:cNvSpPr/>
+          <p:nvPr/>
+        </p:nvSpPr>
+        <p:spPr>
+          <a:xfrm>
+            <a:off x="4828032" y="841248"/>
+            <a:ext cx="2148840" cy="1417320"/>
+          </a:xfrm>
+          <a:prstGeom prst="roundRect">
+            <a:avLst>
+              <a:gd name="adj" fmla="val 3871"/>
+            </a:avLst>
+          </a:prstGeom>
+          <a:solidFill>
+            <a:srgbClr val="F3F8F1"/>
+          </a:solidFill>
+          <a:ln w="12700">
+            <a:solidFill>
+              <a:srgbClr val="2C5F2D"/>
+            </a:solidFill>
+            <a:prstDash val="solid"/>
+          </a:ln>
+        </p:spPr>
+      </p:sp>
+      <p:sp>
+        <p:nvSpPr>
+          <p:cNvPr id="13" name="Text 11"/>
+          <p:cNvSpPr/>
+          <p:nvPr/>
+        </p:nvSpPr>
+        <p:spPr>
+          <a:xfrm>
+            <a:off x="4919472" y="896112"/>
+            <a:ext cx="1965960" cy="310896"/>
+          </a:xfrm>
+          <a:prstGeom prst="rect">
+            <a:avLst/>
+          </a:prstGeom>
+          <a:noFill/>
+          <a:ln/>
+        </p:spPr>
+        <p:txBody>
+          <a:bodyPr wrap="square" lIns="0" tIns="0" rIns="0" bIns="0" rtlCol="0" anchor="t"/>
+          <a:lstStyle/>
+          <a:p>
+            <a:pPr indent="0" marL="0">
+              <a:buNone/>
+            </a:pPr>
+            <a:r>
+              <a:rPr lang="en-US" sz="1400" b="1" dirty="0">
+                <a:solidFill>
+                  <a:srgbClr val="2C5F2D"/>
+                </a:solidFill>
+                <a:latin typeface="Meiryo UI" pitchFamily="34" charset="0"/>
+                <a:ea typeface="Meiryo UI" pitchFamily="34" charset="-122"/>
+                <a:cs typeface="Meiryo UI" pitchFamily="34" charset="-120"/>
+              </a:rPr>
+              <a:t>③ </a:t>
+            </a:r>
+            <a:pPr indent="0" marL="0">
+              <a:buNone/>
+            </a:pPr>
+            <a:r>
+              <a:rPr lang="en-US" sz="950" b="1" dirty="0">
+                <a:solidFill>
+                  <a:srgbClr val="1F3D20"/>
+                </a:solidFill>
+                <a:latin typeface="Meiryo UI" pitchFamily="34" charset="0"/>
+                <a:ea typeface="Meiryo UI" pitchFamily="34" charset="-122"/>
+                <a:cs typeface="Meiryo UI" pitchFamily="34" charset="-120"/>
+              </a:rPr>
+              <a:t>フィードバック</a:t>
+            </a:r>
+            <a:endParaRPr lang="en-US" sz="1400" dirty="0"/>
+          </a:p>
+        </p:txBody>
+      </p:sp>
+      <p:sp>
+        <p:nvSpPr>
+          <p:cNvPr id="14" name="Text 12"/>
+          <p:cNvSpPr/>
+          <p:nvPr/>
+        </p:nvSpPr>
+        <p:spPr>
+          <a:xfrm>
+            <a:off x="4919472" y="1225296"/>
+            <a:ext cx="1965960" cy="1033272"/>
+          </a:xfrm>
+          <a:prstGeom prst="rect">
+            <a:avLst/>
+          </a:prstGeom>
+          <a:noFill/>
+          <a:ln/>
+        </p:spPr>
+        <p:txBody>
+          <a:bodyPr wrap="square" lIns="0" tIns="0" rIns="0" bIns="0" rtlCol="0" anchor="t"/>
+          <a:lstStyle/>
+          <a:p>
+            <a:pPr indent="0" marL="0">
+              <a:lnSpc>
+                <a:spcPct val="110000"/>
+              </a:lnSpc>
+              <a:buNone/>
+            </a:pPr>
+            <a:r>
+              <a:rPr lang="en-US" sz="740" dirty="0">
+                <a:solidFill>
+                  <a:srgbClr val="2B2B2B"/>
+                </a:solidFill>
+                <a:latin typeface="Meiryo UI" pitchFamily="34" charset="0"/>
+                <a:ea typeface="Meiryo UI" pitchFamily="34" charset="-122"/>
+                <a:cs typeface="Meiryo UI" pitchFamily="34" charset="-120"/>
+              </a:rPr>
+              <a:t>月次1回、メンター(品質保証/明石工場/生技セ)が判断の質を レビューする</a:t>
+            </a:r>
+            <a:endParaRPr lang="en-US" sz="740" dirty="0"/>
+          </a:p>
+        </p:txBody>
+      </p:sp>
+      <p:sp>
+        <p:nvSpPr>
+          <p:cNvPr id="15" name="Text 13"/>
+          <p:cNvSpPr/>
+          <p:nvPr/>
+        </p:nvSpPr>
+        <p:spPr>
+          <a:xfrm>
+            <a:off x="6958584" y="841248"/>
+            <a:ext cx="164592" cy="1417320"/>
+          </a:xfrm>
+          <a:prstGeom prst="rect">
+            <a:avLst/>
+          </a:prstGeom>
+          <a:noFill/>
+          <a:ln/>
+        </p:spPr>
+        <p:txBody>
+          <a:bodyPr wrap="square" lIns="0" tIns="0" rIns="0" bIns="0" rtlCol="0" anchor="ctr"/>
+          <a:lstStyle/>
+          <a:p>
+            <a:pPr algn="ctr" indent="0" marL="0">
+              <a:buNone/>
+            </a:pPr>
+            <a:r>
+              <a:rPr lang="en-US" sz="1100" b="1" dirty="0">
+                <a:solidFill>
+                  <a:srgbClr val="2C5F2D"/>
+                </a:solidFill>
+                <a:latin typeface="Meiryo UI" pitchFamily="34" charset="0"/>
+                <a:ea typeface="Meiryo UI" pitchFamily="34" charset="-122"/>
+                <a:cs typeface="Meiryo UI" pitchFamily="34" charset="-120"/>
+              </a:rPr>
+              <a:t>▶</a:t>
+            </a:r>
+            <a:endParaRPr lang="en-US" sz="1100" dirty="0"/>
+          </a:p>
+        </p:txBody>
+      </p:sp>
+      <p:sp>
+        <p:nvSpPr>
+          <p:cNvPr id="16" name="Shape 14"/>
+          <p:cNvSpPr/>
+          <p:nvPr/>
+        </p:nvSpPr>
+        <p:spPr>
+          <a:xfrm>
+            <a:off x="7104888" y="841248"/>
+            <a:ext cx="2148840" cy="1417320"/>
+          </a:xfrm>
+          <a:prstGeom prst="roundRect">
+            <a:avLst>
+              <a:gd name="adj" fmla="val 3871"/>
+            </a:avLst>
+          </a:prstGeom>
+          <a:solidFill>
+            <a:srgbClr val="F3F8F1"/>
+          </a:solidFill>
+          <a:ln w="12700">
+            <a:solidFill>
+              <a:srgbClr val="2C5F2D"/>
+            </a:solidFill>
+            <a:prstDash val="solid"/>
+          </a:ln>
+        </p:spPr>
+      </p:sp>
+      <p:sp>
+        <p:nvSpPr>
+          <p:cNvPr id="17" name="Text 15"/>
+          <p:cNvSpPr/>
+          <p:nvPr/>
+        </p:nvSpPr>
+        <p:spPr>
+          <a:xfrm>
+            <a:off x="7196328" y="896112"/>
+            <a:ext cx="1965960" cy="310896"/>
+          </a:xfrm>
+          <a:prstGeom prst="rect">
+            <a:avLst/>
+          </a:prstGeom>
+          <a:noFill/>
+          <a:ln/>
+        </p:spPr>
+        <p:txBody>
+          <a:bodyPr wrap="square" lIns="0" tIns="0" rIns="0" bIns="0" rtlCol="0" anchor="t"/>
+          <a:lstStyle/>
+          <a:p>
+            <a:pPr indent="0" marL="0">
+              <a:buNone/>
+            </a:pPr>
+            <a:r>
+              <a:rPr lang="en-US" sz="1400" b="1" dirty="0">
+                <a:solidFill>
+                  <a:srgbClr val="2C5F2D"/>
+                </a:solidFill>
+                <a:latin typeface="Meiryo UI" pitchFamily="34" charset="0"/>
+                <a:ea typeface="Meiryo UI" pitchFamily="34" charset="-122"/>
+                <a:cs typeface="Meiryo UI" pitchFamily="34" charset="-120"/>
+              </a:rPr>
+              <a:t>④ </a:t>
+            </a:r>
+            <a:pPr indent="0" marL="0">
+              <a:buNone/>
+            </a:pPr>
+            <a:r>
+              <a:rPr lang="en-US" sz="950" b="1" dirty="0">
+                <a:solidFill>
+                  <a:srgbClr val="1F3D20"/>
+                </a:solidFill>
+                <a:latin typeface="Meiryo UI" pitchFamily="34" charset="0"/>
+                <a:ea typeface="Meiryo UI" pitchFamily="34" charset="-122"/>
+                <a:cs typeface="Meiryo UI" pitchFamily="34" charset="-120"/>
+              </a:rPr>
+              <a:t>次の課題を設定</a:t>
+            </a:r>
+            <a:endParaRPr lang="en-US" sz="1400" dirty="0"/>
+          </a:p>
+        </p:txBody>
+      </p:sp>
+      <p:sp>
+        <p:nvSpPr>
+          <p:cNvPr id="18" name="Text 16"/>
+          <p:cNvSpPr/>
+          <p:nvPr/>
+        </p:nvSpPr>
+        <p:spPr>
+          <a:xfrm>
+            <a:off x="7196328" y="1225296"/>
+            <a:ext cx="1965960" cy="1033272"/>
+          </a:xfrm>
+          <a:prstGeom prst="rect">
+            <a:avLst/>
+          </a:prstGeom>
+          <a:noFill/>
+          <a:ln/>
+        </p:spPr>
+        <p:txBody>
+          <a:bodyPr wrap="square" lIns="0" tIns="0" rIns="0" bIns="0" rtlCol="0" anchor="t"/>
+          <a:lstStyle/>
+          <a:p>
+            <a:pPr indent="0" marL="0">
+              <a:lnSpc>
+                <a:spcPct val="110000"/>
+              </a:lnSpc>
+              <a:buNone/>
+            </a:pPr>
+            <a:r>
+              <a:rPr lang="en-US" sz="740" dirty="0">
+                <a:solidFill>
+                  <a:srgbClr val="2B2B2B"/>
+                </a:solidFill>
+                <a:latin typeface="Meiryo UI" pitchFamily="34" charset="0"/>
+                <a:ea typeface="Meiryo UI" pitchFamily="34" charset="-122"/>
+                <a:cs typeface="Meiryo UI" pitchFamily="34" charset="-120"/>
+              </a:rPr>
+              <a:t>メンターと合意の上、次月の実務課題と到達目標(C1〜C4のどこを伸ばすか)を決める</a:t>
+            </a:r>
+            <a:endParaRPr lang="en-US" sz="740" dirty="0"/>
+          </a:p>
+        </p:txBody>
+      </p:sp>
+      <p:sp>
+        <p:nvSpPr>
+          <p:cNvPr id="19" name="Text 17"/>
+          <p:cNvSpPr/>
+          <p:nvPr/>
+        </p:nvSpPr>
+        <p:spPr>
+          <a:xfrm>
+            <a:off x="9235440" y="841248"/>
+            <a:ext cx="164592" cy="1417320"/>
+          </a:xfrm>
+          <a:prstGeom prst="rect">
+            <a:avLst/>
+          </a:prstGeom>
+          <a:noFill/>
+          <a:ln/>
+        </p:spPr>
+        <p:txBody>
+          <a:bodyPr wrap="square" lIns="0" tIns="0" rIns="0" bIns="0" rtlCol="0" anchor="ctr"/>
+          <a:lstStyle/>
+          <a:p>
+            <a:pPr algn="ctr" indent="0" marL="0">
+              <a:buNone/>
+            </a:pPr>
+            <a:r>
+              <a:rPr lang="en-US" sz="1100" b="1" dirty="0">
+                <a:solidFill>
+                  <a:srgbClr val="2C5F2D"/>
+                </a:solidFill>
+                <a:latin typeface="Meiryo UI" pitchFamily="34" charset="0"/>
+                <a:ea typeface="Meiryo UI" pitchFamily="34" charset="-122"/>
+                <a:cs typeface="Meiryo UI" pitchFamily="34" charset="-120"/>
+              </a:rPr>
+              <a:t>▶</a:t>
+            </a:r>
+            <a:endParaRPr lang="en-US" sz="1100" dirty="0"/>
+          </a:p>
+        </p:txBody>
+      </p:sp>
+      <p:sp>
+        <p:nvSpPr>
+          <p:cNvPr id="20" name="Shape 18"/>
+          <p:cNvSpPr/>
+          <p:nvPr/>
+        </p:nvSpPr>
+        <p:spPr>
+          <a:xfrm>
+            <a:off x="9381744" y="841248"/>
+            <a:ext cx="2148840" cy="1417320"/>
+          </a:xfrm>
+          <a:prstGeom prst="roundRect">
+            <a:avLst>
+              <a:gd name="adj" fmla="val 3871"/>
+            </a:avLst>
+          </a:prstGeom>
+          <a:solidFill>
+            <a:srgbClr val="F3F8F1"/>
+          </a:solidFill>
+          <a:ln w="12700">
+            <a:solidFill>
+              <a:srgbClr val="2C5F2D"/>
+            </a:solidFill>
+            <a:prstDash val="solid"/>
+          </a:ln>
+        </p:spPr>
+      </p:sp>
+      <p:sp>
+        <p:nvSpPr>
+          <p:cNvPr id="21" name="Text 19"/>
+          <p:cNvSpPr/>
+          <p:nvPr/>
+        </p:nvSpPr>
+        <p:spPr>
+          <a:xfrm>
+            <a:off x="9473184" y="896112"/>
+            <a:ext cx="1965960" cy="310896"/>
+          </a:xfrm>
+          <a:prstGeom prst="rect">
+            <a:avLst/>
+          </a:prstGeom>
+          <a:noFill/>
+          <a:ln/>
+        </p:spPr>
+        <p:txBody>
+          <a:bodyPr wrap="square" lIns="0" tIns="0" rIns="0" bIns="0" rtlCol="0" anchor="t"/>
+          <a:lstStyle/>
+          <a:p>
+            <a:pPr indent="0" marL="0">
+              <a:buNone/>
+            </a:pPr>
+            <a:r>
+              <a:rPr lang="en-US" sz="1400" b="1" dirty="0">
+                <a:solidFill>
+                  <a:srgbClr val="2C5F2D"/>
+                </a:solidFill>
+                <a:latin typeface="Meiryo UI" pitchFamily="34" charset="0"/>
+                <a:ea typeface="Meiryo UI" pitchFamily="34" charset="-122"/>
+                <a:cs typeface="Meiryo UI" pitchFamily="34" charset="-120"/>
+              </a:rPr>
+              <a:t>⑤ </a:t>
+            </a:r>
+            <a:pPr indent="0" marL="0">
+              <a:buNone/>
+            </a:pPr>
+            <a:r>
+              <a:rPr lang="en-US" sz="950" b="1" dirty="0">
+                <a:solidFill>
+                  <a:srgbClr val="1F3D20"/>
+                </a:solidFill>
+                <a:latin typeface="Meiryo UI" pitchFamily="34" charset="0"/>
+                <a:ea typeface="Meiryo UI" pitchFamily="34" charset="-122"/>
+                <a:cs typeface="Meiryo UI" pitchFamily="34" charset="-120"/>
+              </a:rPr>
+              <a:t>成果を記録する</a:t>
+            </a:r>
+            <a:endParaRPr lang="en-US" sz="1400" dirty="0"/>
+          </a:p>
+        </p:txBody>
+      </p:sp>
+      <p:sp>
+        <p:nvSpPr>
+          <p:cNvPr id="22" name="Text 20"/>
+          <p:cNvSpPr/>
+          <p:nvPr/>
+        </p:nvSpPr>
+        <p:spPr>
+          <a:xfrm>
+            <a:off x="9473184" y="1225296"/>
+            <a:ext cx="1965960" cy="1033272"/>
+          </a:xfrm>
+          <a:prstGeom prst="rect">
+            <a:avLst/>
+          </a:prstGeom>
+          <a:noFill/>
+          <a:ln/>
+        </p:spPr>
+        <p:txBody>
+          <a:bodyPr wrap="square" lIns="0" tIns="0" rIns="0" bIns="0" rtlCol="0" anchor="t"/>
+          <a:lstStyle/>
+          <a:p>
+            <a:pPr indent="0" marL="0">
+              <a:lnSpc>
+                <a:spcPct val="110000"/>
+              </a:lnSpc>
+              <a:buNone/>
+            </a:pPr>
+            <a:r>
+              <a:rPr lang="en-US" sz="740" dirty="0">
+                <a:solidFill>
+                  <a:srgbClr val="2B2B2B"/>
+                </a:solidFill>
+                <a:latin typeface="Meiryo UI" pitchFamily="34" charset="0"/>
+                <a:ea typeface="Meiryo UI" pitchFamily="34" charset="-122"/>
+                <a:cs typeface="Meiryo UI" pitchFamily="34" charset="-120"/>
+              </a:rPr>
+              <a:t>採用された改善案・実現した効果をポートフォリオに蓄積し、進級判定の材料とする</a:t>
+            </a:r>
+            <a:endParaRPr lang="en-US" sz="740" dirty="0"/>
+          </a:p>
+        </p:txBody>
+      </p:sp>
+      <p:sp>
+        <p:nvSpPr>
+          <p:cNvPr id="23" name="Text 21"/>
+          <p:cNvSpPr/>
+          <p:nvPr/>
+        </p:nvSpPr>
+        <p:spPr>
+          <a:xfrm>
+            <a:off x="274320" y="2304288"/>
+            <a:ext cx="11640312" cy="201168"/>
+          </a:xfrm>
+          <a:prstGeom prst="rect">
+            <a:avLst/>
+          </a:prstGeom>
+          <a:noFill/>
+          <a:ln/>
+        </p:spPr>
+        <p:txBody>
+          <a:bodyPr wrap="square" lIns="0" tIns="0" rIns="0" bIns="0" rtlCol="0" anchor="ctr"/>
+          <a:lstStyle/>
+          <a:p>
+            <a:pPr algn="r" indent="0" marL="0">
+              <a:buNone/>
+            </a:pPr>
+            <a:r>
+              <a:rPr lang="en-US" sz="800" i="1" dirty="0">
+                <a:solidFill>
+                  <a:srgbClr val="595959"/>
+                </a:solidFill>
+                <a:latin typeface="Meiryo UI" pitchFamily="34" charset="0"/>
+                <a:ea typeface="Meiryo UI" pitchFamily="34" charset="-122"/>
+                <a:cs typeface="Meiryo UI" pitchFamily="34" charset="-120"/>
+              </a:rPr>
+              <a:t>↩ 翌月へ継続(次のサイクルへ)</a:t>
+            </a:r>
+            <a:endParaRPr lang="en-US" sz="800" dirty="0"/>
+          </a:p>
+        </p:txBody>
+      </p:sp>
+      <p:sp>
+        <p:nvSpPr>
+          <p:cNvPr id="24" name="Text 22"/>
+          <p:cNvSpPr/>
+          <p:nvPr/>
+        </p:nvSpPr>
+        <p:spPr>
+          <a:xfrm>
+            <a:off x="274320" y="2651760"/>
+            <a:ext cx="11640312" cy="237744"/>
+          </a:xfrm>
+          <a:prstGeom prst="rect">
+            <a:avLst/>
+          </a:prstGeom>
+          <a:noFill/>
+          <a:ln/>
+        </p:spPr>
+        <p:txBody>
+          <a:bodyPr wrap="square" lIns="0" tIns="0" rIns="0" bIns="0" rtlCol="0" anchor="ctr"/>
+          <a:lstStyle/>
+          <a:p>
+            <a:pPr indent="0" marL="0">
+              <a:buNone/>
+            </a:pPr>
+            <a:r>
+              <a:rPr lang="en-US" sz="1100" b="1" dirty="0">
+                <a:solidFill>
+                  <a:srgbClr val="1F3D20"/>
+                </a:solidFill>
+                <a:latin typeface="Meiryo UI" pitchFamily="34" charset="0"/>
+                <a:ea typeface="Meiryo UI" pitchFamily="34" charset="-122"/>
+                <a:cs typeface="Meiryo UI" pitchFamily="34" charset="-120"/>
+              </a:rPr>
+              <a:t>評価委員会の運用と進級ゲート</a:t>
+            </a:r>
+            <a:endParaRPr lang="en-US" sz="1100" dirty="0"/>
+          </a:p>
+        </p:txBody>
+      </p:sp>
+      <p:graphicFrame>
+        <p:nvGraphicFramePr>
+          <p:cNvPr id="7" name="Table 0"/>
+          <p:cNvGraphicFramePr>
+            <a:graphicFrameLocks noGrp="1"/>
+          </p:cNvGraphicFramePr>
+          <p:nvPr>
+            <p:extLst>
+              <p:ext uri="{D42A27DB-BD31-4B8C-83A1-F6EECF244321}">
+                <p14:modId xmlns:p14="http://schemas.microsoft.com/office/powerpoint/2010/main" val="1579011935"/>
+              </p:ext>
+            </p:extLst>
+          </p:nvPr>
+        </p:nvGraphicFramePr>
+        <p:xfrm>
+          <a:off x="274320" y="2907792"/>
+          <a:ext cx="11640312" cy="914400"/>
+        </p:xfrm>
+        <a:graphic>
+          <a:graphicData uri="http://schemas.openxmlformats.org/drawingml/2006/table">
+            <a:tbl>
+              <a:tblPr/>
+              <a:tblGrid>
+                <a:gridCol w="1828800"/>
+                <a:gridCol w="7342632"/>
+                <a:gridCol w="2468880"/>
+              </a:tblGrid>
+              <a:tr h="256032">
+                <a:tc>
+                  <a:txBody>
+                    <a:bodyPr/>
+                    <a:lstStyle/>
+                    <a:p>
+                      <a:pPr indent="0" marL="0">
+                        <a:buNone/>
+                      </a:pPr>
+                      <a:r>
+                        <a:rPr lang="en-US" sz="800" b="1" dirty="0">
+                          <a:solidFill>
+                            <a:srgbClr val="FFFFFF"/>
+                          </a:solidFill>
+                          <a:latin typeface="Meiryo UI" pitchFamily="34" charset="0"/>
+                          <a:ea typeface="Meiryo UI" pitchFamily="34" charset="-122"/>
+                          <a:cs typeface="Meiryo UI" pitchFamily="34" charset="-120"/>
+                        </a:rPr>
+                        <a:t>進級ゲート</a:t>
+                      </a:r>
+                      <a:endParaRPr lang="en-US" sz="800" dirty="0">
+                        <a:latin typeface="Meiryo UI" charset="0"/>
+                        <a:ea typeface="Meiryo UI" charset="0"/>
+                        <a:cs typeface="Meiryo UI" charset="0"/>
+                      </a:endParaRPr>
+                    </a:p>
+                  </a:txBody>
+                  <a:tcPr marL="45720" marR="45720" marT="45720" marB="45720" anchor="ctr">
+                    <a:lnL w="6350" cap="flat" cmpd="sng" algn="ctr">
+                      <a:solidFill>
+                        <a:srgbClr val="D3DED0"/>
+                      </a:solidFill>
+                      <a:prstDash val="solid"/>
+                      <a:round/>
+                      <a:headEnd type="none" w="med" len="med"/>
+                      <a:tailEnd type="none" w="med" len="med"/>
+                    </a:lnL>
+                    <a:lnR w="6350" cap="flat" cmpd="sng" algn="ctr">
+                      <a:solidFill>
+                        <a:srgbClr val="D3DED0"/>
+                      </a:solidFill>
+                      <a:prstDash val="solid"/>
+                      <a:round/>
+                      <a:headEnd type="none" w="med" len="med"/>
+                      <a:tailEnd type="none" w="med" len="med"/>
+                    </a:lnR>
+                    <a:lnT w="6350" cap="flat" cmpd="sng" algn="ctr">
+                      <a:solidFill>
+                        <a:srgbClr val="D3DED0"/>
+                      </a:solidFill>
+                      <a:prstDash val="solid"/>
+                      <a:round/>
+                      <a:headEnd type="none" w="med" len="med"/>
+                      <a:tailEnd type="none" w="med" len="med"/>
+                    </a:lnT>
+                    <a:lnB w="6350" cap="flat" cmpd="sng" algn="ctr">
+                      <a:solidFill>
+                        <a:srgbClr val="D3DED0"/>
+                      </a:solidFill>
+                      <a:prstDash val="solid"/>
+                      <a:round/>
+                      <a:headEnd type="none" w="med" len="med"/>
+                      <a:tailEnd type="none" w="med" len="med"/>
+                    </a:lnB>
+                    <a:solidFill>
+                      <a:srgbClr val="2C5F2D"/>
+                    </a:solidFill>
+                  </a:tcPr>
+                </a:tc>
+                <a:tc>
+                  <a:txBody>
+                    <a:bodyPr/>
+                    <a:lstStyle/>
+                    <a:p>
+                      <a:pPr indent="0" marL="0">
+                        <a:buNone/>
+                      </a:pPr>
+                      <a:r>
+                        <a:rPr lang="en-US" sz="800" b="1" dirty="0">
+                          <a:solidFill>
+                            <a:srgbClr val="FFFFFF"/>
+                          </a:solidFill>
+                          <a:latin typeface="Meiryo UI" pitchFamily="34" charset="0"/>
+                          <a:ea typeface="Meiryo UI" pitchFamily="34" charset="-122"/>
+                          <a:cs typeface="Meiryo UI" pitchFamily="34" charset="-120"/>
+                        </a:rPr>
+                        <a:t>判定基準(すべて成果物ベース)</a:t>
+                      </a:r>
+                      <a:endParaRPr lang="en-US" sz="800" dirty="0">
+                        <a:latin typeface="Meiryo UI" charset="0"/>
+                        <a:ea typeface="Meiryo UI" charset="0"/>
+                        <a:cs typeface="Meiryo UI" charset="0"/>
+                      </a:endParaRPr>
+                    </a:p>
+                  </a:txBody>
+                  <a:tcPr marL="45720" marR="45720" marT="45720" marB="45720" anchor="ctr">
+                    <a:lnL w="6350" cap="flat" cmpd="sng" algn="ctr">
+                      <a:solidFill>
+                        <a:srgbClr val="D3DED0"/>
+                      </a:solidFill>
+                      <a:prstDash val="solid"/>
+                      <a:round/>
+                      <a:headEnd type="none" w="med" len="med"/>
+                      <a:tailEnd type="none" w="med" len="med"/>
+                    </a:lnL>
+                    <a:lnR w="6350" cap="flat" cmpd="sng" algn="ctr">
+                      <a:solidFill>
+                        <a:srgbClr val="D3DED0"/>
+                      </a:solidFill>
+                      <a:prstDash val="solid"/>
+                      <a:round/>
+                      <a:headEnd type="none" w="med" len="med"/>
+                      <a:tailEnd type="none" w="med" len="med"/>
+                    </a:lnR>
+                    <a:lnT w="6350" cap="flat" cmpd="sng" algn="ctr">
+                      <a:solidFill>
+                        <a:srgbClr val="D3DED0"/>
+                      </a:solidFill>
+                      <a:prstDash val="solid"/>
+                      <a:round/>
+                      <a:headEnd type="none" w="med" len="med"/>
+                      <a:tailEnd type="none" w="med" len="med"/>
+                    </a:lnT>
+                    <a:lnB w="6350" cap="flat" cmpd="sng" algn="ctr">
+                      <a:solidFill>
+                        <a:srgbClr val="D3DED0"/>
+                      </a:solidFill>
+                      <a:prstDash val="solid"/>
+                      <a:round/>
+                      <a:headEnd type="none" w="med" len="med"/>
+                      <a:tailEnd type="none" w="med" len="med"/>
+                    </a:lnB>
+                    <a:solidFill>
+                      <a:srgbClr val="2C5F2D"/>
+                    </a:solidFill>
+                  </a:tcPr>
+                </a:tc>
+                <a:tc>
+                  <a:txBody>
+                    <a:bodyPr/>
+                    <a:lstStyle/>
+                    <a:p>
+                      <a:pPr indent="0" marL="0">
+                        <a:buNone/>
+                      </a:pPr>
+                      <a:r>
+                        <a:rPr lang="en-US" sz="800" b="1" dirty="0">
+                          <a:solidFill>
+                            <a:srgbClr val="FFFFFF"/>
+                          </a:solidFill>
+                          <a:latin typeface="Meiryo UI" pitchFamily="34" charset="0"/>
+                          <a:ea typeface="Meiryo UI" pitchFamily="34" charset="-122"/>
+                          <a:cs typeface="Meiryo UI" pitchFamily="34" charset="-120"/>
+                        </a:rPr>
+                        <a:t>判定頻度・体制</a:t>
+                      </a:r>
+                      <a:endParaRPr lang="en-US" sz="800" dirty="0">
+                        <a:latin typeface="Meiryo UI" charset="0"/>
+                        <a:ea typeface="Meiryo UI" charset="0"/>
+                        <a:cs typeface="Meiryo UI" charset="0"/>
+                      </a:endParaRPr>
+                    </a:p>
+                  </a:txBody>
+                  <a:tcPr marL="45720" marR="45720" marT="45720" marB="45720" anchor="ctr">
+                    <a:lnL w="6350" cap="flat" cmpd="sng" algn="ctr">
+                      <a:solidFill>
+                        <a:srgbClr val="D3DED0"/>
+                      </a:solidFill>
+                      <a:prstDash val="solid"/>
+                      <a:round/>
+                      <a:headEnd type="none" w="med" len="med"/>
+                      <a:tailEnd type="none" w="med" len="med"/>
+                    </a:lnL>
+                    <a:lnR w="6350" cap="flat" cmpd="sng" algn="ctr">
+                      <a:solidFill>
+                        <a:srgbClr val="D3DED0"/>
+                      </a:solidFill>
+                      <a:prstDash val="solid"/>
+                      <a:round/>
+                      <a:headEnd type="none" w="med" len="med"/>
+                      <a:tailEnd type="none" w="med" len="med"/>
+                    </a:lnR>
+                    <a:lnT w="6350" cap="flat" cmpd="sng" algn="ctr">
+                      <a:solidFill>
+                        <a:srgbClr val="D3DED0"/>
+                      </a:solidFill>
+                      <a:prstDash val="solid"/>
+                      <a:round/>
+                      <a:headEnd type="none" w="med" len="med"/>
+                      <a:tailEnd type="none" w="med" len="med"/>
+                    </a:lnT>
+                    <a:lnB w="6350" cap="flat" cmpd="sng" algn="ctr">
+                      <a:solidFill>
+                        <a:srgbClr val="D3DED0"/>
+                      </a:solidFill>
+                      <a:prstDash val="solid"/>
+                      <a:round/>
+                      <a:headEnd type="none" w="med" len="med"/>
+                      <a:tailEnd type="none" w="med" len="med"/>
+                    </a:lnB>
+                    <a:solidFill>
+                      <a:srgbClr val="2C5F2D"/>
+                    </a:solidFill>
+                  </a:tcPr>
+                </a:tc>
+              </a:tr>
+              <a:tr h="457200">
+                <a:tc>
+                  <a:txBody>
+                    <a:bodyPr/>
+                    <a:lstStyle/>
+                    <a:p>
+                      <a:pPr indent="0" marL="0">
+                        <a:buNone/>
+                      </a:pPr>
+                      <a:r>
+                        <a:rPr lang="en-US" sz="760" b="1" dirty="0">
+                          <a:solidFill>
+                            <a:srgbClr val="2B2B2B"/>
+                          </a:solidFill>
+                          <a:latin typeface="Meiryo UI" pitchFamily="34" charset="0"/>
+                          <a:ea typeface="Meiryo UI" pitchFamily="34" charset="-122"/>
+                          <a:cs typeface="Meiryo UI" pitchFamily="34" charset="-120"/>
+                        </a:rPr>
+                        <a:t>フェーズ1→2</a:t>
+                      </a:r>
+                      <a:endParaRPr lang="en-US" sz="760" dirty="0">
+                        <a:latin typeface="Meiryo UI" charset="0"/>
+                        <a:ea typeface="Meiryo UI" charset="0"/>
+                        <a:cs typeface="Meiryo UI" charset="0"/>
+                      </a:endParaRPr>
+                    </a:p>
+                  </a:txBody>
+                  <a:tcPr marL="45720" marR="45720" marT="45720" marB="45720" anchor="ctr">
+                    <a:lnL w="6350" cap="flat" cmpd="sng" algn="ctr">
+                      <a:solidFill>
+                        <a:srgbClr val="D3DED0"/>
+                      </a:solidFill>
+                      <a:prstDash val="solid"/>
+                      <a:round/>
+                      <a:headEnd type="none" w="med" len="med"/>
+                      <a:tailEnd type="none" w="med" len="med"/>
+                    </a:lnL>
+                    <a:lnR w="6350" cap="flat" cmpd="sng" algn="ctr">
+                      <a:solidFill>
+                        <a:srgbClr val="D3DED0"/>
+                      </a:solidFill>
+                      <a:prstDash val="solid"/>
+                      <a:round/>
+                      <a:headEnd type="none" w="med" len="med"/>
+                      <a:tailEnd type="none" w="med" len="med"/>
+                    </a:lnR>
+                    <a:lnT w="6350" cap="flat" cmpd="sng" algn="ctr">
+                      <a:solidFill>
+                        <a:srgbClr val="D3DED0"/>
+                      </a:solidFill>
+                      <a:prstDash val="solid"/>
+                      <a:round/>
+                      <a:headEnd type="none" w="med" len="med"/>
+                      <a:tailEnd type="none" w="med" len="med"/>
+                    </a:lnT>
+                    <a:lnB w="6350" cap="flat" cmpd="sng" algn="ctr">
+                      <a:solidFill>
+                        <a:srgbClr val="D3DED0"/>
+                      </a:solidFill>
+                      <a:prstDash val="solid"/>
+                      <a:round/>
+                      <a:headEnd type="none" w="med" len="med"/>
+                      <a:tailEnd type="none" w="med" len="med"/>
+                    </a:lnB>
+                  </a:tcPr>
+                </a:tc>
+                <a:tc>
+                  <a:txBody>
+                    <a:bodyPr/>
+                    <a:lstStyle/>
+                    <a:p>
+                      <a:pPr indent="0" marL="0">
+                        <a:buNone/>
+                      </a:pPr>
+                      <a:r>
+                        <a:rPr lang="en-US" sz="760" dirty="0">
+                          <a:solidFill>
+                            <a:srgbClr val="2B2B2B"/>
+                          </a:solidFill>
+                          <a:latin typeface="Meiryo UI" pitchFamily="34" charset="0"/>
+                          <a:ea typeface="Meiryo UI" pitchFamily="34" charset="-122"/>
+                          <a:cs typeface="Meiryo UI" pitchFamily="34" charset="-120"/>
+                        </a:rPr>
+                        <a:t>改善案1件以上がQA変更管理・工場改善提案に採用されている</a:t>
+                      </a:r>
+                      <a:endParaRPr lang="en-US" sz="760" dirty="0">
+                        <a:latin typeface="Meiryo UI" charset="0"/>
+                        <a:ea typeface="Meiryo UI" charset="0"/>
+                        <a:cs typeface="Meiryo UI" charset="0"/>
+                      </a:endParaRPr>
+                    </a:p>
+                  </a:txBody>
+                  <a:tcPr marL="45720" marR="45720" marT="45720" marB="45720" anchor="ctr">
+                    <a:lnL w="6350" cap="flat" cmpd="sng" algn="ctr">
+                      <a:solidFill>
+                        <a:srgbClr val="D3DED0"/>
+                      </a:solidFill>
+                      <a:prstDash val="solid"/>
+                      <a:round/>
+                      <a:headEnd type="none" w="med" len="med"/>
+                      <a:tailEnd type="none" w="med" len="med"/>
+                    </a:lnL>
+                    <a:lnR w="6350" cap="flat" cmpd="sng" algn="ctr">
+                      <a:solidFill>
+                        <a:srgbClr val="D3DED0"/>
+                      </a:solidFill>
+                      <a:prstDash val="solid"/>
+                      <a:round/>
+                      <a:headEnd type="none" w="med" len="med"/>
+                      <a:tailEnd type="none" w="med" len="med"/>
+                    </a:lnR>
+                    <a:lnT w="6350" cap="flat" cmpd="sng" algn="ctr">
+                      <a:solidFill>
+                        <a:srgbClr val="D3DED0"/>
+                      </a:solidFill>
+                      <a:prstDash val="solid"/>
+                      <a:round/>
+                      <a:headEnd type="none" w="med" len="med"/>
+                      <a:tailEnd type="none" w="med" len="med"/>
+                    </a:lnT>
+                    <a:lnB w="6350" cap="flat" cmpd="sng" algn="ctr">
+                      <a:solidFill>
+                        <a:srgbClr val="D3DED0"/>
+                      </a:solidFill>
+                      <a:prstDash val="solid"/>
+                      <a:round/>
+                      <a:headEnd type="none" w="med" len="med"/>
+                      <a:tailEnd type="none" w="med" len="med"/>
+                    </a:lnB>
+                  </a:tcPr>
+                </a:tc>
+                <a:tc>
+                  <a:txBody>
+                    <a:bodyPr/>
+                    <a:lstStyle/>
+                    <a:p>
+                      <a:pPr indent="0" marL="0">
+                        <a:buNone/>
+                      </a:pPr>
+                      <a:r>
+                        <a:rPr lang="en-US" sz="760" dirty="0">
+                          <a:solidFill>
+                            <a:srgbClr val="595959"/>
+                          </a:solidFill>
+                          <a:latin typeface="Meiryo UI" pitchFamily="34" charset="0"/>
+                          <a:ea typeface="Meiryo UI" pitchFamily="34" charset="-122"/>
+                          <a:cs typeface="Meiryo UI" pitchFamily="34" charset="-120"/>
+                        </a:rPr>
+                        <a:t>四半期ごと・評価委員会</a:t>
+                      </a:r>
+                      <a:endParaRPr lang="en-US" sz="760" dirty="0">
+                        <a:latin typeface="Meiryo UI" charset="0"/>
+                        <a:ea typeface="Meiryo UI" charset="0"/>
+                        <a:cs typeface="Meiryo UI" charset="0"/>
+                      </a:endParaRPr>
+                    </a:p>
+                  </a:txBody>
+                  <a:tcPr marL="45720" marR="45720" marT="45720" marB="45720" anchor="ctr">
+                    <a:lnL w="6350" cap="flat" cmpd="sng" algn="ctr">
+                      <a:solidFill>
+                        <a:srgbClr val="D3DED0"/>
+                      </a:solidFill>
+                      <a:prstDash val="solid"/>
+                      <a:round/>
+                      <a:headEnd type="none" w="med" len="med"/>
+                      <a:tailEnd type="none" w="med" len="med"/>
+                    </a:lnL>
+                    <a:lnR w="6350" cap="flat" cmpd="sng" algn="ctr">
+                      <a:solidFill>
+                        <a:srgbClr val="D3DED0"/>
+                      </a:solidFill>
+                      <a:prstDash val="solid"/>
+                      <a:round/>
+                      <a:headEnd type="none" w="med" len="med"/>
+                      <a:tailEnd type="none" w="med" len="med"/>
+                    </a:lnR>
+                    <a:lnT w="6350" cap="flat" cmpd="sng" algn="ctr">
+                      <a:solidFill>
+                        <a:srgbClr val="D3DED0"/>
+                      </a:solidFill>
+                      <a:prstDash val="solid"/>
+                      <a:round/>
+                      <a:headEnd type="none" w="med" len="med"/>
+                      <a:tailEnd type="none" w="med" len="med"/>
+                    </a:lnT>
+                    <a:lnB w="6350" cap="flat" cmpd="sng" algn="ctr">
+                      <a:solidFill>
+                        <a:srgbClr val="D3DED0"/>
+                      </a:solidFill>
+                      <a:prstDash val="solid"/>
+                      <a:round/>
+                      <a:headEnd type="none" w="med" len="med"/>
+                      <a:tailEnd type="none" w="med" len="med"/>
+                    </a:lnB>
+                  </a:tcPr>
+                </a:tc>
+              </a:tr>
+              <a:tr h="457200">
+                <a:tc>
+                  <a:txBody>
+                    <a:bodyPr/>
+                    <a:lstStyle/>
+                    <a:p>
+                      <a:pPr indent="0" marL="0">
+                        <a:buNone/>
+                      </a:pPr>
+                      <a:r>
+                        <a:rPr lang="en-US" sz="760" b="1" dirty="0">
+                          <a:solidFill>
+                            <a:srgbClr val="2B2B2B"/>
+                          </a:solidFill>
+                          <a:latin typeface="Meiryo UI" pitchFamily="34" charset="0"/>
+                          <a:ea typeface="Meiryo UI" pitchFamily="34" charset="-122"/>
+                          <a:cs typeface="Meiryo UI" pitchFamily="34" charset="-120"/>
+                        </a:rPr>
+                        <a:t>フェーズ2→3</a:t>
+                      </a:r>
+                      <a:endParaRPr lang="en-US" sz="760" dirty="0">
+                        <a:latin typeface="Meiryo UI" charset="0"/>
+                        <a:ea typeface="Meiryo UI" charset="0"/>
+                        <a:cs typeface="Meiryo UI" charset="0"/>
+                      </a:endParaRPr>
+                    </a:p>
+                  </a:txBody>
+                  <a:tcPr marL="45720" marR="45720" marT="45720" marB="45720" anchor="ctr">
+                    <a:lnL w="6350" cap="flat" cmpd="sng" algn="ctr">
+                      <a:solidFill>
+                        <a:srgbClr val="D3DED0"/>
+                      </a:solidFill>
+                      <a:prstDash val="solid"/>
+                      <a:round/>
+                      <a:headEnd type="none" w="med" len="med"/>
+                      <a:tailEnd type="none" w="med" len="med"/>
+                    </a:lnL>
+                    <a:lnR w="6350" cap="flat" cmpd="sng" algn="ctr">
+                      <a:solidFill>
+                        <a:srgbClr val="D3DED0"/>
+                      </a:solidFill>
+                      <a:prstDash val="solid"/>
+                      <a:round/>
+                      <a:headEnd type="none" w="med" len="med"/>
+                      <a:tailEnd type="none" w="med" len="med"/>
+                    </a:lnR>
+                    <a:lnT w="6350" cap="flat" cmpd="sng" algn="ctr">
+                      <a:solidFill>
+                        <a:srgbClr val="D3DED0"/>
+                      </a:solidFill>
+                      <a:prstDash val="solid"/>
+                      <a:round/>
+                      <a:headEnd type="none" w="med" len="med"/>
+                      <a:tailEnd type="none" w="med" len="med"/>
+                    </a:lnT>
+                    <a:lnB w="6350" cap="flat" cmpd="sng" algn="ctr">
+                      <a:solidFill>
+                        <a:srgbClr val="D3DED0"/>
+                      </a:solidFill>
+                      <a:prstDash val="solid"/>
+                      <a:round/>
+                      <a:headEnd type="none" w="med" len="med"/>
+                      <a:tailEnd type="none" w="med" len="med"/>
+                    </a:lnB>
+                  </a:tcPr>
+                </a:tc>
+                <a:tc>
+                  <a:txBody>
+                    <a:bodyPr/>
+                    <a:lstStyle/>
+                    <a:p>
+                      <a:pPr indent="0" marL="0">
+                        <a:buNone/>
+                      </a:pPr>
+                      <a:r>
+                        <a:rPr lang="en-US" sz="760" dirty="0">
+                          <a:solidFill>
+                            <a:srgbClr val="2B2B2B"/>
+                          </a:solidFill>
+                          <a:latin typeface="Meiryo UI" pitchFamily="34" charset="0"/>
+                          <a:ea typeface="Meiryo UI" pitchFamily="34" charset="-122"/>
+                          <a:cs typeface="Meiryo UI" pitchFamily="34" charset="-120"/>
+                        </a:rPr>
+                        <a:t>リードしたテーマで定量効果(▲人数・時間)を実現し、月次報告を実施している</a:t>
+                      </a:r>
+                      <a:endParaRPr lang="en-US" sz="760" dirty="0">
+                        <a:latin typeface="Meiryo UI" charset="0"/>
+                        <a:ea typeface="Meiryo UI" charset="0"/>
+                        <a:cs typeface="Meiryo UI" charset="0"/>
+                      </a:endParaRPr>
+                    </a:p>
+                  </a:txBody>
+                  <a:tcPr marL="45720" marR="45720" marT="45720" marB="45720" anchor="ctr">
+                    <a:lnL w="6350" cap="flat" cmpd="sng" algn="ctr">
+                      <a:solidFill>
+                        <a:srgbClr val="D3DED0"/>
+                      </a:solidFill>
+                      <a:prstDash val="solid"/>
+                      <a:round/>
+                      <a:headEnd type="none" w="med" len="med"/>
+                      <a:tailEnd type="none" w="med" len="med"/>
+                    </a:lnL>
+                    <a:lnR w="6350" cap="flat" cmpd="sng" algn="ctr">
+                      <a:solidFill>
+                        <a:srgbClr val="D3DED0"/>
+                      </a:solidFill>
+                      <a:prstDash val="solid"/>
+                      <a:round/>
+                      <a:headEnd type="none" w="med" len="med"/>
+                      <a:tailEnd type="none" w="med" len="med"/>
+                    </a:lnR>
+                    <a:lnT w="6350" cap="flat" cmpd="sng" algn="ctr">
+                      <a:solidFill>
+                        <a:srgbClr val="D3DED0"/>
+                      </a:solidFill>
+                      <a:prstDash val="solid"/>
+                      <a:round/>
+                      <a:headEnd type="none" w="med" len="med"/>
+                      <a:tailEnd type="none" w="med" len="med"/>
+                    </a:lnT>
+                    <a:lnB w="6350" cap="flat" cmpd="sng" algn="ctr">
+                      <a:solidFill>
+                        <a:srgbClr val="D3DED0"/>
+                      </a:solidFill>
+                      <a:prstDash val="solid"/>
+                      <a:round/>
+                      <a:headEnd type="none" w="med" len="med"/>
+                      <a:tailEnd type="none" w="med" len="med"/>
+                    </a:lnB>
+                  </a:tcPr>
+                </a:tc>
+                <a:tc>
+                  <a:txBody>
+                    <a:bodyPr/>
+                    <a:lstStyle/>
+                    <a:p>
+                      <a:pPr indent="0" marL="0">
+                        <a:buNone/>
+                      </a:pPr>
+                      <a:r>
+                        <a:rPr lang="en-US" sz="760" dirty="0">
+                          <a:solidFill>
+                            <a:srgbClr val="595959"/>
+                          </a:solidFill>
+                          <a:latin typeface="Meiryo UI" pitchFamily="34" charset="0"/>
+                          <a:ea typeface="Meiryo UI" pitchFamily="34" charset="-122"/>
+                          <a:cs typeface="Meiryo UI" pitchFamily="34" charset="-120"/>
+                        </a:rPr>
+                        <a:t>四半期ごと・評価委員会</a:t>
+                      </a:r>
+                      <a:endParaRPr lang="en-US" sz="760" dirty="0">
+                        <a:latin typeface="Meiryo UI" charset="0"/>
+                        <a:ea typeface="Meiryo UI" charset="0"/>
+                        <a:cs typeface="Meiryo UI" charset="0"/>
+                      </a:endParaRPr>
+                    </a:p>
+                  </a:txBody>
+                  <a:tcPr marL="45720" marR="45720" marT="45720" marB="45720" anchor="ctr">
+                    <a:lnL w="6350" cap="flat" cmpd="sng" algn="ctr">
+                      <a:solidFill>
+                        <a:srgbClr val="D3DED0"/>
+                      </a:solidFill>
+                      <a:prstDash val="solid"/>
+                      <a:round/>
+                      <a:headEnd type="none" w="med" len="med"/>
+                      <a:tailEnd type="none" w="med" len="med"/>
+                    </a:lnL>
+                    <a:lnR w="6350" cap="flat" cmpd="sng" algn="ctr">
+                      <a:solidFill>
+                        <a:srgbClr val="D3DED0"/>
+                      </a:solidFill>
+                      <a:prstDash val="solid"/>
+                      <a:round/>
+                      <a:headEnd type="none" w="med" len="med"/>
+                      <a:tailEnd type="none" w="med" len="med"/>
+                    </a:lnR>
+                    <a:lnT w="6350" cap="flat" cmpd="sng" algn="ctr">
+                      <a:solidFill>
+                        <a:srgbClr val="D3DED0"/>
+                      </a:solidFill>
+                      <a:prstDash val="solid"/>
+                      <a:round/>
+                      <a:headEnd type="none" w="med" len="med"/>
+                      <a:tailEnd type="none" w="med" len="med"/>
+                    </a:lnT>
+                    <a:lnB w="6350" cap="flat" cmpd="sng" algn="ctr">
+                      <a:solidFill>
+                        <a:srgbClr val="D3DED0"/>
+                      </a:solidFill>
+                      <a:prstDash val="solid"/>
+                      <a:round/>
+                      <a:headEnd type="none" w="med" len="med"/>
+                      <a:tailEnd type="none" w="med" len="med"/>
+                    </a:lnB>
+                  </a:tcPr>
+                </a:tc>
+              </a:tr>
+              <a:tr h="457200">
+                <a:tc>
+                  <a:txBody>
+                    <a:bodyPr/>
+                    <a:lstStyle/>
+                    <a:p>
+                      <a:pPr indent="0" marL="0">
+                        <a:buNone/>
+                      </a:pPr>
+                      <a:r>
+                        <a:rPr lang="en-US" sz="760" b="1" dirty="0">
+                          <a:solidFill>
+                            <a:srgbClr val="2B2B2B"/>
+                          </a:solidFill>
+                          <a:latin typeface="Meiryo UI" pitchFamily="34" charset="0"/>
+                          <a:ea typeface="Meiryo UI" pitchFamily="34" charset="-122"/>
+                          <a:cs typeface="Meiryo UI" pitchFamily="34" charset="-120"/>
+                        </a:rPr>
+                        <a:t>フェーズ3→4</a:t>
+                      </a:r>
+                      <a:endParaRPr lang="en-US" sz="760" dirty="0">
+                        <a:latin typeface="Meiryo UI" charset="0"/>
+                        <a:ea typeface="Meiryo UI" charset="0"/>
+                        <a:cs typeface="Meiryo UI" charset="0"/>
+                      </a:endParaRPr>
+                    </a:p>
+                  </a:txBody>
+                  <a:tcPr marL="45720" marR="45720" marT="45720" marB="45720" anchor="ctr">
+                    <a:lnL w="6350" cap="flat" cmpd="sng" algn="ctr">
+                      <a:solidFill>
+                        <a:srgbClr val="D3DED0"/>
+                      </a:solidFill>
+                      <a:prstDash val="solid"/>
+                      <a:round/>
+                      <a:headEnd type="none" w="med" len="med"/>
+                      <a:tailEnd type="none" w="med" len="med"/>
+                    </a:lnL>
+                    <a:lnR w="6350" cap="flat" cmpd="sng" algn="ctr">
+                      <a:solidFill>
+                        <a:srgbClr val="D3DED0"/>
+                      </a:solidFill>
+                      <a:prstDash val="solid"/>
+                      <a:round/>
+                      <a:headEnd type="none" w="med" len="med"/>
+                      <a:tailEnd type="none" w="med" len="med"/>
+                    </a:lnR>
+                    <a:lnT w="6350" cap="flat" cmpd="sng" algn="ctr">
+                      <a:solidFill>
+                        <a:srgbClr val="D3DED0"/>
+                      </a:solidFill>
+                      <a:prstDash val="solid"/>
+                      <a:round/>
+                      <a:headEnd type="none" w="med" len="med"/>
+                      <a:tailEnd type="none" w="med" len="med"/>
+                    </a:lnT>
+                    <a:lnB w="6350" cap="flat" cmpd="sng" algn="ctr">
+                      <a:solidFill>
+                        <a:srgbClr val="D3DED0"/>
+                      </a:solidFill>
+                      <a:prstDash val="solid"/>
+                      <a:round/>
+                      <a:headEnd type="none" w="med" len="med"/>
+                      <a:tailEnd type="none" w="med" len="med"/>
+                    </a:lnB>
+                  </a:tcPr>
+                </a:tc>
+                <a:tc>
+                  <a:txBody>
+                    <a:bodyPr/>
+                    <a:lstStyle/>
+                    <a:p>
+                      <a:pPr indent="0" marL="0">
+                        <a:buNone/>
+                      </a:pPr>
+                      <a:r>
+                        <a:rPr lang="en-US" sz="760" dirty="0">
+                          <a:solidFill>
+                            <a:srgbClr val="2B2B2B"/>
+                          </a:solidFill>
+                          <a:latin typeface="Meiryo UI" pitchFamily="34" charset="0"/>
+                          <a:ea typeface="Meiryo UI" pitchFamily="34" charset="-122"/>
+                          <a:cs typeface="Meiryo UI" pitchFamily="34" charset="-120"/>
+                        </a:rPr>
+                        <a:t>自分のPoC結果・分析が投資意思決定資料に引用・採用されている</a:t>
+                      </a:r>
+                      <a:endParaRPr lang="en-US" sz="760" dirty="0">
+                        <a:latin typeface="Meiryo UI" charset="0"/>
+                        <a:ea typeface="Meiryo UI" charset="0"/>
+                        <a:cs typeface="Meiryo UI" charset="0"/>
+                      </a:endParaRPr>
+                    </a:p>
+                  </a:txBody>
+                  <a:tcPr marL="45720" marR="45720" marT="45720" marB="45720" anchor="ctr">
+                    <a:lnL w="6350" cap="flat" cmpd="sng" algn="ctr">
+                      <a:solidFill>
+                        <a:srgbClr val="D3DED0"/>
+                      </a:solidFill>
+                      <a:prstDash val="solid"/>
+                      <a:round/>
+                      <a:headEnd type="none" w="med" len="med"/>
+                      <a:tailEnd type="none" w="med" len="med"/>
+                    </a:lnL>
+                    <a:lnR w="6350" cap="flat" cmpd="sng" algn="ctr">
+                      <a:solidFill>
+                        <a:srgbClr val="D3DED0"/>
+                      </a:solidFill>
+                      <a:prstDash val="solid"/>
+                      <a:round/>
+                      <a:headEnd type="none" w="med" len="med"/>
+                      <a:tailEnd type="none" w="med" len="med"/>
+                    </a:lnR>
+                    <a:lnT w="6350" cap="flat" cmpd="sng" algn="ctr">
+                      <a:solidFill>
+                        <a:srgbClr val="D3DED0"/>
+                      </a:solidFill>
+                      <a:prstDash val="solid"/>
+                      <a:round/>
+                      <a:headEnd type="none" w="med" len="med"/>
+                      <a:tailEnd type="none" w="med" len="med"/>
+                    </a:lnT>
+                    <a:lnB w="6350" cap="flat" cmpd="sng" algn="ctr">
+                      <a:solidFill>
+                        <a:srgbClr val="D3DED0"/>
+                      </a:solidFill>
+                      <a:prstDash val="solid"/>
+                      <a:round/>
+                      <a:headEnd type="none" w="med" len="med"/>
+                      <a:tailEnd type="none" w="med" len="med"/>
+                    </a:lnB>
+                  </a:tcPr>
+                </a:tc>
+                <a:tc>
+                  <a:txBody>
+                    <a:bodyPr/>
+                    <a:lstStyle/>
+                    <a:p>
+                      <a:pPr indent="0" marL="0">
+                        <a:buNone/>
+                      </a:pPr>
+                      <a:r>
+                        <a:rPr lang="en-US" sz="760" dirty="0">
+                          <a:solidFill>
+                            <a:srgbClr val="595959"/>
+                          </a:solidFill>
+                          <a:latin typeface="Meiryo UI" pitchFamily="34" charset="0"/>
+                          <a:ea typeface="Meiryo UI" pitchFamily="34" charset="-122"/>
+                          <a:cs typeface="Meiryo UI" pitchFamily="34" charset="-120"/>
+                        </a:rPr>
+                        <a:t>四半期ごと・評価委員会</a:t>
+                      </a:r>
+                      <a:endParaRPr lang="en-US" sz="760" dirty="0">
+                        <a:latin typeface="Meiryo UI" charset="0"/>
+                        <a:ea typeface="Meiryo UI" charset="0"/>
+                        <a:cs typeface="Meiryo UI" charset="0"/>
+                      </a:endParaRPr>
+                    </a:p>
+                  </a:txBody>
+                  <a:tcPr marL="45720" marR="45720" marT="45720" marB="45720" anchor="ctr">
+                    <a:lnL w="6350" cap="flat" cmpd="sng" algn="ctr">
+                      <a:solidFill>
+                        <a:srgbClr val="D3DED0"/>
+                      </a:solidFill>
+                      <a:prstDash val="solid"/>
+                      <a:round/>
+                      <a:headEnd type="none" w="med" len="med"/>
+                      <a:tailEnd type="none" w="med" len="med"/>
+                    </a:lnL>
+                    <a:lnR w="6350" cap="flat" cmpd="sng" algn="ctr">
+                      <a:solidFill>
+                        <a:srgbClr val="D3DED0"/>
+                      </a:solidFill>
+                      <a:prstDash val="solid"/>
+                      <a:round/>
+                      <a:headEnd type="none" w="med" len="med"/>
+                      <a:tailEnd type="none" w="med" len="med"/>
+                    </a:lnR>
+                    <a:lnT w="6350" cap="flat" cmpd="sng" algn="ctr">
+                      <a:solidFill>
+                        <a:srgbClr val="D3DED0"/>
+                      </a:solidFill>
+                      <a:prstDash val="solid"/>
+                      <a:round/>
+                      <a:headEnd type="none" w="med" len="med"/>
+                      <a:tailEnd type="none" w="med" len="med"/>
+                    </a:lnT>
+                    <a:lnB w="6350" cap="flat" cmpd="sng" algn="ctr">
+                      <a:solidFill>
+                        <a:srgbClr val="D3DED0"/>
+                      </a:solidFill>
+                      <a:prstDash val="solid"/>
+                      <a:round/>
+                      <a:headEnd type="none" w="med" len="med"/>
+                      <a:tailEnd type="none" w="med" len="med"/>
+                    </a:lnB>
+                  </a:tcPr>
+                </a:tc>
+              </a:tr>
+              <a:tr h="457200">
+                <a:tc>
+                  <a:txBody>
+                    <a:bodyPr/>
+                    <a:lstStyle/>
+                    <a:p>
+                      <a:pPr indent="0" marL="0">
+                        <a:buNone/>
+                      </a:pPr>
+                      <a:r>
+                        <a:rPr lang="en-US" sz="760" b="1" dirty="0">
+                          <a:solidFill>
+                            <a:srgbClr val="2B2B2B"/>
+                          </a:solidFill>
+                          <a:latin typeface="Meiryo UI" pitchFamily="34" charset="0"/>
+                          <a:ea typeface="Meiryo UI" pitchFamily="34" charset="-122"/>
+                          <a:cs typeface="Meiryo UI" pitchFamily="34" charset="-120"/>
+                        </a:rPr>
+                        <a:t>フェーズ4→5</a:t>
+                      </a:r>
+                      <a:endParaRPr lang="en-US" sz="760" dirty="0">
+                        <a:latin typeface="Meiryo UI" charset="0"/>
+                        <a:ea typeface="Meiryo UI" charset="0"/>
+                        <a:cs typeface="Meiryo UI" charset="0"/>
+                      </a:endParaRPr>
+                    </a:p>
+                  </a:txBody>
+                  <a:tcPr marL="45720" marR="45720" marT="45720" marB="45720" anchor="ctr">
+                    <a:lnL w="6350" cap="flat" cmpd="sng" algn="ctr">
+                      <a:solidFill>
+                        <a:srgbClr val="D3DED0"/>
+                      </a:solidFill>
+                      <a:prstDash val="solid"/>
+                      <a:round/>
+                      <a:headEnd type="none" w="med" len="med"/>
+                      <a:tailEnd type="none" w="med" len="med"/>
+                    </a:lnL>
+                    <a:lnR w="6350" cap="flat" cmpd="sng" algn="ctr">
+                      <a:solidFill>
+                        <a:srgbClr val="D3DED0"/>
+                      </a:solidFill>
+                      <a:prstDash val="solid"/>
+                      <a:round/>
+                      <a:headEnd type="none" w="med" len="med"/>
+                      <a:tailEnd type="none" w="med" len="med"/>
+                    </a:lnR>
+                    <a:lnT w="6350" cap="flat" cmpd="sng" algn="ctr">
+                      <a:solidFill>
+                        <a:srgbClr val="D3DED0"/>
+                      </a:solidFill>
+                      <a:prstDash val="solid"/>
+                      <a:round/>
+                      <a:headEnd type="none" w="med" len="med"/>
+                      <a:tailEnd type="none" w="med" len="med"/>
+                    </a:lnT>
+                    <a:lnB w="6350" cap="flat" cmpd="sng" algn="ctr">
+                      <a:solidFill>
+                        <a:srgbClr val="D3DED0"/>
+                      </a:solidFill>
+                      <a:prstDash val="solid"/>
+                      <a:round/>
+                      <a:headEnd type="none" w="med" len="med"/>
+                      <a:tailEnd type="none" w="med" len="med"/>
+                    </a:lnB>
+                  </a:tcPr>
+                </a:tc>
+                <a:tc>
+                  <a:txBody>
+                    <a:bodyPr/>
+                    <a:lstStyle/>
+                    <a:p>
+                      <a:pPr indent="0" marL="0">
+                        <a:buNone/>
+                      </a:pPr>
+                      <a:r>
+                        <a:rPr lang="en-US" sz="760" dirty="0">
+                          <a:solidFill>
+                            <a:srgbClr val="2B2B2B"/>
+                          </a:solidFill>
+                          <a:latin typeface="Meiryo UI" pitchFamily="34" charset="0"/>
+                          <a:ea typeface="Meiryo UI" pitchFamily="34" charset="-122"/>
+                          <a:cs typeface="Meiryo UI" pitchFamily="34" charset="-120"/>
+                        </a:rPr>
+                        <a:t>横展開先で植毛と同水準の効果が再現され、後継者候補が特定されている</a:t>
+                      </a:r>
+                      <a:endParaRPr lang="en-US" sz="760" dirty="0">
+                        <a:latin typeface="Meiryo UI" charset="0"/>
+                        <a:ea typeface="Meiryo UI" charset="0"/>
+                        <a:cs typeface="Meiryo UI" charset="0"/>
+                      </a:endParaRPr>
+                    </a:p>
+                  </a:txBody>
+                  <a:tcPr marL="45720" marR="45720" marT="45720" marB="45720" anchor="ctr">
+                    <a:lnL w="6350" cap="flat" cmpd="sng" algn="ctr">
+                      <a:solidFill>
+                        <a:srgbClr val="D3DED0"/>
+                      </a:solidFill>
+                      <a:prstDash val="solid"/>
+                      <a:round/>
+                      <a:headEnd type="none" w="med" len="med"/>
+                      <a:tailEnd type="none" w="med" len="med"/>
+                    </a:lnL>
+                    <a:lnR w="6350" cap="flat" cmpd="sng" algn="ctr">
+                      <a:solidFill>
+                        <a:srgbClr val="D3DED0"/>
+                      </a:solidFill>
+                      <a:prstDash val="solid"/>
+                      <a:round/>
+                      <a:headEnd type="none" w="med" len="med"/>
+                      <a:tailEnd type="none" w="med" len="med"/>
+                    </a:lnR>
+                    <a:lnT w="6350" cap="flat" cmpd="sng" algn="ctr">
+                      <a:solidFill>
+                        <a:srgbClr val="D3DED0"/>
+                      </a:solidFill>
+                      <a:prstDash val="solid"/>
+                      <a:round/>
+                      <a:headEnd type="none" w="med" len="med"/>
+                      <a:tailEnd type="none" w="med" len="med"/>
+                    </a:lnT>
+                    <a:lnB w="6350" cap="flat" cmpd="sng" algn="ctr">
+                      <a:solidFill>
+                        <a:srgbClr val="D3DED0"/>
+                      </a:solidFill>
+                      <a:prstDash val="solid"/>
+                      <a:round/>
+                      <a:headEnd type="none" w="med" len="med"/>
+                      <a:tailEnd type="none" w="med" len="med"/>
+                    </a:lnB>
+                  </a:tcPr>
+                </a:tc>
+                <a:tc>
+                  <a:txBody>
+                    <a:bodyPr/>
+                    <a:lstStyle/>
+                    <a:p>
+                      <a:pPr indent="0" marL="0">
+                        <a:buNone/>
+                      </a:pPr>
+                      <a:r>
+                        <a:rPr lang="en-US" sz="760" dirty="0">
+                          <a:solidFill>
+                            <a:srgbClr val="595959"/>
+                          </a:solidFill>
+                          <a:latin typeface="Meiryo UI" pitchFamily="34" charset="0"/>
+                          <a:ea typeface="Meiryo UI" pitchFamily="34" charset="-122"/>
+                          <a:cs typeface="Meiryo UI" pitchFamily="34" charset="-120"/>
+                        </a:rPr>
+                        <a:t>四半期ごと・評価委員会</a:t>
+                      </a:r>
+                      <a:endParaRPr lang="en-US" sz="760" dirty="0">
+                        <a:latin typeface="Meiryo UI" charset="0"/>
+                        <a:ea typeface="Meiryo UI" charset="0"/>
+                        <a:cs typeface="Meiryo UI" charset="0"/>
+                      </a:endParaRPr>
+                    </a:p>
+                  </a:txBody>
+                  <a:tcPr marL="45720" marR="45720" marT="45720" marB="45720" anchor="ctr">
+                    <a:lnL w="6350" cap="flat" cmpd="sng" algn="ctr">
+                      <a:solidFill>
+                        <a:srgbClr val="D3DED0"/>
+                      </a:solidFill>
+                      <a:prstDash val="solid"/>
+                      <a:round/>
+                      <a:headEnd type="none" w="med" len="med"/>
+                      <a:tailEnd type="none" w="med" len="med"/>
+                    </a:lnL>
+                    <a:lnR w="6350" cap="flat" cmpd="sng" algn="ctr">
+                      <a:solidFill>
+                        <a:srgbClr val="D3DED0"/>
+                      </a:solidFill>
+                      <a:prstDash val="solid"/>
+                      <a:round/>
+                      <a:headEnd type="none" w="med" len="med"/>
+                      <a:tailEnd type="none" w="med" len="med"/>
+                    </a:lnR>
+                    <a:lnT w="6350" cap="flat" cmpd="sng" algn="ctr">
+                      <a:solidFill>
+                        <a:srgbClr val="D3DED0"/>
+                      </a:solidFill>
+                      <a:prstDash val="solid"/>
+                      <a:round/>
+                      <a:headEnd type="none" w="med" len="med"/>
+                      <a:tailEnd type="none" w="med" len="med"/>
+                    </a:lnT>
+                    <a:lnB w="6350" cap="flat" cmpd="sng" algn="ctr">
+                      <a:solidFill>
+                        <a:srgbClr val="D3DED0"/>
+                      </a:solidFill>
+                      <a:prstDash val="solid"/>
+                      <a:round/>
+                      <a:headEnd type="none" w="med" len="med"/>
+                      <a:tailEnd type="none" w="med" len="med"/>
+                    </a:lnB>
+                  </a:tcPr>
+                </a:tc>
+              </a:tr>
+            </a:tbl>
+          </a:graphicData>
+        </a:graphic>
+      </p:graphicFrame>
+      <p:sp>
+        <p:nvSpPr>
+          <p:cNvPr id="26" name="Shape 23"/>
+          <p:cNvSpPr/>
+          <p:nvPr/>
+        </p:nvSpPr>
+        <p:spPr>
+          <a:xfrm>
+            <a:off x="274320" y="5120640"/>
+            <a:ext cx="11640312" cy="658368"/>
+          </a:xfrm>
+          <a:prstGeom prst="roundRect">
+            <a:avLst>
+              <a:gd name="adj" fmla="val 8333"/>
+            </a:avLst>
+          </a:prstGeom>
+          <a:solidFill>
+            <a:srgbClr val="FBEDEA"/>
+          </a:solidFill>
+          <a:ln w="12700">
+            <a:solidFill>
+              <a:srgbClr val="B85042"/>
+            </a:solidFill>
+            <a:prstDash val="solid"/>
+          </a:ln>
+        </p:spPr>
+      </p:sp>
+      <p:sp>
+        <p:nvSpPr>
+          <p:cNvPr id="27" name="Text 24"/>
+          <p:cNvSpPr/>
+          <p:nvPr/>
+        </p:nvSpPr>
+        <p:spPr>
+          <a:xfrm>
+            <a:off x="420624" y="5120640"/>
+            <a:ext cx="11338560" cy="658368"/>
+          </a:xfrm>
+          <a:prstGeom prst="rect">
+            <a:avLst/>
+          </a:prstGeom>
+          <a:noFill/>
+          <a:ln/>
+        </p:spPr>
+        <p:txBody>
+          <a:bodyPr wrap="square" lIns="0" tIns="0" rIns="0" bIns="0" rtlCol="0" anchor="ctr"/>
+          <a:lstStyle/>
+          <a:p>
+            <a:pPr indent="0" marL="0">
+              <a:lnSpc>
+                <a:spcPct val="115000"/>
+              </a:lnSpc>
+              <a:buNone/>
+            </a:pPr>
+            <a:r>
+              <a:rPr lang="en-US" sz="950" b="1" dirty="0">
+                <a:solidFill>
+                  <a:srgbClr val="B85042"/>
+                </a:solidFill>
+                <a:latin typeface="Meiryo UI" pitchFamily="34" charset="0"/>
+                <a:ea typeface="Meiryo UI" pitchFamily="34" charset="-122"/>
+                <a:cs typeface="Meiryo UI" pitchFamily="34" charset="-120"/>
+              </a:rPr>
+              <a:t>進級は「多数決」でも「講座の消化」でもなく、「成果の実在性」で判定する。
+</a:t>
+            </a:r>
+            <a:pPr indent="0" marL="0">
+              <a:lnSpc>
+                <a:spcPct val="115000"/>
+              </a:lnSpc>
+              <a:buNone/>
+            </a:pPr>
+            <a:r>
+              <a:rPr lang="en-US" sz="830" dirty="0">
+                <a:solidFill>
+                  <a:srgbClr val="2B2B2B"/>
+                </a:solidFill>
+                <a:latin typeface="Meiryo UI" pitchFamily="34" charset="0"/>
+                <a:ea typeface="Meiryo UI" pitchFamily="34" charset="-122"/>
+                <a:cs typeface="Meiryo UI" pitchFamily="34" charset="-120"/>
+              </a:rPr>
+              <a:t>採用された改善案・実現した効果・投資判断への貢献が実際にあるかどうかだけを見る。技術研修の受講記録は参考情報にすぎない。</a:t>
+            </a:r>
+            <a:endParaRPr lang="en-US" sz="950" dirty="0"/>
+          </a:p>
+        </p:txBody>
+      </p:sp>
+      <p:sp>
+        <p:nvSpPr>
+          <p:cNvPr id="28" name="Text 25"/>
+          <p:cNvSpPr/>
+          <p:nvPr/>
+        </p:nvSpPr>
+        <p:spPr>
+          <a:xfrm>
+            <a:off x="274320" y="5897880"/>
+            <a:ext cx="11640312" cy="457200"/>
+          </a:xfrm>
+          <a:prstGeom prst="rect">
+            <a:avLst/>
+          </a:prstGeom>
+          <a:noFill/>
+          <a:ln/>
+        </p:spPr>
+        <p:txBody>
+          <a:bodyPr wrap="square" lIns="0" tIns="0" rIns="0" bIns="0" rtlCol="0" anchor="t"/>
+          <a:lstStyle/>
+          <a:p>
+            <a:pPr indent="0" marL="0">
+              <a:buNone/>
+            </a:pPr>
+            <a:r>
+              <a:rPr lang="en-US" sz="680" dirty="0">
+                <a:solidFill>
+                  <a:srgbClr val="595959"/>
+                </a:solidFill>
+                <a:latin typeface="Meiryo UI" pitchFamily="34" charset="0"/>
+                <a:ea typeface="Meiryo UI" pitchFamily="34" charset="-122"/>
+                <a:cs typeface="Meiryo UI" pitchFamily="34" charset="-120"/>
+              </a:rPr>
+              <a:t>※ 頻度・体制は仮説値。評価委員会設置(26/9)時に確定する。 出典: ラインアーキテクト人材育成プログラム資料/生産性ボトルネック調査 推進方法 Ver2.0</a:t>
+            </a:r>
+            <a:endParaRPr lang="en-US" sz="680" dirty="0"/>
+          </a:p>
+        </p:txBody>
+      </p:sp>
+    </p:spTree>
+  </p:cSld>
+  <p:clrMapOvr>
+    <a:masterClrMapping/>
+  </p:clrMapOvr>
+</p:sld>
+</file>
+
 <file path=ppt/theme/theme1.xml><?xml version="1.0" encoding="utf-8"?>
 <a:theme xmlns:a="http://schemas.openxmlformats.org/drawingml/2006/main" name="Office Theme">
   <a:themeElements>
